--- a/media/module7/slides.pptx
+++ b/media/module7/slides.pptx
@@ -36,6 +36,14 @@
     <p:sldId id="284" r:id="rId36"/>
     <p:sldId id="285" r:id="rId37"/>
     <p:sldId id="286" r:id="rId38"/>
+    <p:sldId id="287" r:id="rId39"/>
+    <p:sldId id="288" r:id="rId40"/>
+    <p:sldId id="289" r:id="rId41"/>
+    <p:sldId id="290" r:id="rId42"/>
+    <p:sldId id="291" r:id="rId43"/>
+    <p:sldId id="292" r:id="rId44"/>
+    <p:sldId id="293" r:id="rId45"/>
+    <p:sldId id="294" r:id="rId46"/>
   </p:sldIdLst>
   <p:sldSz cx="12191695" cy="6858000" type="screen4x3"/>
   <p:notesSz cx="6858000" cy="9144000"/>
@@ -532,7 +540,7 @@
           <a:lstStyle/>
           <a:p>
             <a:r>
-              <a:t>From MODULE7 Design Architecture.</a:t>
+              <a:t>From docs/MODULE7.md — read guides before running demos.</a:t>
             </a:r>
           </a:p>
         </p:txBody>
@@ -602,7 +610,7 @@
           <a:lstStyle/>
           <a:p>
             <a:r>
-              <a:t>Run from course repository root.</a:t>
+              <a:t>From MODULE7 Topics Covered.</a:t>
             </a:r>
           </a:p>
         </p:txBody>
@@ -672,7 +680,7 @@
           <a:lstStyle/>
           <a:p>
             <a:r>
-              <a:t>Hands-on: module7/examples/vip_design/</a:t>
+              <a:t>From MODULE7 Topics Covered.</a:t>
             </a:r>
           </a:p>
         </p:txBody>
@@ -742,7 +750,7 @@
           <a:lstStyle/>
           <a:p>
             <a:r>
-              <a:t>Hands-on: module7/examples/projects/</a:t>
+              <a:t>Full detail in docs/MODULE7.md command reference.</a:t>
             </a:r>
           </a:p>
         </p:txBody>
@@ -812,7 +820,7 @@
           <a:lstStyle/>
           <a:p>
             <a:r>
-              <a:t>Hands-on: module7/examples/best_practices/</a:t>
+              <a:t>Full detail in docs/MODULE7.md command reference.</a:t>
             </a:r>
           </a:p>
         </p:txBody>
@@ -882,7 +890,7 @@
           <a:lstStyle/>
           <a:p>
             <a:r>
-              <a:t>Hands-on: module7/examples/solutions/</a:t>
+              <a:t>Run from course repository root.</a:t>
             </a:r>
           </a:p>
         </p:txBody>
@@ -952,7 +960,7 @@
           <a:lstStyle/>
           <a:p>
             <a:r>
-              <a:t>Hands-on: module7/examples/validate/</a:t>
+              <a:t>Hands-on: module7/examples/vip_design/</a:t>
             </a:r>
           </a:p>
         </p:txBody>
@@ -1022,7 +1030,7 @@
           <a:lstStyle/>
           <a:p>
             <a:r>
-              <a:t>From MODULE7 Learning Outcomes.</a:t>
+              <a:t>Hands-on: module7/examples/projects/</a:t>
             </a:r>
           </a:p>
         </p:txBody>
@@ -1092,7 +1100,147 @@
           <a:lstStyle/>
           <a:p>
             <a:r>
-              <a:t>From MODULE7 Learning Outcomes.</a:t>
+              <a:t>Hands-on: module7/examples/best_practices/</a:t>
+            </a:r>
+          </a:p>
+        </p:txBody>
+      </p:sp>
+      <p:sp>
+        <p:nvSpPr>
+          <p:cNvPr id="4" name="Slide Number Placeholder 3"/>
+          <p:cNvSpPr>
+            <a:spLocks noGrp="1"/>
+          </p:cNvSpPr>
+          <p:nvPr>
+            <p:ph type="sldNum" idx="5" sz="quarter"/>
+          </p:nvPr>
+        </p:nvSpPr>
+        <p:spPr/>
+      </p:sp>
+    </p:spTree>
+  </p:cSld>
+  <p:clrMapOvr>
+    <a:masterClrMapping/>
+  </p:clrMapOvr>
+</p:notes>
+</file>
+
+<file path=ppt/notesSlides/notesSlide18.xml><?xml version="1.0" encoding="utf-8"?>
+<p:notes xmlns:a="http://schemas.openxmlformats.org/drawingml/2006/main" xmlns:p="http://schemas.openxmlformats.org/presentationml/2006/main" xmlns:r="http://schemas.openxmlformats.org/officeDocument/2006/relationships">
+  <p:cSld>
+    <p:spTree>
+      <p:nvGrpSpPr>
+        <p:cNvPr id="1" name=""/>
+        <p:cNvGrpSpPr/>
+        <p:nvPr/>
+      </p:nvGrpSpPr>
+      <p:grpSpPr>
+        <a:xfrm>
+          <a:off x="0" y="0"/>
+          <a:ext cx="0" cy="0"/>
+          <a:chOff x="0" y="0"/>
+          <a:chExt cx="0" cy="0"/>
+        </a:xfrm>
+      </p:grpSpPr>
+      <p:sp>
+        <p:nvSpPr>
+          <p:cNvPr id="2" name="Slide Image Placeholder 1"/>
+          <p:cNvSpPr>
+            <a:spLocks noGrp="1"/>
+          </p:cNvSpPr>
+          <p:nvPr>
+            <p:ph type="sldImg" idx="2"/>
+          </p:nvPr>
+        </p:nvSpPr>
+        <p:spPr/>
+      </p:sp>
+      <p:sp>
+        <p:nvSpPr>
+          <p:cNvPr id="3" name="Notes Placeholder 2"/>
+          <p:cNvSpPr>
+            <a:spLocks noGrp="1"/>
+          </p:cNvSpPr>
+          <p:nvPr>
+            <p:ph type="body" idx="3" sz="quarter"/>
+          </p:nvPr>
+        </p:nvSpPr>
+        <p:spPr/>
+        <p:txBody>
+          <a:bodyPr/>
+          <a:lstStyle/>
+          <a:p>
+            <a:r>
+              <a:t>Hands-on: module7/examples/solutions/</a:t>
+            </a:r>
+          </a:p>
+        </p:txBody>
+      </p:sp>
+      <p:sp>
+        <p:nvSpPr>
+          <p:cNvPr id="4" name="Slide Number Placeholder 3"/>
+          <p:cNvSpPr>
+            <a:spLocks noGrp="1"/>
+          </p:cNvSpPr>
+          <p:nvPr>
+            <p:ph type="sldNum" idx="5" sz="quarter"/>
+          </p:nvPr>
+        </p:nvSpPr>
+        <p:spPr/>
+      </p:sp>
+    </p:spTree>
+  </p:cSld>
+  <p:clrMapOvr>
+    <a:masterClrMapping/>
+  </p:clrMapOvr>
+</p:notes>
+</file>
+
+<file path=ppt/notesSlides/notesSlide19.xml><?xml version="1.0" encoding="utf-8"?>
+<p:notes xmlns:a="http://schemas.openxmlformats.org/drawingml/2006/main" xmlns:p="http://schemas.openxmlformats.org/presentationml/2006/main" xmlns:r="http://schemas.openxmlformats.org/officeDocument/2006/relationships">
+  <p:cSld>
+    <p:spTree>
+      <p:nvGrpSpPr>
+        <p:cNvPr id="1" name=""/>
+        <p:cNvGrpSpPr/>
+        <p:nvPr/>
+      </p:nvGrpSpPr>
+      <p:grpSpPr>
+        <a:xfrm>
+          <a:off x="0" y="0"/>
+          <a:ext cx="0" cy="0"/>
+          <a:chOff x="0" y="0"/>
+          <a:chExt cx="0" cy="0"/>
+        </a:xfrm>
+      </p:grpSpPr>
+      <p:sp>
+        <p:nvSpPr>
+          <p:cNvPr id="2" name="Slide Image Placeholder 1"/>
+          <p:cNvSpPr>
+            <a:spLocks noGrp="1"/>
+          </p:cNvSpPr>
+          <p:nvPr>
+            <p:ph type="sldImg" idx="2"/>
+          </p:nvPr>
+        </p:nvSpPr>
+        <p:spPr/>
+      </p:sp>
+      <p:sp>
+        <p:nvSpPr>
+          <p:cNvPr id="3" name="Notes Placeholder 2"/>
+          <p:cNvSpPr>
+            <a:spLocks noGrp="1"/>
+          </p:cNvSpPr>
+          <p:nvPr>
+            <p:ph type="body" idx="3" sz="quarter"/>
+          </p:nvPr>
+        </p:nvSpPr>
+        <p:spPr/>
+        <p:txBody>
+          <a:bodyPr/>
+          <a:lstStyle/>
+          <a:p>
+            <a:r>
+              <a:t>Hands-on: module7/examples/validate/</a:t>
             </a:r>
           </a:p>
         </p:txBody>
@@ -1187,6 +1335,146 @@
 </p:notes>
 </file>
 
+<file path=ppt/notesSlides/notesSlide20.xml><?xml version="1.0" encoding="utf-8"?>
+<p:notes xmlns:a="http://schemas.openxmlformats.org/drawingml/2006/main" xmlns:p="http://schemas.openxmlformats.org/presentationml/2006/main" xmlns:r="http://schemas.openxmlformats.org/officeDocument/2006/relationships">
+  <p:cSld>
+    <p:spTree>
+      <p:nvGrpSpPr>
+        <p:cNvPr id="1" name=""/>
+        <p:cNvGrpSpPr/>
+        <p:nvPr/>
+      </p:nvGrpSpPr>
+      <p:grpSpPr>
+        <a:xfrm>
+          <a:off x="0" y="0"/>
+          <a:ext cx="0" cy="0"/>
+          <a:chOff x="0" y="0"/>
+          <a:chExt cx="0" cy="0"/>
+        </a:xfrm>
+      </p:grpSpPr>
+      <p:sp>
+        <p:nvSpPr>
+          <p:cNvPr id="2" name="Slide Image Placeholder 1"/>
+          <p:cNvSpPr>
+            <a:spLocks noGrp="1"/>
+          </p:cNvSpPr>
+          <p:nvPr>
+            <p:ph type="sldImg" idx="2"/>
+          </p:nvPr>
+        </p:nvSpPr>
+        <p:spPr/>
+      </p:sp>
+      <p:sp>
+        <p:nvSpPr>
+          <p:cNvPr id="3" name="Notes Placeholder 2"/>
+          <p:cNvSpPr>
+            <a:spLocks noGrp="1"/>
+          </p:cNvSpPr>
+          <p:nvPr>
+            <p:ph type="body" idx="3" sz="quarter"/>
+          </p:nvPr>
+        </p:nvSpPr>
+        <p:spPr/>
+        <p:txBody>
+          <a:bodyPr/>
+          <a:lstStyle/>
+          <a:p>
+            <a:r>
+              <a:t>From MODULE7 Learning Outcomes.</a:t>
+            </a:r>
+          </a:p>
+        </p:txBody>
+      </p:sp>
+      <p:sp>
+        <p:nvSpPr>
+          <p:cNvPr id="4" name="Slide Number Placeholder 3"/>
+          <p:cNvSpPr>
+            <a:spLocks noGrp="1"/>
+          </p:cNvSpPr>
+          <p:nvPr>
+            <p:ph type="sldNum" idx="5" sz="quarter"/>
+          </p:nvPr>
+        </p:nvSpPr>
+        <p:spPr/>
+      </p:sp>
+    </p:spTree>
+  </p:cSld>
+  <p:clrMapOvr>
+    <a:masterClrMapping/>
+  </p:clrMapOvr>
+</p:notes>
+</file>
+
+<file path=ppt/notesSlides/notesSlide21.xml><?xml version="1.0" encoding="utf-8"?>
+<p:notes xmlns:a="http://schemas.openxmlformats.org/drawingml/2006/main" xmlns:p="http://schemas.openxmlformats.org/presentationml/2006/main" xmlns:r="http://schemas.openxmlformats.org/officeDocument/2006/relationships">
+  <p:cSld>
+    <p:spTree>
+      <p:nvGrpSpPr>
+        <p:cNvPr id="1" name=""/>
+        <p:cNvGrpSpPr/>
+        <p:nvPr/>
+      </p:nvGrpSpPr>
+      <p:grpSpPr>
+        <a:xfrm>
+          <a:off x="0" y="0"/>
+          <a:ext cx="0" cy="0"/>
+          <a:chOff x="0" y="0"/>
+          <a:chExt cx="0" cy="0"/>
+        </a:xfrm>
+      </p:grpSpPr>
+      <p:sp>
+        <p:nvSpPr>
+          <p:cNvPr id="2" name="Slide Image Placeholder 1"/>
+          <p:cNvSpPr>
+            <a:spLocks noGrp="1"/>
+          </p:cNvSpPr>
+          <p:nvPr>
+            <p:ph type="sldImg" idx="2"/>
+          </p:nvPr>
+        </p:nvSpPr>
+        <p:spPr/>
+      </p:sp>
+      <p:sp>
+        <p:nvSpPr>
+          <p:cNvPr id="3" name="Notes Placeholder 2"/>
+          <p:cNvSpPr>
+            <a:spLocks noGrp="1"/>
+          </p:cNvSpPr>
+          <p:nvPr>
+            <p:ph type="body" idx="3" sz="quarter"/>
+          </p:nvPr>
+        </p:nvSpPr>
+        <p:spPr/>
+        <p:txBody>
+          <a:bodyPr/>
+          <a:lstStyle/>
+          <a:p>
+            <a:r>
+              <a:t>From MODULE7 Learning Outcomes.</a:t>
+            </a:r>
+          </a:p>
+        </p:txBody>
+      </p:sp>
+      <p:sp>
+        <p:nvSpPr>
+          <p:cNvPr id="4" name="Slide Number Placeholder 3"/>
+          <p:cNvSpPr>
+            <a:spLocks noGrp="1"/>
+          </p:cNvSpPr>
+          <p:nvPr>
+            <p:ph type="sldNum" idx="5" sz="quarter"/>
+          </p:nvPr>
+        </p:nvSpPr>
+        <p:spPr/>
+      </p:sp>
+    </p:spTree>
+  </p:cSld>
+  <p:clrMapOvr>
+    <a:masterClrMapping/>
+  </p:clrMapOvr>
+</p:notes>
+</file>
+
 <file path=ppt/notesSlides/notesSlide3.xml><?xml version="1.0" encoding="utf-8"?>
 <p:notes xmlns:a="http://schemas.openxmlformats.org/drawingml/2006/main" xmlns:p="http://schemas.openxmlformats.org/presentationml/2006/main" xmlns:r="http://schemas.openxmlformats.org/officeDocument/2006/relationships">
   <p:cSld>
@@ -1302,7 +1590,7 @@
           <a:lstStyle/>
           <a:p>
             <a:r>
-              <a:t>From MODULE7 Verification &amp; Testing Methods.</a:t>
+              <a:t>From MODULE7 Design Architecture.</a:t>
             </a:r>
           </a:p>
         </p:txBody>
@@ -1372,7 +1660,7 @@
           <a:lstStyle/>
           <a:p>
             <a:r>
-              <a:t>From MODULE7 Verification &amp; Testing Methods.</a:t>
+              <a:t>Trace while running module7/EXAMPLES.md labs.</a:t>
             </a:r>
           </a:p>
         </p:txBody>
@@ -1512,7 +1800,7 @@
           <a:lstStyle/>
           <a:p>
             <a:r>
-              <a:t>From MODULE7 Topics Covered.</a:t>
+              <a:t>From MODULE7 Verification &amp; Testing Methods.</a:t>
             </a:r>
           </a:p>
         </p:txBody>
@@ -1582,7 +1870,7 @@
           <a:lstStyle/>
           <a:p>
             <a:r>
-              <a:t>From MODULE7 Topics Covered.</a:t>
+              <a:t>From MODULE7 Verification &amp; Testing Methods.</a:t>
             </a:r>
           </a:p>
         </p:txBody>
@@ -4810,7 +5098,7 @@
               </a:defRPr>
             </a:pPr>
             <a:r>
-              <a:t>VIP design template</a:t>
+              <a:t>2. VIP package architecture</a:t>
             </a:r>
           </a:p>
         </p:txBody>
@@ -4823,15 +5111,13 @@
         </p:nvSpPr>
         <p:spPr>
           <a:xfrm>
-            <a:off x="548640" y="1143000"/>
-            <a:ext cx="11064240" cy="5029200"/>
+            <a:off x="548640" y="1234440"/>
+            <a:ext cx="5303520" cy="4754880"/>
           </a:xfrm>
           <a:prstGeom prst="rect">
             <a:avLst/>
           </a:prstGeom>
-          <a:solidFill>
-            <a:srgbClr val="F4F4F4"/>
-          </a:solidFill>
+          <a:noFill/>
         </p:spPr>
         <p:txBody>
           <a:bodyPr wrap="square">
@@ -4844,329 +5130,200 @@
                 <a:spcPts val="2200"/>
               </a:lnSpc>
               <a:spcAft>
-                <a:spcPts val="400"/>
-              </a:spcAft>
-              <a:defRPr sz="2000" b="0">
-                <a:solidFill>
-                  <a:srgbClr val="333333"/>
-                </a:solidFill>
-                <a:latin typeface="Consolas"/>
-              </a:defRPr>
-            </a:pPr>
-            <a:r>
-              <a:t># Verification IP (VIP) Design Plan (Module 7)</a:t>
-            </a:r>
-          </a:p>
-          <a:p>
-            <a:pPr>
-              <a:lnSpc>
-                <a:spcPts val="2200"/>
-              </a:lnSpc>
-              <a:spcAft>
-                <a:spcPts val="400"/>
-              </a:spcAft>
-              <a:defRPr sz="2000" b="0">
-                <a:solidFill>
-                  <a:srgbClr val="333333"/>
-                </a:solidFill>
-                <a:latin typeface="Consolas"/>
-              </a:defRPr>
-            </a:pPr>
-          </a:p>
-          <a:p>
-            <a:pPr>
-              <a:lnSpc>
-                <a:spcPts val="2200"/>
-              </a:lnSpc>
-              <a:spcAft>
-                <a:spcPts val="400"/>
-              </a:spcAft>
-              <a:defRPr sz="2000" b="0">
-                <a:solidFill>
-                  <a:srgbClr val="333333"/>
-                </a:solidFill>
-                <a:latin typeface="Consolas"/>
-              </a:defRPr>
-            </a:pPr>
-            <a:r>
-              <a:t>&gt; **Purpose**: Design and document a reusable Verification IP (VIP) for</a:t>
-            </a:r>
-          </a:p>
-          <a:p>
-            <a:pPr>
-              <a:lnSpc>
-                <a:spcPts val="2200"/>
-              </a:lnSpc>
-              <a:spcAft>
-                <a:spcPts val="400"/>
-              </a:spcAft>
-              <a:defRPr sz="2000" b="0">
-                <a:solidFill>
-                  <a:srgbClr val="333333"/>
-                </a:solidFill>
-                <a:latin typeface="Consolas"/>
-              </a:defRPr>
-            </a:pPr>
-            <a:r>
-              <a:t>a chosen protocol or IP block.</a:t>
-            </a:r>
-          </a:p>
-          <a:p>
-            <a:pPr>
-              <a:lnSpc>
-                <a:spcPts val="2200"/>
-              </a:lnSpc>
-              <a:spcAft>
-                <a:spcPts val="400"/>
-              </a:spcAft>
-              <a:defRPr sz="2000" b="0">
-                <a:solidFill>
-                  <a:srgbClr val="333333"/>
-                </a:solidFill>
-                <a:latin typeface="Consolas"/>
-              </a:defRPr>
-            </a:pPr>
-            <a:r>
-              <a:t>&gt; **Module**: 7 – Real-World Verification Applications &amp; VIP (SV/UVM)</a:t>
-            </a:r>
-          </a:p>
-          <a:p>
-            <a:pPr>
-              <a:lnSpc>
-                <a:spcPts val="2200"/>
-              </a:lnSpc>
-              <a:spcAft>
-                <a:spcPts val="400"/>
-              </a:spcAft>
-              <a:defRPr sz="2000" b="0">
-                <a:solidFill>
-                  <a:srgbClr val="333333"/>
-                </a:solidFill>
-                <a:latin typeface="Consolas"/>
-              </a:defRPr>
-            </a:pPr>
-          </a:p>
-          <a:p>
-            <a:pPr>
-              <a:lnSpc>
-                <a:spcPts val="2200"/>
-              </a:lnSpc>
-              <a:spcAft>
-                <a:spcPts val="400"/>
-              </a:spcAft>
-              <a:defRPr sz="2000" b="0">
-                <a:solidFill>
-                  <a:srgbClr val="333333"/>
-                </a:solidFill>
-                <a:latin typeface="Consolas"/>
-              </a:defRPr>
-            </a:pPr>
-            <a:r>
-              <a:t>&gt; **Instructions**: Fill in this document for your design. Copy from</a:t>
-            </a:r>
-          </a:p>
-          <a:p>
-            <a:pPr>
-              <a:lnSpc>
-                <a:spcPts val="2200"/>
-              </a:lnSpc>
-              <a:spcAft>
-                <a:spcPts val="400"/>
-              </a:spcAft>
-              <a:defRPr sz="2000" b="0">
-                <a:solidFill>
-                  <a:srgbClr val="333333"/>
-                </a:solidFill>
-                <a:latin typeface="Consolas"/>
-              </a:defRPr>
-            </a:pPr>
-            <a:r>
-              <a:t>`module7/templates/` if needed, or edit the file in `module7/` directly.</a:t>
-            </a:r>
-          </a:p>
-          <a:p>
-            <a:pPr>
-              <a:lnSpc>
-                <a:spcPts val="2200"/>
-              </a:lnSpc>
-              <a:spcAft>
-                <a:spcPts val="400"/>
-              </a:spcAft>
-              <a:defRPr sz="2000" b="0">
-                <a:solidFill>
-                  <a:srgbClr val="333333"/>
-                </a:solidFill>
-                <a:latin typeface="Consolas"/>
-              </a:defRPr>
-            </a:pPr>
-            <a:r>
-              <a:t>Reference: `module7/.solutions/`.</a:t>
-            </a:r>
-          </a:p>
-          <a:p>
-            <a:pPr>
-              <a:lnSpc>
-                <a:spcPts val="2200"/>
-              </a:lnSpc>
-              <a:spcAft>
-                <a:spcPts val="400"/>
-              </a:spcAft>
-              <a:defRPr sz="2000" b="0">
-                <a:solidFill>
-                  <a:srgbClr val="333333"/>
-                </a:solidFill>
-                <a:latin typeface="Consolas"/>
-              </a:defRPr>
-            </a:pPr>
-          </a:p>
-          <a:p>
-            <a:pPr>
-              <a:lnSpc>
-                <a:spcPts val="2200"/>
-              </a:lnSpc>
-              <a:spcAft>
-                <a:spcPts val="400"/>
-              </a:spcAft>
-              <a:defRPr sz="2000" b="0">
-                <a:solidFill>
-                  <a:srgbClr val="333333"/>
-                </a:solidFill>
-                <a:latin typeface="Consolas"/>
-              </a:defRPr>
-            </a:pPr>
-            <a:r>
-              <a:t>## 1. VIP Overview</a:t>
-            </a:r>
-          </a:p>
-          <a:p>
-            <a:pPr>
-              <a:lnSpc>
-                <a:spcPts val="2200"/>
-              </a:lnSpc>
-              <a:spcAft>
-                <a:spcPts val="400"/>
-              </a:spcAft>
-              <a:defRPr sz="2000" b="0">
-                <a:solidFill>
-                  <a:srgbClr val="333333"/>
-                </a:solidFill>
-                <a:latin typeface="Consolas"/>
-              </a:defRPr>
-            </a:pPr>
-          </a:p>
-          <a:p>
-            <a:pPr>
-              <a:lnSpc>
-                <a:spcPts val="2200"/>
-              </a:lnSpc>
-              <a:spcAft>
-                <a:spcPts val="400"/>
-              </a:spcAft>
-              <a:defRPr sz="2000" b="0">
-                <a:solidFill>
-                  <a:srgbClr val="333333"/>
-                </a:solidFill>
-                <a:latin typeface="Consolas"/>
-              </a:defRPr>
-            </a:pPr>
-            <a:r>
-              <a:t>&lt;!-- TODO: Protocol/IP name, intended use. What this VIP should enable</a:t>
-            </a:r>
-          </a:p>
-          <a:p>
-            <a:pPr>
-              <a:lnSpc>
-                <a:spcPts val="2200"/>
-              </a:lnSpc>
-              <a:spcAft>
-                <a:spcPts val="400"/>
-              </a:spcAft>
-              <a:defRPr sz="2000" b="0">
-                <a:solidFill>
-                  <a:srgbClr val="333333"/>
-                </a:solidFill>
-                <a:latin typeface="Consolas"/>
-              </a:defRPr>
-            </a:pPr>
-            <a:r>
-              <a:t>users to do (drive, observe, check, measure, configure). --&gt;</a:t>
-            </a:r>
-          </a:p>
-          <a:p>
-            <a:pPr>
-              <a:lnSpc>
-                <a:spcPts val="2200"/>
-              </a:lnSpc>
-              <a:spcAft>
-                <a:spcPts val="400"/>
-              </a:spcAft>
-              <a:defRPr sz="2000" b="0">
-                <a:solidFill>
-                  <a:srgbClr val="333333"/>
-                </a:solidFill>
-                <a:latin typeface="Consolas"/>
-              </a:defRPr>
-            </a:pPr>
-          </a:p>
-          <a:p>
-            <a:pPr>
-              <a:lnSpc>
-                <a:spcPts val="2200"/>
-              </a:lnSpc>
-              <a:spcAft>
-                <a:spcPts val="400"/>
-              </a:spcAft>
-              <a:defRPr sz="2000" b="0">
-                <a:solidFill>
-                  <a:srgbClr val="333333"/>
-                </a:solidFill>
-                <a:latin typeface="Consolas"/>
-              </a:defRPr>
-            </a:pPr>
-            <a:r>
-              <a:t>## 2. VIP Components</a:t>
-            </a:r>
-          </a:p>
-          <a:p>
-            <a:pPr>
-              <a:lnSpc>
-                <a:spcPts val="2200"/>
-              </a:lnSpc>
-              <a:spcAft>
-                <a:spcPts val="400"/>
-              </a:spcAft>
-              <a:defRPr sz="2000" b="0">
-                <a:solidFill>
-                  <a:srgbClr val="333333"/>
-                </a:solidFill>
-                <a:latin typeface="Consolas"/>
-              </a:defRPr>
-            </a:pPr>
-          </a:p>
-          <a:p>
-            <a:pPr>
-              <a:lnSpc>
-                <a:spcPts val="2200"/>
-              </a:lnSpc>
-              <a:spcAft>
-                <a:spcPts val="400"/>
-              </a:spcAft>
-              <a:defRPr sz="2000" b="0">
-                <a:solidFill>
-                  <a:srgbClr val="333333"/>
-                </a:solidFill>
-                <a:latin typeface="Consolas"/>
-              </a:defRPr>
-            </a:pPr>
-            <a:r>
-              <a:t>&lt;!-- TODO: Table of Component ID, Type, Purpose. Location in codebase.</a:t>
-            </a:r>
-          </a:p>
-        </p:txBody>
-      </p:sp>
-      <p:sp>
-        <p:nvSpPr>
-          <p:cNvPr id="4" name="TextBox 3"/>
+                <a:spcPts val="1000"/>
+              </a:spcAft>
+              <a:defRPr sz="2000" b="0">
+                <a:solidFill>
+                  <a:srgbClr val="333333"/>
+                </a:solidFill>
+                <a:latin typeface="Calibri"/>
+              </a:defRPr>
+            </a:pPr>
+            <a:r>
+              <a:t>• Reusable VIP: agent, sequencer,</a:t>
+            </a:r>
+          </a:p>
+          <a:p>
+            <a:pPr>
+              <a:lnSpc>
+                <a:spcPts val="2200"/>
+              </a:lnSpc>
+              <a:spcAft>
+                <a:spcPts val="1000"/>
+              </a:spcAft>
+              <a:defRPr sz="2000" b="0">
+                <a:solidFill>
+                  <a:srgbClr val="333333"/>
+                </a:solidFill>
+                <a:latin typeface="Calibri"/>
+              </a:defRPr>
+            </a:pPr>
+            <a:r>
+              <a:t>      driver, monitor, checker,</a:t>
+            </a:r>
+          </a:p>
+          <a:p>
+            <a:pPr>
+              <a:lnSpc>
+                <a:spcPts val="2200"/>
+              </a:lnSpc>
+              <a:spcAft>
+                <a:spcPts val="1000"/>
+              </a:spcAft>
+              <a:defRPr sz="2000" b="0">
+                <a:solidFill>
+                  <a:srgbClr val="333333"/>
+                </a:solidFill>
+                <a:latin typeface="Calibri"/>
+              </a:defRPr>
+            </a:pPr>
+            <a:r>
+              <a:t>      coverage, config objects.</a:t>
+            </a:r>
+          </a:p>
+          <a:p>
+            <a:pPr>
+              <a:lnSpc>
+                <a:spcPts val="2200"/>
+              </a:lnSpc>
+              <a:spcAft>
+                <a:spcPts val="1000"/>
+              </a:spcAft>
+              <a:defRPr sz="2000" b="0">
+                <a:solidFill>
+                  <a:srgbClr val="333333"/>
+                </a:solidFill>
+                <a:latin typeface="Calibri"/>
+              </a:defRPr>
+            </a:pPr>
+            <a:r>
+              <a:t>• `VIP_DESIGN.md` defines public</a:t>
+            </a:r>
+          </a:p>
+          <a:p>
+            <a:pPr>
+              <a:lnSpc>
+                <a:spcPts val="2200"/>
+              </a:lnSpc>
+              <a:spcAft>
+                <a:spcPts val="1000"/>
+              </a:spcAft>
+              <a:defRPr sz="2000" b="0">
+                <a:solidFill>
+                  <a:srgbClr val="333333"/>
+                </a:solidFill>
+                <a:latin typeface="Calibri"/>
+              </a:defRPr>
+            </a:pPr>
+            <a:r>
+              <a:t>      API, sequences, and integration</a:t>
+            </a:r>
+          </a:p>
+          <a:p>
+            <a:pPr>
+              <a:lnSpc>
+                <a:spcPts val="2200"/>
+              </a:lnSpc>
+              <a:spcAft>
+                <a:spcPts val="1000"/>
+              </a:spcAft>
+              <a:defRPr sz="2000" b="0">
+                <a:solidFill>
+                  <a:srgbClr val="333333"/>
+                </a:solidFill>
+                <a:latin typeface="Calibri"/>
+              </a:defRPr>
+            </a:pPr>
+            <a:r>
+              <a:t>      guide for adopters.</a:t>
+            </a:r>
+          </a:p>
+          <a:p>
+            <a:pPr>
+              <a:lnSpc>
+                <a:spcPts val="2200"/>
+              </a:lnSpc>
+              <a:spcAft>
+                <a:spcPts val="1000"/>
+              </a:spcAft>
+              <a:defRPr sz="2000" b="0">
+                <a:solidFill>
+                  <a:srgbClr val="333333"/>
+                </a:solidFill>
+                <a:latin typeface="Calibri"/>
+              </a:defRPr>
+            </a:pPr>
+            <a:r>
+              <a:t>• Package boundaries: what</a:t>
+            </a:r>
+          </a:p>
+          <a:p>
+            <a:pPr>
+              <a:lnSpc>
+                <a:spcPts val="2200"/>
+              </a:lnSpc>
+              <a:spcAft>
+                <a:spcPts val="1000"/>
+              </a:spcAft>
+              <a:defRPr sz="2000" b="0">
+                <a:solidFill>
+                  <a:srgbClr val="333333"/>
+                </a:solidFill>
+                <a:latin typeface="Calibri"/>
+              </a:defRPr>
+            </a:pPr>
+            <a:r>
+              <a:t>      integrators configure vs what</a:t>
+            </a:r>
+          </a:p>
+          <a:p>
+            <a:pPr>
+              <a:lnSpc>
+                <a:spcPts val="2200"/>
+              </a:lnSpc>
+              <a:spcAft>
+                <a:spcPts val="1000"/>
+              </a:spcAft>
+              <a:defRPr sz="2000" b="0">
+                <a:solidFill>
+                  <a:srgbClr val="333333"/>
+                </a:solidFill>
+                <a:latin typeface="Calibri"/>
+              </a:defRPr>
+            </a:pPr>
+            <a:r>
+              <a:t>      VIP owns internally.</a:t>
+            </a:r>
+          </a:p>
+        </p:txBody>
+      </p:sp>
+      <p:pic>
+        <p:nvPicPr>
+          <p:cNvPr id="4" name="Picture 3" descr="verification_architecture.png"/>
+          <p:cNvPicPr>
+            <a:picLocks noChangeAspect="1"/>
+          </p:cNvPicPr>
+          <p:nvPr/>
+        </p:nvPicPr>
+        <p:blipFill>
+          <a:blip r:embed="rId2"/>
+          <a:stretch>
+            <a:fillRect/>
+          </a:stretch>
+        </p:blipFill>
+        <p:spPr>
+          <a:xfrm>
+            <a:off x="6172200" y="2094547"/>
+            <a:ext cx="5394960" cy="3034665"/>
+          </a:xfrm>
+          <a:prstGeom prst="rect">
+            <a:avLst/>
+          </a:prstGeom>
+        </p:spPr>
+      </p:pic>
+      <p:sp>
+        <p:nvSpPr>
+          <p:cNvPr id="5" name="TextBox 4"/>
           <p:cNvSpPr txBox="1"/>
           <p:nvPr/>
         </p:nvSpPr>
@@ -5229,8 +5386,8 @@
         </p:nvSpPr>
         <p:spPr>
           <a:xfrm>
-            <a:off x="548640" y="2743200"/>
-            <a:ext cx="11064240" cy="1371600"/>
+            <a:off x="548640" y="411480"/>
+            <a:ext cx="11064240" cy="777240"/>
           </a:xfrm>
           <a:prstGeom prst="rect">
             <a:avLst/>
@@ -5243,11 +5400,11 @@
           </a:bodyPr>
           <a:lstStyle/>
           <a:p>
-            <a:pPr algn="ctr">
-              <a:lnSpc>
-                <a:spcPts val="2200"/>
-              </a:lnSpc>
-              <a:defRPr sz="3600" b="1">
+            <a:pPr>
+              <a:lnSpc>
+                <a:spcPts val="2200"/>
+              </a:lnSpc>
+              <a:defRPr sz="2800" b="1">
                 <a:solidFill>
                   <a:srgbClr val="1A1A2E"/>
                 </a:solidFill>
@@ -5255,7 +5412,7 @@
               </a:defRPr>
             </a:pPr>
             <a:r>
-              <a:t>Verification &amp; testing methods</a:t>
+              <a:t>3. Production layout</a:t>
             </a:r>
           </a:p>
         </p:txBody>
@@ -5263,6 +5420,67 @@
       <p:sp>
         <p:nvSpPr>
           <p:cNvPr id="3" name="TextBox 2"/>
+          <p:cNvSpPr txBox="1"/>
+          <p:nvPr/>
+        </p:nvSpPr>
+        <p:spPr>
+          <a:xfrm>
+            <a:off x="548640" y="1234440"/>
+            <a:ext cx="11064240" cy="4937760"/>
+          </a:xfrm>
+          <a:prstGeom prst="rect">
+            <a:avLst/>
+          </a:prstGeom>
+          <a:noFill/>
+        </p:spPr>
+        <p:txBody>
+          <a:bodyPr wrap="square">
+            <a:noAutofit/>
+          </a:bodyPr>
+          <a:lstStyle/>
+          <a:p>
+            <a:pPr>
+              <a:lnSpc>
+                <a:spcPts val="2200"/>
+              </a:lnSpc>
+              <a:spcAft>
+                <a:spcPts val="1000"/>
+              </a:spcAft>
+              <a:defRPr sz="2000" b="0">
+                <a:solidFill>
+                  <a:srgbClr val="333333"/>
+                </a:solidFill>
+                <a:latin typeface="Calibri"/>
+              </a:defRPr>
+            </a:pPr>
+            <a:r>
+              <a:t>• Separate `rtl/`, `tb/`, `tests/`, `docs/` with</a:t>
+            </a:r>
+          </a:p>
+          <a:p>
+            <a:pPr>
+              <a:lnSpc>
+                <a:spcPts val="2200"/>
+              </a:lnSpc>
+              <a:spcAft>
+                <a:spcPts val="1000"/>
+              </a:spcAft>
+              <a:defRPr sz="2000" b="0">
+                <a:solidFill>
+                  <a:srgbClr val="333333"/>
+                </a:solidFill>
+                <a:latin typeface="Calibri"/>
+              </a:defRPr>
+            </a:pPr>
+            <a:r>
+              <a:t>      consistent naming for handoff to another team.</a:t>
+            </a:r>
+          </a:p>
+        </p:txBody>
+      </p:sp>
+      <p:sp>
+        <p:nvSpPr>
+          <p:cNvPr id="4" name="TextBox 3"/>
           <p:cNvSpPr txBox="1"/>
           <p:nvPr/>
         </p:nvSpPr>
@@ -5351,7 +5569,7 @@
               </a:defRPr>
             </a:pPr>
             <a:r>
-              <a:t>1. End-to-end IP verification</a:t>
+              <a:t>VIP design template</a:t>
             </a:r>
           </a:p>
         </p:txBody>
@@ -5364,13 +5582,15 @@
         </p:nvSpPr>
         <p:spPr>
           <a:xfrm>
-            <a:off x="548640" y="1234440"/>
-            <a:ext cx="5303520" cy="4754880"/>
+            <a:off x="548640" y="1143000"/>
+            <a:ext cx="11064240" cy="5029200"/>
           </a:xfrm>
           <a:prstGeom prst="rect">
             <a:avLst/>
           </a:prstGeom>
-          <a:noFill/>
+          <a:solidFill>
+            <a:srgbClr val="F4F4F4"/>
+          </a:solidFill>
         </p:spPr>
         <p:txBody>
           <a:bodyPr wrap="square">
@@ -5383,143 +5603,329 @@
                 <a:spcPts val="2200"/>
               </a:lnSpc>
               <a:spcAft>
-                <a:spcPts val="1000"/>
-              </a:spcAft>
-              <a:defRPr sz="2000" b="0">
-                <a:solidFill>
-                  <a:srgbClr val="333333"/>
-                </a:solidFill>
-                <a:latin typeface="Calibri"/>
-              </a:defRPr>
-            </a:pPr>
-            <a:r>
-              <a:t>• Full lifecycle: requirements →</a:t>
-            </a:r>
-          </a:p>
-          <a:p>
-            <a:pPr>
-              <a:lnSpc>
-                <a:spcPts val="2200"/>
-              </a:lnSpc>
-              <a:spcAft>
-                <a:spcPts val="1000"/>
-              </a:spcAft>
-              <a:defRPr sz="2000" b="0">
-                <a:solidFill>
-                  <a:srgbClr val="333333"/>
-                </a:solidFill>
-                <a:latin typeface="Calibri"/>
-              </a:defRPr>
-            </a:pPr>
-            <a:r>
-              <a:t>      env → tests → coverage →</a:t>
-            </a:r>
-          </a:p>
-          <a:p>
-            <a:pPr>
-              <a:lnSpc>
-                <a:spcPts val="2200"/>
-              </a:lnSpc>
-              <a:spcAft>
-                <a:spcPts val="1000"/>
-              </a:spcAft>
-              <a:defRPr sz="2000" b="0">
-                <a:solidFill>
-                  <a:srgbClr val="333333"/>
-                </a:solidFill>
-                <a:latin typeface="Calibri"/>
-              </a:defRPr>
-            </a:pPr>
-            <a:r>
-              <a:t>      regressions → sign-off preview.</a:t>
-            </a:r>
-          </a:p>
-          <a:p>
-            <a:pPr>
-              <a:lnSpc>
-                <a:spcPts val="2200"/>
-              </a:lnSpc>
-              <a:spcAft>
-                <a:spcPts val="1000"/>
-              </a:spcAft>
-              <a:defRPr sz="2000" b="0">
-                <a:solidFill>
-                  <a:srgbClr val="333333"/>
-                </a:solidFill>
-                <a:latin typeface="Calibri"/>
-              </a:defRPr>
-            </a:pPr>
-            <a:r>
-              <a:t>• Regression tiers and coverage</a:t>
-            </a:r>
-          </a:p>
-          <a:p>
-            <a:pPr>
-              <a:lnSpc>
-                <a:spcPts val="2200"/>
-              </a:lnSpc>
-              <a:spcAft>
-                <a:spcPts val="1000"/>
-              </a:spcAft>
-              <a:defRPr sz="2000" b="0">
-                <a:solidFill>
-                  <a:srgbClr val="333333"/>
-                </a:solidFill>
-                <a:latin typeface="Calibri"/>
-              </a:defRPr>
-            </a:pPr>
-            <a:r>
-              <a:t>      goals match production</a:t>
-            </a:r>
-          </a:p>
-          <a:p>
-            <a:pPr>
-              <a:lnSpc>
-                <a:spcPts val="2200"/>
-              </a:lnSpc>
-              <a:spcAft>
-                <a:spcPts val="1000"/>
-              </a:spcAft>
-              <a:defRPr sz="2000" b="0">
-                <a:solidFill>
-                  <a:srgbClr val="333333"/>
-                </a:solidFill>
-                <a:latin typeface="Calibri"/>
-              </a:defRPr>
-            </a:pPr>
-            <a:r>
-              <a:t>      expectations.</a:t>
-            </a:r>
-          </a:p>
-        </p:txBody>
-      </p:sp>
-      <p:pic>
-        <p:nvPicPr>
-          <p:cNvPr id="4" name="Picture 3" descr="testing_methods.png"/>
-          <p:cNvPicPr>
-            <a:picLocks noChangeAspect="1"/>
-          </p:cNvPicPr>
-          <p:nvPr/>
-        </p:nvPicPr>
-        <p:blipFill>
-          <a:blip r:embed="rId2"/>
-          <a:stretch>
-            <a:fillRect/>
-          </a:stretch>
-        </p:blipFill>
-        <p:spPr>
-          <a:xfrm>
-            <a:off x="6172200" y="2094547"/>
-            <a:ext cx="5394960" cy="3034665"/>
-          </a:xfrm>
-          <a:prstGeom prst="rect">
-            <a:avLst/>
-          </a:prstGeom>
-        </p:spPr>
-      </p:pic>
-      <p:sp>
-        <p:nvSpPr>
-          <p:cNvPr id="5" name="TextBox 4"/>
+                <a:spcPts val="400"/>
+              </a:spcAft>
+              <a:defRPr sz="2000" b="0">
+                <a:solidFill>
+                  <a:srgbClr val="333333"/>
+                </a:solidFill>
+                <a:latin typeface="Consolas"/>
+              </a:defRPr>
+            </a:pPr>
+            <a:r>
+              <a:t># Verification IP (VIP) Design Plan (Module 7)</a:t>
+            </a:r>
+          </a:p>
+          <a:p>
+            <a:pPr>
+              <a:lnSpc>
+                <a:spcPts val="2200"/>
+              </a:lnSpc>
+              <a:spcAft>
+                <a:spcPts val="400"/>
+              </a:spcAft>
+              <a:defRPr sz="2000" b="0">
+                <a:solidFill>
+                  <a:srgbClr val="333333"/>
+                </a:solidFill>
+                <a:latin typeface="Consolas"/>
+              </a:defRPr>
+            </a:pPr>
+          </a:p>
+          <a:p>
+            <a:pPr>
+              <a:lnSpc>
+                <a:spcPts val="2200"/>
+              </a:lnSpc>
+              <a:spcAft>
+                <a:spcPts val="400"/>
+              </a:spcAft>
+              <a:defRPr sz="2000" b="0">
+                <a:solidFill>
+                  <a:srgbClr val="333333"/>
+                </a:solidFill>
+                <a:latin typeface="Consolas"/>
+              </a:defRPr>
+            </a:pPr>
+            <a:r>
+              <a:t>&gt; **Purpose**: Design and document a reusable Verification IP (VIP) for</a:t>
+            </a:r>
+          </a:p>
+          <a:p>
+            <a:pPr>
+              <a:lnSpc>
+                <a:spcPts val="2200"/>
+              </a:lnSpc>
+              <a:spcAft>
+                <a:spcPts val="400"/>
+              </a:spcAft>
+              <a:defRPr sz="2000" b="0">
+                <a:solidFill>
+                  <a:srgbClr val="333333"/>
+                </a:solidFill>
+                <a:latin typeface="Consolas"/>
+              </a:defRPr>
+            </a:pPr>
+            <a:r>
+              <a:t>a chosen protocol or IP block.</a:t>
+            </a:r>
+          </a:p>
+          <a:p>
+            <a:pPr>
+              <a:lnSpc>
+                <a:spcPts val="2200"/>
+              </a:lnSpc>
+              <a:spcAft>
+                <a:spcPts val="400"/>
+              </a:spcAft>
+              <a:defRPr sz="2000" b="0">
+                <a:solidFill>
+                  <a:srgbClr val="333333"/>
+                </a:solidFill>
+                <a:latin typeface="Consolas"/>
+              </a:defRPr>
+            </a:pPr>
+            <a:r>
+              <a:t>&gt; **Module**: 7 – Real-World Verification Applications &amp; VIP (SV/UVM)</a:t>
+            </a:r>
+          </a:p>
+          <a:p>
+            <a:pPr>
+              <a:lnSpc>
+                <a:spcPts val="2200"/>
+              </a:lnSpc>
+              <a:spcAft>
+                <a:spcPts val="400"/>
+              </a:spcAft>
+              <a:defRPr sz="2000" b="0">
+                <a:solidFill>
+                  <a:srgbClr val="333333"/>
+                </a:solidFill>
+                <a:latin typeface="Consolas"/>
+              </a:defRPr>
+            </a:pPr>
+          </a:p>
+          <a:p>
+            <a:pPr>
+              <a:lnSpc>
+                <a:spcPts val="2200"/>
+              </a:lnSpc>
+              <a:spcAft>
+                <a:spcPts val="400"/>
+              </a:spcAft>
+              <a:defRPr sz="2000" b="0">
+                <a:solidFill>
+                  <a:srgbClr val="333333"/>
+                </a:solidFill>
+                <a:latin typeface="Consolas"/>
+              </a:defRPr>
+            </a:pPr>
+            <a:r>
+              <a:t>&gt; **Instructions**: Fill in this document for your design. Copy from</a:t>
+            </a:r>
+          </a:p>
+          <a:p>
+            <a:pPr>
+              <a:lnSpc>
+                <a:spcPts val="2200"/>
+              </a:lnSpc>
+              <a:spcAft>
+                <a:spcPts val="400"/>
+              </a:spcAft>
+              <a:defRPr sz="2000" b="0">
+                <a:solidFill>
+                  <a:srgbClr val="333333"/>
+                </a:solidFill>
+                <a:latin typeface="Consolas"/>
+              </a:defRPr>
+            </a:pPr>
+            <a:r>
+              <a:t>`module7/templates/` if needed, or edit the file in `module7/` directly.</a:t>
+            </a:r>
+          </a:p>
+          <a:p>
+            <a:pPr>
+              <a:lnSpc>
+                <a:spcPts val="2200"/>
+              </a:lnSpc>
+              <a:spcAft>
+                <a:spcPts val="400"/>
+              </a:spcAft>
+              <a:defRPr sz="2000" b="0">
+                <a:solidFill>
+                  <a:srgbClr val="333333"/>
+                </a:solidFill>
+                <a:latin typeface="Consolas"/>
+              </a:defRPr>
+            </a:pPr>
+            <a:r>
+              <a:t>Reference: `module7/.solutions/`.</a:t>
+            </a:r>
+          </a:p>
+          <a:p>
+            <a:pPr>
+              <a:lnSpc>
+                <a:spcPts val="2200"/>
+              </a:lnSpc>
+              <a:spcAft>
+                <a:spcPts val="400"/>
+              </a:spcAft>
+              <a:defRPr sz="2000" b="0">
+                <a:solidFill>
+                  <a:srgbClr val="333333"/>
+                </a:solidFill>
+                <a:latin typeface="Consolas"/>
+              </a:defRPr>
+            </a:pPr>
+          </a:p>
+          <a:p>
+            <a:pPr>
+              <a:lnSpc>
+                <a:spcPts val="2200"/>
+              </a:lnSpc>
+              <a:spcAft>
+                <a:spcPts val="400"/>
+              </a:spcAft>
+              <a:defRPr sz="2000" b="0">
+                <a:solidFill>
+                  <a:srgbClr val="333333"/>
+                </a:solidFill>
+                <a:latin typeface="Consolas"/>
+              </a:defRPr>
+            </a:pPr>
+            <a:r>
+              <a:t>## 1. VIP Overview</a:t>
+            </a:r>
+          </a:p>
+          <a:p>
+            <a:pPr>
+              <a:lnSpc>
+                <a:spcPts val="2200"/>
+              </a:lnSpc>
+              <a:spcAft>
+                <a:spcPts val="400"/>
+              </a:spcAft>
+              <a:defRPr sz="2000" b="0">
+                <a:solidFill>
+                  <a:srgbClr val="333333"/>
+                </a:solidFill>
+                <a:latin typeface="Consolas"/>
+              </a:defRPr>
+            </a:pPr>
+          </a:p>
+          <a:p>
+            <a:pPr>
+              <a:lnSpc>
+                <a:spcPts val="2200"/>
+              </a:lnSpc>
+              <a:spcAft>
+                <a:spcPts val="400"/>
+              </a:spcAft>
+              <a:defRPr sz="2000" b="0">
+                <a:solidFill>
+                  <a:srgbClr val="333333"/>
+                </a:solidFill>
+                <a:latin typeface="Consolas"/>
+              </a:defRPr>
+            </a:pPr>
+            <a:r>
+              <a:t>&lt;!-- TODO: Protocol/IP name, intended use. What this VIP should enable</a:t>
+            </a:r>
+          </a:p>
+          <a:p>
+            <a:pPr>
+              <a:lnSpc>
+                <a:spcPts val="2200"/>
+              </a:lnSpc>
+              <a:spcAft>
+                <a:spcPts val="400"/>
+              </a:spcAft>
+              <a:defRPr sz="2000" b="0">
+                <a:solidFill>
+                  <a:srgbClr val="333333"/>
+                </a:solidFill>
+                <a:latin typeface="Consolas"/>
+              </a:defRPr>
+            </a:pPr>
+            <a:r>
+              <a:t>users to do (drive, observe, check, measure, configure). --&gt;</a:t>
+            </a:r>
+          </a:p>
+          <a:p>
+            <a:pPr>
+              <a:lnSpc>
+                <a:spcPts val="2200"/>
+              </a:lnSpc>
+              <a:spcAft>
+                <a:spcPts val="400"/>
+              </a:spcAft>
+              <a:defRPr sz="2000" b="0">
+                <a:solidFill>
+                  <a:srgbClr val="333333"/>
+                </a:solidFill>
+                <a:latin typeface="Consolas"/>
+              </a:defRPr>
+            </a:pPr>
+          </a:p>
+          <a:p>
+            <a:pPr>
+              <a:lnSpc>
+                <a:spcPts val="2200"/>
+              </a:lnSpc>
+              <a:spcAft>
+                <a:spcPts val="400"/>
+              </a:spcAft>
+              <a:defRPr sz="2000" b="0">
+                <a:solidFill>
+                  <a:srgbClr val="333333"/>
+                </a:solidFill>
+                <a:latin typeface="Consolas"/>
+              </a:defRPr>
+            </a:pPr>
+            <a:r>
+              <a:t>## 2. VIP Components</a:t>
+            </a:r>
+          </a:p>
+          <a:p>
+            <a:pPr>
+              <a:lnSpc>
+                <a:spcPts val="2200"/>
+              </a:lnSpc>
+              <a:spcAft>
+                <a:spcPts val="400"/>
+              </a:spcAft>
+              <a:defRPr sz="2000" b="0">
+                <a:solidFill>
+                  <a:srgbClr val="333333"/>
+                </a:solidFill>
+                <a:latin typeface="Consolas"/>
+              </a:defRPr>
+            </a:pPr>
+          </a:p>
+          <a:p>
+            <a:pPr>
+              <a:lnSpc>
+                <a:spcPts val="2200"/>
+              </a:lnSpc>
+              <a:spcAft>
+                <a:spcPts val="400"/>
+              </a:spcAft>
+              <a:defRPr sz="2000" b="0">
+                <a:solidFill>
+                  <a:srgbClr val="333333"/>
+                </a:solidFill>
+                <a:latin typeface="Consolas"/>
+              </a:defRPr>
+            </a:pPr>
+            <a:r>
+              <a:t>&lt;!-- TODO: Table of Component ID, Type, Purpose. Location in codebase.</a:t>
+            </a:r>
+          </a:p>
+        </p:txBody>
+      </p:sp>
+      <p:sp>
+        <p:nvSpPr>
+          <p:cNvPr id="4" name="TextBox 3"/>
           <p:cNvSpPr txBox="1"/>
           <p:nvPr/>
         </p:nvSpPr>
@@ -5582,8 +5988,8 @@
         </p:nvSpPr>
         <p:spPr>
           <a:xfrm>
-            <a:off x="548640" y="411480"/>
-            <a:ext cx="11064240" cy="777240"/>
+            <a:off x="548640" y="2743200"/>
+            <a:ext cx="11064240" cy="1371600"/>
           </a:xfrm>
           <a:prstGeom prst="rect">
             <a:avLst/>
@@ -5596,11 +6002,11 @@
           </a:bodyPr>
           <a:lstStyle/>
           <a:p>
-            <a:pPr>
-              <a:lnSpc>
-                <a:spcPts val="2200"/>
-              </a:lnSpc>
-              <a:defRPr sz="2800" b="1">
+            <a:pPr algn="ctr">
+              <a:lnSpc>
+                <a:spcPts val="2200"/>
+              </a:lnSpc>
+              <a:defRPr sz="3600" b="1">
                 <a:solidFill>
                   <a:srgbClr val="1A1A2E"/>
                 </a:solidFill>
@@ -5608,7 +6014,7 @@
               </a:defRPr>
             </a:pPr>
             <a:r>
-              <a:t>2. VIP validation</a:t>
+              <a:t>Key files to study</a:t>
             </a:r>
           </a:p>
         </p:txBody>
@@ -5616,105 +6022,6 @@
       <p:sp>
         <p:nvSpPr>
           <p:cNvPr id="3" name="TextBox 2"/>
-          <p:cNvSpPr txBox="1"/>
-          <p:nvPr/>
-        </p:nvSpPr>
-        <p:spPr>
-          <a:xfrm>
-            <a:off x="548640" y="1234440"/>
-            <a:ext cx="11064240" cy="4937760"/>
-          </a:xfrm>
-          <a:prstGeom prst="rect">
-            <a:avLst/>
-          </a:prstGeom>
-          <a:noFill/>
-        </p:spPr>
-        <p:txBody>
-          <a:bodyPr wrap="square">
-            <a:noAutofit/>
-          </a:bodyPr>
-          <a:lstStyle/>
-          <a:p>
-            <a:pPr>
-              <a:lnSpc>
-                <a:spcPts val="2200"/>
-              </a:lnSpc>
-              <a:spcAft>
-                <a:spcPts val="1000"/>
-              </a:spcAft>
-              <a:defRPr sz="2000" b="0">
-                <a:solidFill>
-                  <a:srgbClr val="333333"/>
-                </a:solidFill>
-                <a:latin typeface="Calibri"/>
-              </a:defRPr>
-            </a:pPr>
-            <a:r>
-              <a:t>• Self-test environment for the VIP plus integrator</a:t>
-            </a:r>
-          </a:p>
-          <a:p>
-            <a:pPr>
-              <a:lnSpc>
-                <a:spcPts val="2200"/>
-              </a:lnSpc>
-              <a:spcAft>
-                <a:spcPts val="1000"/>
-              </a:spcAft>
-              <a:defRPr sz="2000" b="0">
-                <a:solidFill>
-                  <a:srgbClr val="333333"/>
-                </a:solidFill>
-                <a:latin typeface="Calibri"/>
-              </a:defRPr>
-            </a:pPr>
-            <a:r>
-              <a:t>      tests on a reference DUT.</a:t>
-            </a:r>
-          </a:p>
-          <a:p>
-            <a:pPr>
-              <a:lnSpc>
-                <a:spcPts val="2200"/>
-              </a:lnSpc>
-              <a:spcAft>
-                <a:spcPts val="1000"/>
-              </a:spcAft>
-              <a:defRPr sz="2000" b="0">
-                <a:solidFill>
-                  <a:srgbClr val="333333"/>
-                </a:solidFill>
-                <a:latin typeface="Calibri"/>
-              </a:defRPr>
-            </a:pPr>
-            <a:r>
-              <a:t>• Documentation-driven review: another engineer can</a:t>
-            </a:r>
-          </a:p>
-          <a:p>
-            <a:pPr>
-              <a:lnSpc>
-                <a:spcPts val="2200"/>
-              </a:lnSpc>
-              <a:spcAft>
-                <a:spcPts val="1000"/>
-              </a:spcAft>
-              <a:defRPr sz="2000" b="0">
-                <a:solidFill>
-                  <a:srgbClr val="333333"/>
-                </a:solidFill>
-                <a:latin typeface="Calibri"/>
-              </a:defRPr>
-            </a:pPr>
-            <a:r>
-              <a:t>      adopt VIP from docs alone.</a:t>
-            </a:r>
-          </a:p>
-        </p:txBody>
-      </p:sp>
-      <p:sp>
-        <p:nvSpPr>
-          <p:cNvPr id="4" name="TextBox 3"/>
           <p:cNvSpPr txBox="1"/>
           <p:nvPr/>
         </p:nvSpPr>
@@ -5803,7 +6110,7 @@
               </a:defRPr>
             </a:pPr>
             <a:r>
-              <a:t>3. Quality bar</a:t>
+              <a:t>Open these in the repo</a:t>
             </a:r>
           </a:p>
         </p:txBody>
@@ -5845,7 +6152,7 @@
               </a:defRPr>
             </a:pPr>
             <a:r>
-              <a:t>• `BEST_PRACTICES.md` — coding standards, review</a:t>
+              <a:t>• `module7/PROJECTS.md` — DUT scope, interfaces, and</a:t>
             </a:r>
           </a:p>
           <a:p>
@@ -5864,7 +6171,7 @@
               </a:defRPr>
             </a:pPr>
             <a:r>
-              <a:t>      checklist, maintenance and versioning.</a:t>
+              <a:t>      verification goals</a:t>
             </a:r>
           </a:p>
           <a:p>
@@ -5883,7 +6190,7 @@
               </a:defRPr>
             </a:pPr>
             <a:r>
-              <a:t>• `./scripts/module7.sh --check` validates project and</a:t>
+              <a:t>• `module7/VIP_DESIGN.md` — VIP package architecture</a:t>
             </a:r>
           </a:p>
           <a:p>
@@ -5902,7 +6209,121 @@
               </a:defRPr>
             </a:pPr>
             <a:r>
-              <a:t>      VIP design documentation.</a:t>
+              <a:t>      and public API</a:t>
+            </a:r>
+          </a:p>
+          <a:p>
+            <a:pPr>
+              <a:lnSpc>
+                <a:spcPts val="2200"/>
+              </a:lnSpc>
+              <a:spcAft>
+                <a:spcPts val="1000"/>
+              </a:spcAft>
+              <a:defRPr sz="2000" b="0">
+                <a:solidFill>
+                  <a:srgbClr val="333333"/>
+                </a:solidFill>
+                <a:latin typeface="Calibri"/>
+              </a:defRPr>
+            </a:pPr>
+            <a:r>
+              <a:t>• `module7/BEST_PRACTICES.md` — production-quality</a:t>
+            </a:r>
+          </a:p>
+          <a:p>
+            <a:pPr>
+              <a:lnSpc>
+                <a:spcPts val="2200"/>
+              </a:lnSpc>
+              <a:spcAft>
+                <a:spcPts val="1000"/>
+              </a:spcAft>
+              <a:defRPr sz="2000" b="0">
+                <a:solidFill>
+                  <a:srgbClr val="333333"/>
+                </a:solidFill>
+                <a:latin typeface="Calibri"/>
+              </a:defRPr>
+            </a:pPr>
+            <a:r>
+              <a:t>      verification and delivery standards</a:t>
+            </a:r>
+          </a:p>
+          <a:p>
+            <a:pPr>
+              <a:lnSpc>
+                <a:spcPts val="2200"/>
+              </a:lnSpc>
+              <a:spcAft>
+                <a:spcPts val="1000"/>
+              </a:spcAft>
+              <a:defRPr sz="2000" b="0">
+                <a:solidFill>
+                  <a:srgbClr val="333333"/>
+                </a:solidFill>
+                <a:latin typeface="Calibri"/>
+              </a:defRPr>
+            </a:pPr>
+            <a:r>
+              <a:t>• `module6/MULTI_AGENT_ARCHITECTURE.md` — prior multi-</a:t>
+            </a:r>
+          </a:p>
+          <a:p>
+            <a:pPr>
+              <a:lnSpc>
+                <a:spcPts val="2200"/>
+              </a:lnSpc>
+              <a:spcAft>
+                <a:spcPts val="1000"/>
+              </a:spcAft>
+              <a:defRPr sz="2000" b="0">
+                <a:solidFill>
+                  <a:srgbClr val="333333"/>
+                </a:solidFill>
+                <a:latin typeface="Calibri"/>
+              </a:defRPr>
+            </a:pPr>
+            <a:r>
+              <a:t>      agent patterns to reuse</a:t>
+            </a:r>
+          </a:p>
+          <a:p>
+            <a:pPr>
+              <a:lnSpc>
+                <a:spcPts val="2200"/>
+              </a:lnSpc>
+              <a:spcAft>
+                <a:spcPts val="1000"/>
+              </a:spcAft>
+              <a:defRPr sz="2000" b="0">
+                <a:solidFill>
+                  <a:srgbClr val="333333"/>
+                </a:solidFill>
+                <a:latin typeface="Calibri"/>
+              </a:defRPr>
+            </a:pPr>
+            <a:r>
+              <a:t>• `scripts/module7.sh` — project and VIP design doc</a:t>
+            </a:r>
+          </a:p>
+          <a:p>
+            <a:pPr>
+              <a:lnSpc>
+                <a:spcPts val="2200"/>
+              </a:lnSpc>
+              <a:spcAft>
+                <a:spcPts val="1000"/>
+              </a:spcAft>
+              <a:defRPr sz="2000" b="0">
+                <a:solidFill>
+                  <a:srgbClr val="333333"/>
+                </a:solidFill>
+                <a:latin typeface="Calibri"/>
+              </a:defRPr>
+            </a:pPr>
+            <a:r>
+              <a:t>      checks</a:t>
             </a:r>
           </a:p>
         </p:txBody>
@@ -5972,8 +6393,8 @@
         </p:nvSpPr>
         <p:spPr>
           <a:xfrm>
-            <a:off x="548640" y="411480"/>
-            <a:ext cx="11064240" cy="777240"/>
+            <a:off x="548640" y="2743200"/>
+            <a:ext cx="11064240" cy="1371600"/>
           </a:xfrm>
           <a:prstGeom prst="rect">
             <a:avLst/>
@@ -5986,11 +6407,11 @@
           </a:bodyPr>
           <a:lstStyle/>
           <a:p>
-            <a:pPr>
-              <a:lnSpc>
-                <a:spcPts val="2200"/>
-              </a:lnSpc>
-              <a:defRPr sz="2800" b="1">
+            <a:pPr algn="ctr">
+              <a:lnSpc>
+                <a:spcPts val="2200"/>
+              </a:lnSpc>
+              <a:defRPr sz="3600" b="1">
                 <a:solidFill>
                   <a:srgbClr val="1A1A2E"/>
                 </a:solidFill>
@@ -5998,7 +6419,7 @@
               </a:defRPr>
             </a:pPr>
             <a:r>
-              <a:t>Project scope template</a:t>
+              <a:t>Verification &amp; testing methods</a:t>
             </a:r>
           </a:p>
         </p:txBody>
@@ -6006,355 +6427,6 @@
       <p:sp>
         <p:nvSpPr>
           <p:cNvPr id="3" name="TextBox 2"/>
-          <p:cNvSpPr txBox="1"/>
-          <p:nvPr/>
-        </p:nvSpPr>
-        <p:spPr>
-          <a:xfrm>
-            <a:off x="548640" y="1143000"/>
-            <a:ext cx="11064240" cy="5029200"/>
-          </a:xfrm>
-          <a:prstGeom prst="rect">
-            <a:avLst/>
-          </a:prstGeom>
-          <a:solidFill>
-            <a:srgbClr val="F4F4F4"/>
-          </a:solidFill>
-        </p:spPr>
-        <p:txBody>
-          <a:bodyPr wrap="square">
-            <a:noAutofit/>
-          </a:bodyPr>
-          <a:lstStyle/>
-          <a:p>
-            <a:pPr>
-              <a:lnSpc>
-                <a:spcPts val="2200"/>
-              </a:lnSpc>
-              <a:spcAft>
-                <a:spcPts val="400"/>
-              </a:spcAft>
-              <a:defRPr sz="2000" b="0">
-                <a:solidFill>
-                  <a:srgbClr val="333333"/>
-                </a:solidFill>
-                <a:latin typeface="Consolas"/>
-              </a:defRPr>
-            </a:pPr>
-            <a:r>
-              <a:t># Real-World Verification Projects (Module 7)</a:t>
-            </a:r>
-          </a:p>
-          <a:p>
-            <a:pPr>
-              <a:lnSpc>
-                <a:spcPts val="2200"/>
-              </a:lnSpc>
-              <a:spcAft>
-                <a:spcPts val="400"/>
-              </a:spcAft>
-              <a:defRPr sz="2000" b="0">
-                <a:solidFill>
-                  <a:srgbClr val="333333"/>
-                </a:solidFill>
-                <a:latin typeface="Consolas"/>
-              </a:defRPr>
-            </a:pPr>
-          </a:p>
-          <a:p>
-            <a:pPr>
-              <a:lnSpc>
-                <a:spcPts val="2200"/>
-              </a:lnSpc>
-              <a:spcAft>
-                <a:spcPts val="400"/>
-              </a:spcAft>
-              <a:defRPr sz="2000" b="0">
-                <a:solidFill>
-                  <a:srgbClr val="333333"/>
-                </a:solidFill>
-                <a:latin typeface="Consolas"/>
-              </a:defRPr>
-            </a:pPr>
-            <a:r>
-              <a:t>&gt; **Purpose**: Describe one or more real-world style verification</a:t>
-            </a:r>
-          </a:p>
-          <a:p>
-            <a:pPr>
-              <a:lnSpc>
-                <a:spcPts val="2200"/>
-              </a:lnSpc>
-              <a:spcAft>
-                <a:spcPts val="400"/>
-              </a:spcAft>
-              <a:defRPr sz="2000" b="0">
-                <a:solidFill>
-                  <a:srgbClr val="333333"/>
-                </a:solidFill>
-                <a:latin typeface="Consolas"/>
-              </a:defRPr>
-            </a:pPr>
-            <a:r>
-              <a:t>projects you will implement (DMA, protocols, custom IP, etc.).</a:t>
-            </a:r>
-          </a:p>
-          <a:p>
-            <a:pPr>
-              <a:lnSpc>
-                <a:spcPts val="2200"/>
-              </a:lnSpc>
-              <a:spcAft>
-                <a:spcPts val="400"/>
-              </a:spcAft>
-              <a:defRPr sz="2000" b="0">
-                <a:solidFill>
-                  <a:srgbClr val="333333"/>
-                </a:solidFill>
-                <a:latin typeface="Consolas"/>
-              </a:defRPr>
-            </a:pPr>
-            <a:r>
-              <a:t>&gt; **Module**: 7 – Real-World Verification Applications &amp; VIP (SV/UVM)</a:t>
-            </a:r>
-          </a:p>
-          <a:p>
-            <a:pPr>
-              <a:lnSpc>
-                <a:spcPts val="2200"/>
-              </a:lnSpc>
-              <a:spcAft>
-                <a:spcPts val="400"/>
-              </a:spcAft>
-              <a:defRPr sz="2000" b="0">
-                <a:solidFill>
-                  <a:srgbClr val="333333"/>
-                </a:solidFill>
-                <a:latin typeface="Consolas"/>
-              </a:defRPr>
-            </a:pPr>
-          </a:p>
-          <a:p>
-            <a:pPr>
-              <a:lnSpc>
-                <a:spcPts val="2200"/>
-              </a:lnSpc>
-              <a:spcAft>
-                <a:spcPts val="400"/>
-              </a:spcAft>
-              <a:defRPr sz="2000" b="0">
-                <a:solidFill>
-                  <a:srgbClr val="333333"/>
-                </a:solidFill>
-                <a:latin typeface="Consolas"/>
-              </a:defRPr>
-            </a:pPr>
-            <a:r>
-              <a:t>&gt; **Instructions**: Fill in this document for your design. Copy from</a:t>
-            </a:r>
-          </a:p>
-          <a:p>
-            <a:pPr>
-              <a:lnSpc>
-                <a:spcPts val="2200"/>
-              </a:lnSpc>
-              <a:spcAft>
-                <a:spcPts val="400"/>
-              </a:spcAft>
-              <a:defRPr sz="2000" b="0">
-                <a:solidFill>
-                  <a:srgbClr val="333333"/>
-                </a:solidFill>
-                <a:latin typeface="Consolas"/>
-              </a:defRPr>
-            </a:pPr>
-            <a:r>
-              <a:t>`module7/templates/` if needed, or edit the file in `module7/` directly.</a:t>
-            </a:r>
-          </a:p>
-          <a:p>
-            <a:pPr>
-              <a:lnSpc>
-                <a:spcPts val="2200"/>
-              </a:lnSpc>
-              <a:spcAft>
-                <a:spcPts val="400"/>
-              </a:spcAft>
-              <a:defRPr sz="2000" b="0">
-                <a:solidFill>
-                  <a:srgbClr val="333333"/>
-                </a:solidFill>
-                <a:latin typeface="Consolas"/>
-              </a:defRPr>
-            </a:pPr>
-            <a:r>
-              <a:t>Reference: `module7/.solutions/`.</a:t>
-            </a:r>
-          </a:p>
-          <a:p>
-            <a:pPr>
-              <a:lnSpc>
-                <a:spcPts val="2200"/>
-              </a:lnSpc>
-              <a:spcAft>
-                <a:spcPts val="400"/>
-              </a:spcAft>
-              <a:defRPr sz="2000" b="0">
-                <a:solidFill>
-                  <a:srgbClr val="333333"/>
-                </a:solidFill>
-                <a:latin typeface="Consolas"/>
-              </a:defRPr>
-            </a:pPr>
-          </a:p>
-          <a:p>
-            <a:pPr>
-              <a:lnSpc>
-                <a:spcPts val="2200"/>
-              </a:lnSpc>
-              <a:spcAft>
-                <a:spcPts val="400"/>
-              </a:spcAft>
-              <a:defRPr sz="2000" b="0">
-                <a:solidFill>
-                  <a:srgbClr val="333333"/>
-                </a:solidFill>
-                <a:latin typeface="Consolas"/>
-              </a:defRPr>
-            </a:pPr>
-            <a:r>
-              <a:t>## 1. Project Overview</a:t>
-            </a:r>
-          </a:p>
-          <a:p>
-            <a:pPr>
-              <a:lnSpc>
-                <a:spcPts val="2200"/>
-              </a:lnSpc>
-              <a:spcAft>
-                <a:spcPts val="400"/>
-              </a:spcAft>
-              <a:defRPr sz="2000" b="0">
-                <a:solidFill>
-                  <a:srgbClr val="333333"/>
-                </a:solidFill>
-                <a:latin typeface="Consolas"/>
-              </a:defRPr>
-            </a:pPr>
-          </a:p>
-          <a:p>
-            <a:pPr>
-              <a:lnSpc>
-                <a:spcPts val="2200"/>
-              </a:lnSpc>
-              <a:spcAft>
-                <a:spcPts val="400"/>
-              </a:spcAft>
-              <a:defRPr sz="2000" b="0">
-                <a:solidFill>
-                  <a:srgbClr val="333333"/>
-                </a:solidFill>
-                <a:latin typeface="Consolas"/>
-              </a:defRPr>
-            </a:pPr>
-            <a:r>
-              <a:t>&lt;!-- TODO: For each project: DUT/IP, scope (level, features), goals,</a:t>
-            </a:r>
-          </a:p>
-          <a:p>
-            <a:pPr>
-              <a:lnSpc>
-                <a:spcPts val="2200"/>
-              </a:lnSpc>
-              <a:spcAft>
-                <a:spcPts val="400"/>
-              </a:spcAft>
-              <a:defRPr sz="2000" b="0">
-                <a:solidFill>
-                  <a:srgbClr val="333333"/>
-                </a:solidFill>
-                <a:latin typeface="Consolas"/>
-              </a:defRPr>
-            </a:pPr>
-            <a:r>
-              <a:t>status. Add more projects as needed. --&gt;</a:t>
-            </a:r>
-          </a:p>
-          <a:p>
-            <a:pPr>
-              <a:lnSpc>
-                <a:spcPts val="2200"/>
-              </a:lnSpc>
-              <a:spcAft>
-                <a:spcPts val="400"/>
-              </a:spcAft>
-              <a:defRPr sz="2000" b="0">
-                <a:solidFill>
-                  <a:srgbClr val="333333"/>
-                </a:solidFill>
-                <a:latin typeface="Consolas"/>
-              </a:defRPr>
-            </a:pPr>
-          </a:p>
-          <a:p>
-            <a:pPr>
-              <a:lnSpc>
-                <a:spcPts val="2200"/>
-              </a:lnSpc>
-              <a:spcAft>
-                <a:spcPts val="400"/>
-              </a:spcAft>
-              <a:defRPr sz="2000" b="0">
-                <a:solidFill>
-                  <a:srgbClr val="333333"/>
-                </a:solidFill>
-                <a:latin typeface="Consolas"/>
-              </a:defRPr>
-            </a:pPr>
-            <a:r>
-              <a:t>## 2. Requirements and Use Cases</a:t>
-            </a:r>
-          </a:p>
-          <a:p>
-            <a:pPr>
-              <a:lnSpc>
-                <a:spcPts val="2200"/>
-              </a:lnSpc>
-              <a:spcAft>
-                <a:spcPts val="400"/>
-              </a:spcAft>
-              <a:defRPr sz="2000" b="0">
-                <a:solidFill>
-                  <a:srgbClr val="333333"/>
-                </a:solidFill>
-                <a:latin typeface="Consolas"/>
-              </a:defRPr>
-            </a:pPr>
-          </a:p>
-          <a:p>
-            <a:pPr>
-              <a:lnSpc>
-                <a:spcPts val="2200"/>
-              </a:lnSpc>
-              <a:spcAft>
-                <a:spcPts val="400"/>
-              </a:spcAft>
-              <a:defRPr sz="2000" b="0">
-                <a:solidFill>
-                  <a:srgbClr val="333333"/>
-                </a:solidFill>
-                <a:latin typeface="Consolas"/>
-              </a:defRPr>
-            </a:pPr>
-            <a:r>
-              <a:t>&lt;!-- TODO: For each project, list key requirements and use cases. Link</a:t>
-            </a:r>
-          </a:p>
-        </p:txBody>
-      </p:sp>
-      <p:sp>
-        <p:nvSpPr>
-          <p:cNvPr id="4" name="TextBox 3"/>
           <p:cNvSpPr txBox="1"/>
           <p:nvPr/>
         </p:nvSpPr>
@@ -6417,8 +6489,8 @@
         </p:nvSpPr>
         <p:spPr>
           <a:xfrm>
-            <a:off x="548640" y="2743200"/>
-            <a:ext cx="11064240" cy="1371600"/>
+            <a:off x="548640" y="411480"/>
+            <a:ext cx="11064240" cy="777240"/>
           </a:xfrm>
           <a:prstGeom prst="rect">
             <a:avLst/>
@@ -6431,11 +6503,11 @@
           </a:bodyPr>
           <a:lstStyle/>
           <a:p>
-            <a:pPr algn="ctr">
-              <a:lnSpc>
-                <a:spcPts val="2200"/>
-              </a:lnSpc>
-              <a:defRPr sz="3600" b="1">
+            <a:pPr>
+              <a:lnSpc>
+                <a:spcPts val="2200"/>
+              </a:lnSpc>
+              <a:defRPr sz="2800" b="1">
                 <a:solidFill>
                   <a:srgbClr val="1A1A2E"/>
                 </a:solidFill>
@@ -6443,7 +6515,7 @@
               </a:defRPr>
             </a:pPr>
             <a:r>
-              <a:t>Syllabus topics</a:t>
+              <a:t>1. End-to-end IP verification</a:t>
             </a:r>
           </a:p>
         </p:txBody>
@@ -6451,6 +6523,167 @@
       <p:sp>
         <p:nvSpPr>
           <p:cNvPr id="3" name="TextBox 2"/>
+          <p:cNvSpPr txBox="1"/>
+          <p:nvPr/>
+        </p:nvSpPr>
+        <p:spPr>
+          <a:xfrm>
+            <a:off x="548640" y="1234440"/>
+            <a:ext cx="5303520" cy="4754880"/>
+          </a:xfrm>
+          <a:prstGeom prst="rect">
+            <a:avLst/>
+          </a:prstGeom>
+          <a:noFill/>
+        </p:spPr>
+        <p:txBody>
+          <a:bodyPr wrap="square">
+            <a:noAutofit/>
+          </a:bodyPr>
+          <a:lstStyle/>
+          <a:p>
+            <a:pPr>
+              <a:lnSpc>
+                <a:spcPts val="2200"/>
+              </a:lnSpc>
+              <a:spcAft>
+                <a:spcPts val="1000"/>
+              </a:spcAft>
+              <a:defRPr sz="2000" b="0">
+                <a:solidFill>
+                  <a:srgbClr val="333333"/>
+                </a:solidFill>
+                <a:latin typeface="Calibri"/>
+              </a:defRPr>
+            </a:pPr>
+            <a:r>
+              <a:t>• Full lifecycle: requirements →</a:t>
+            </a:r>
+          </a:p>
+          <a:p>
+            <a:pPr>
+              <a:lnSpc>
+                <a:spcPts val="2200"/>
+              </a:lnSpc>
+              <a:spcAft>
+                <a:spcPts val="1000"/>
+              </a:spcAft>
+              <a:defRPr sz="2000" b="0">
+                <a:solidFill>
+                  <a:srgbClr val="333333"/>
+                </a:solidFill>
+                <a:latin typeface="Calibri"/>
+              </a:defRPr>
+            </a:pPr>
+            <a:r>
+              <a:t>      env → tests → coverage →</a:t>
+            </a:r>
+          </a:p>
+          <a:p>
+            <a:pPr>
+              <a:lnSpc>
+                <a:spcPts val="2200"/>
+              </a:lnSpc>
+              <a:spcAft>
+                <a:spcPts val="1000"/>
+              </a:spcAft>
+              <a:defRPr sz="2000" b="0">
+                <a:solidFill>
+                  <a:srgbClr val="333333"/>
+                </a:solidFill>
+                <a:latin typeface="Calibri"/>
+              </a:defRPr>
+            </a:pPr>
+            <a:r>
+              <a:t>      regressions → sign-off preview.</a:t>
+            </a:r>
+          </a:p>
+          <a:p>
+            <a:pPr>
+              <a:lnSpc>
+                <a:spcPts val="2200"/>
+              </a:lnSpc>
+              <a:spcAft>
+                <a:spcPts val="1000"/>
+              </a:spcAft>
+              <a:defRPr sz="2000" b="0">
+                <a:solidFill>
+                  <a:srgbClr val="333333"/>
+                </a:solidFill>
+                <a:latin typeface="Calibri"/>
+              </a:defRPr>
+            </a:pPr>
+            <a:r>
+              <a:t>• Regression tiers and coverage</a:t>
+            </a:r>
+          </a:p>
+          <a:p>
+            <a:pPr>
+              <a:lnSpc>
+                <a:spcPts val="2200"/>
+              </a:lnSpc>
+              <a:spcAft>
+                <a:spcPts val="1000"/>
+              </a:spcAft>
+              <a:defRPr sz="2000" b="0">
+                <a:solidFill>
+                  <a:srgbClr val="333333"/>
+                </a:solidFill>
+                <a:latin typeface="Calibri"/>
+              </a:defRPr>
+            </a:pPr>
+            <a:r>
+              <a:t>      goals match production</a:t>
+            </a:r>
+          </a:p>
+          <a:p>
+            <a:pPr>
+              <a:lnSpc>
+                <a:spcPts val="2200"/>
+              </a:lnSpc>
+              <a:spcAft>
+                <a:spcPts val="1000"/>
+              </a:spcAft>
+              <a:defRPr sz="2000" b="0">
+                <a:solidFill>
+                  <a:srgbClr val="333333"/>
+                </a:solidFill>
+                <a:latin typeface="Calibri"/>
+              </a:defRPr>
+            </a:pPr>
+            <a:r>
+              <a:t>      expectations.</a:t>
+            </a:r>
+          </a:p>
+        </p:txBody>
+      </p:sp>
+      <p:pic>
+        <p:nvPicPr>
+          <p:cNvPr id="4" name="Picture 3" descr="testing_methods.png"/>
+          <p:cNvPicPr>
+            <a:picLocks noChangeAspect="1"/>
+          </p:cNvPicPr>
+          <p:nvPr/>
+        </p:nvPicPr>
+        <p:blipFill>
+          <a:blip r:embed="rId2"/>
+          <a:stretch>
+            <a:fillRect/>
+          </a:stretch>
+        </p:blipFill>
+        <p:spPr>
+          <a:xfrm>
+            <a:off x="6172200" y="2094547"/>
+            <a:ext cx="5394960" cy="3034665"/>
+          </a:xfrm>
+          <a:prstGeom prst="rect">
+            <a:avLst/>
+          </a:prstGeom>
+        </p:spPr>
+      </p:pic>
+      <p:sp>
+        <p:nvSpPr>
+          <p:cNvPr id="5" name="TextBox 4"/>
           <p:cNvSpPr txBox="1"/>
           <p:nvPr/>
         </p:nvSpPr>
@@ -6539,7 +6772,7 @@
               </a:defRPr>
             </a:pPr>
             <a:r>
-              <a:t>1. End-to-End IP Verification</a:t>
+              <a:t>2. VIP validation</a:t>
             </a:r>
           </a:p>
         </p:txBody>
@@ -6581,7 +6814,7 @@
               </a:defRPr>
             </a:pPr>
             <a:r>
-              <a:t>• Applying planning + UVM + coverage + regression to</a:t>
+              <a:t>• Self-test environment for the VIP plus integrator</a:t>
             </a:r>
           </a:p>
           <a:p>
@@ -6600,7 +6833,7 @@
               </a:defRPr>
             </a:pPr>
             <a:r>
-              <a:t>      realistic IP.</a:t>
+              <a:t>      tests on a reference DUT.</a:t>
             </a:r>
           </a:p>
           <a:p>
@@ -6619,7 +6852,7 @@
               </a:defRPr>
             </a:pPr>
             <a:r>
-              <a:t>• Realistic test planning, coverage closure, and</a:t>
+              <a:t>• Documentation-driven review: another engineer can</a:t>
             </a:r>
           </a:p>
           <a:p>
@@ -6638,7 +6871,7 @@
               </a:defRPr>
             </a:pPr>
             <a:r>
-              <a:t>      regression operation.</a:t>
+              <a:t>      adopt VIP from docs alone.</a:t>
             </a:r>
           </a:p>
         </p:txBody>
@@ -6734,7 +6967,7 @@
               </a:defRPr>
             </a:pPr>
             <a:r>
-              <a:t>2. VIP Design and Reuse</a:t>
+              <a:t>3. Quality bar</a:t>
             </a:r>
           </a:p>
         </p:txBody>
@@ -6776,7 +7009,7 @@
               </a:defRPr>
             </a:pPr>
             <a:r>
-              <a:t>• Designing and documenting verification IP (VIP) for</a:t>
+              <a:t>• `BEST_PRACTICES.md` — coding standards, review</a:t>
             </a:r>
           </a:p>
           <a:p>
@@ -6795,7 +7028,45 @@
               </a:defRPr>
             </a:pPr>
             <a:r>
-              <a:t>      protocols or blocks.</a:t>
+              <a:t>      checklist, maintenance and versioning.</a:t>
+            </a:r>
+          </a:p>
+          <a:p>
+            <a:pPr>
+              <a:lnSpc>
+                <a:spcPts val="2200"/>
+              </a:lnSpc>
+              <a:spcAft>
+                <a:spcPts val="1000"/>
+              </a:spcAft>
+              <a:defRPr sz="2000" b="0">
+                <a:solidFill>
+                  <a:srgbClr val="333333"/>
+                </a:solidFill>
+                <a:latin typeface="Calibri"/>
+              </a:defRPr>
+            </a:pPr>
+            <a:r>
+              <a:t>• `./scripts/module7.sh --check` validates project and</a:t>
+            </a:r>
+          </a:p>
+          <a:p>
+            <a:pPr>
+              <a:lnSpc>
+                <a:spcPts val="2200"/>
+              </a:lnSpc>
+              <a:spcAft>
+                <a:spcPts val="1000"/>
+              </a:spcAft>
+              <a:defRPr sz="2000" b="0">
+                <a:solidFill>
+                  <a:srgbClr val="333333"/>
+                </a:solidFill>
+                <a:latin typeface="Calibri"/>
+              </a:defRPr>
+            </a:pPr>
+            <a:r>
+              <a:t>      VIP design documentation.</a:t>
             </a:r>
           </a:p>
         </p:txBody>
@@ -6891,7 +7162,7 @@
               </a:defRPr>
             </a:pPr>
             <a:r>
-              <a:t>3. Production Quality and Maintenance</a:t>
+              <a:t>Project scope template</a:t>
             </a:r>
           </a:p>
         </p:txBody>
@@ -6904,13 +7175,15 @@
         </p:nvSpPr>
         <p:spPr>
           <a:xfrm>
-            <a:off x="548640" y="1234440"/>
-            <a:ext cx="11064240" cy="4937760"/>
+            <a:off x="548640" y="1143000"/>
+            <a:ext cx="11064240" cy="5029200"/>
           </a:xfrm>
           <a:prstGeom prst="rect">
             <a:avLst/>
           </a:prstGeom>
-          <a:noFill/>
+          <a:solidFill>
+            <a:srgbClr val="F4F4F4"/>
+          </a:solidFill>
         </p:spPr>
         <p:txBody>
           <a:bodyPr wrap="square">
@@ -6923,36 +7196,322 @@
                 <a:spcPts val="2200"/>
               </a:lnSpc>
               <a:spcAft>
-                <a:spcPts val="1000"/>
-              </a:spcAft>
-              <a:defRPr sz="2000" b="0">
-                <a:solidFill>
-                  <a:srgbClr val="333333"/>
-                </a:solidFill>
-                <a:latin typeface="Calibri"/>
-              </a:defRPr>
-            </a:pPr>
-            <a:r>
-              <a:t>• Best practices for project structure, code quality,</a:t>
-            </a:r>
-          </a:p>
-          <a:p>
-            <a:pPr>
-              <a:lnSpc>
-                <a:spcPts val="2200"/>
-              </a:lnSpc>
-              <a:spcAft>
-                <a:spcPts val="1000"/>
-              </a:spcAft>
-              <a:defRPr sz="2000" b="0">
-                <a:solidFill>
-                  <a:srgbClr val="333333"/>
-                </a:solidFill>
-                <a:latin typeface="Calibri"/>
-              </a:defRPr>
-            </a:pPr>
-            <a:r>
-              <a:t>      docs, and maintenance.</a:t>
+                <a:spcPts val="400"/>
+              </a:spcAft>
+              <a:defRPr sz="2000" b="0">
+                <a:solidFill>
+                  <a:srgbClr val="333333"/>
+                </a:solidFill>
+                <a:latin typeface="Consolas"/>
+              </a:defRPr>
+            </a:pPr>
+            <a:r>
+              <a:t># Real-World Verification Projects (Module 7)</a:t>
+            </a:r>
+          </a:p>
+          <a:p>
+            <a:pPr>
+              <a:lnSpc>
+                <a:spcPts val="2200"/>
+              </a:lnSpc>
+              <a:spcAft>
+                <a:spcPts val="400"/>
+              </a:spcAft>
+              <a:defRPr sz="2000" b="0">
+                <a:solidFill>
+                  <a:srgbClr val="333333"/>
+                </a:solidFill>
+                <a:latin typeface="Consolas"/>
+              </a:defRPr>
+            </a:pPr>
+          </a:p>
+          <a:p>
+            <a:pPr>
+              <a:lnSpc>
+                <a:spcPts val="2200"/>
+              </a:lnSpc>
+              <a:spcAft>
+                <a:spcPts val="400"/>
+              </a:spcAft>
+              <a:defRPr sz="2000" b="0">
+                <a:solidFill>
+                  <a:srgbClr val="333333"/>
+                </a:solidFill>
+                <a:latin typeface="Consolas"/>
+              </a:defRPr>
+            </a:pPr>
+            <a:r>
+              <a:t>&gt; **Purpose**: Describe one or more real-world style verification</a:t>
+            </a:r>
+          </a:p>
+          <a:p>
+            <a:pPr>
+              <a:lnSpc>
+                <a:spcPts val="2200"/>
+              </a:lnSpc>
+              <a:spcAft>
+                <a:spcPts val="400"/>
+              </a:spcAft>
+              <a:defRPr sz="2000" b="0">
+                <a:solidFill>
+                  <a:srgbClr val="333333"/>
+                </a:solidFill>
+                <a:latin typeface="Consolas"/>
+              </a:defRPr>
+            </a:pPr>
+            <a:r>
+              <a:t>projects you will implement (DMA, protocols, custom IP, etc.).</a:t>
+            </a:r>
+          </a:p>
+          <a:p>
+            <a:pPr>
+              <a:lnSpc>
+                <a:spcPts val="2200"/>
+              </a:lnSpc>
+              <a:spcAft>
+                <a:spcPts val="400"/>
+              </a:spcAft>
+              <a:defRPr sz="2000" b="0">
+                <a:solidFill>
+                  <a:srgbClr val="333333"/>
+                </a:solidFill>
+                <a:latin typeface="Consolas"/>
+              </a:defRPr>
+            </a:pPr>
+            <a:r>
+              <a:t>&gt; **Module**: 7 – Real-World Verification Applications &amp; VIP (SV/UVM)</a:t>
+            </a:r>
+          </a:p>
+          <a:p>
+            <a:pPr>
+              <a:lnSpc>
+                <a:spcPts val="2200"/>
+              </a:lnSpc>
+              <a:spcAft>
+                <a:spcPts val="400"/>
+              </a:spcAft>
+              <a:defRPr sz="2000" b="0">
+                <a:solidFill>
+                  <a:srgbClr val="333333"/>
+                </a:solidFill>
+                <a:latin typeface="Consolas"/>
+              </a:defRPr>
+            </a:pPr>
+          </a:p>
+          <a:p>
+            <a:pPr>
+              <a:lnSpc>
+                <a:spcPts val="2200"/>
+              </a:lnSpc>
+              <a:spcAft>
+                <a:spcPts val="400"/>
+              </a:spcAft>
+              <a:defRPr sz="2000" b="0">
+                <a:solidFill>
+                  <a:srgbClr val="333333"/>
+                </a:solidFill>
+                <a:latin typeface="Consolas"/>
+              </a:defRPr>
+            </a:pPr>
+            <a:r>
+              <a:t>&gt; **Instructions**: Fill in this document for your design. Copy from</a:t>
+            </a:r>
+          </a:p>
+          <a:p>
+            <a:pPr>
+              <a:lnSpc>
+                <a:spcPts val="2200"/>
+              </a:lnSpc>
+              <a:spcAft>
+                <a:spcPts val="400"/>
+              </a:spcAft>
+              <a:defRPr sz="2000" b="0">
+                <a:solidFill>
+                  <a:srgbClr val="333333"/>
+                </a:solidFill>
+                <a:latin typeface="Consolas"/>
+              </a:defRPr>
+            </a:pPr>
+            <a:r>
+              <a:t>`module7/templates/` if needed, or edit the file in `module7/` directly.</a:t>
+            </a:r>
+          </a:p>
+          <a:p>
+            <a:pPr>
+              <a:lnSpc>
+                <a:spcPts val="2200"/>
+              </a:lnSpc>
+              <a:spcAft>
+                <a:spcPts val="400"/>
+              </a:spcAft>
+              <a:defRPr sz="2000" b="0">
+                <a:solidFill>
+                  <a:srgbClr val="333333"/>
+                </a:solidFill>
+                <a:latin typeface="Consolas"/>
+              </a:defRPr>
+            </a:pPr>
+            <a:r>
+              <a:t>Reference: `module7/.solutions/`.</a:t>
+            </a:r>
+          </a:p>
+          <a:p>
+            <a:pPr>
+              <a:lnSpc>
+                <a:spcPts val="2200"/>
+              </a:lnSpc>
+              <a:spcAft>
+                <a:spcPts val="400"/>
+              </a:spcAft>
+              <a:defRPr sz="2000" b="0">
+                <a:solidFill>
+                  <a:srgbClr val="333333"/>
+                </a:solidFill>
+                <a:latin typeface="Consolas"/>
+              </a:defRPr>
+            </a:pPr>
+          </a:p>
+          <a:p>
+            <a:pPr>
+              <a:lnSpc>
+                <a:spcPts val="2200"/>
+              </a:lnSpc>
+              <a:spcAft>
+                <a:spcPts val="400"/>
+              </a:spcAft>
+              <a:defRPr sz="2000" b="0">
+                <a:solidFill>
+                  <a:srgbClr val="333333"/>
+                </a:solidFill>
+                <a:latin typeface="Consolas"/>
+              </a:defRPr>
+            </a:pPr>
+            <a:r>
+              <a:t>## 1. Project Overview</a:t>
+            </a:r>
+          </a:p>
+          <a:p>
+            <a:pPr>
+              <a:lnSpc>
+                <a:spcPts val="2200"/>
+              </a:lnSpc>
+              <a:spcAft>
+                <a:spcPts val="400"/>
+              </a:spcAft>
+              <a:defRPr sz="2000" b="0">
+                <a:solidFill>
+                  <a:srgbClr val="333333"/>
+                </a:solidFill>
+                <a:latin typeface="Consolas"/>
+              </a:defRPr>
+            </a:pPr>
+          </a:p>
+          <a:p>
+            <a:pPr>
+              <a:lnSpc>
+                <a:spcPts val="2200"/>
+              </a:lnSpc>
+              <a:spcAft>
+                <a:spcPts val="400"/>
+              </a:spcAft>
+              <a:defRPr sz="2000" b="0">
+                <a:solidFill>
+                  <a:srgbClr val="333333"/>
+                </a:solidFill>
+                <a:latin typeface="Consolas"/>
+              </a:defRPr>
+            </a:pPr>
+            <a:r>
+              <a:t>&lt;!-- TODO: For each project: DUT/IP, scope (level, features), goals,</a:t>
+            </a:r>
+          </a:p>
+          <a:p>
+            <a:pPr>
+              <a:lnSpc>
+                <a:spcPts val="2200"/>
+              </a:lnSpc>
+              <a:spcAft>
+                <a:spcPts val="400"/>
+              </a:spcAft>
+              <a:defRPr sz="2000" b="0">
+                <a:solidFill>
+                  <a:srgbClr val="333333"/>
+                </a:solidFill>
+                <a:latin typeface="Consolas"/>
+              </a:defRPr>
+            </a:pPr>
+            <a:r>
+              <a:t>status. Add more projects as needed. --&gt;</a:t>
+            </a:r>
+          </a:p>
+          <a:p>
+            <a:pPr>
+              <a:lnSpc>
+                <a:spcPts val="2200"/>
+              </a:lnSpc>
+              <a:spcAft>
+                <a:spcPts val="400"/>
+              </a:spcAft>
+              <a:defRPr sz="2000" b="0">
+                <a:solidFill>
+                  <a:srgbClr val="333333"/>
+                </a:solidFill>
+                <a:latin typeface="Consolas"/>
+              </a:defRPr>
+            </a:pPr>
+          </a:p>
+          <a:p>
+            <a:pPr>
+              <a:lnSpc>
+                <a:spcPts val="2200"/>
+              </a:lnSpc>
+              <a:spcAft>
+                <a:spcPts val="400"/>
+              </a:spcAft>
+              <a:defRPr sz="2000" b="0">
+                <a:solidFill>
+                  <a:srgbClr val="333333"/>
+                </a:solidFill>
+                <a:latin typeface="Consolas"/>
+              </a:defRPr>
+            </a:pPr>
+            <a:r>
+              <a:t>## 2. Requirements and Use Cases</a:t>
+            </a:r>
+          </a:p>
+          <a:p>
+            <a:pPr>
+              <a:lnSpc>
+                <a:spcPts val="2200"/>
+              </a:lnSpc>
+              <a:spcAft>
+                <a:spcPts val="400"/>
+              </a:spcAft>
+              <a:defRPr sz="2000" b="0">
+                <a:solidFill>
+                  <a:srgbClr val="333333"/>
+                </a:solidFill>
+                <a:latin typeface="Consolas"/>
+              </a:defRPr>
+            </a:pPr>
+          </a:p>
+          <a:p>
+            <a:pPr>
+              <a:lnSpc>
+                <a:spcPts val="2200"/>
+              </a:lnSpc>
+              <a:spcAft>
+                <a:spcPts val="400"/>
+              </a:spcAft>
+              <a:defRPr sz="2000" b="0">
+                <a:solidFill>
+                  <a:srgbClr val="333333"/>
+                </a:solidFill>
+                <a:latin typeface="Consolas"/>
+              </a:defRPr>
+            </a:pPr>
+            <a:r>
+              <a:t>&lt;!-- TODO: For each project, list key requirements and use cases. Link</a:t>
             </a:r>
           </a:p>
         </p:txBody>
@@ -7179,8 +7738,8 @@
         </p:nvSpPr>
         <p:spPr>
           <a:xfrm>
-            <a:off x="548640" y="2743200"/>
-            <a:ext cx="11064240" cy="1371600"/>
+            <a:off x="548640" y="411480"/>
+            <a:ext cx="11064240" cy="777240"/>
           </a:xfrm>
           <a:prstGeom prst="rect">
             <a:avLst/>
@@ -7193,11 +7752,11 @@
           </a:bodyPr>
           <a:lstStyle/>
           <a:p>
-            <a:pPr algn="ctr">
-              <a:lnSpc>
-                <a:spcPts val="2200"/>
-              </a:lnSpc>
-              <a:defRPr sz="3600" b="1">
+            <a:pPr>
+              <a:lnSpc>
+                <a:spcPts val="2200"/>
+              </a:lnSpc>
+              <a:defRPr sz="2800" b="1">
                 <a:solidFill>
                   <a:srgbClr val="1A1A2E"/>
                 </a:solidFill>
@@ -7205,7 +7764,7 @@
               </a:defRPr>
             </a:pPr>
             <a:r>
-              <a:t>Hands-on examples</a:t>
+              <a:t>VIP best practices excerpt</a:t>
             </a:r>
           </a:p>
         </p:txBody>
@@ -7213,6 +7772,355 @@
       <p:sp>
         <p:nvSpPr>
           <p:cNvPr id="3" name="TextBox 2"/>
+          <p:cNvSpPr txBox="1"/>
+          <p:nvPr/>
+        </p:nvSpPr>
+        <p:spPr>
+          <a:xfrm>
+            <a:off x="548640" y="1143000"/>
+            <a:ext cx="11064240" cy="5029200"/>
+          </a:xfrm>
+          <a:prstGeom prst="rect">
+            <a:avLst/>
+          </a:prstGeom>
+          <a:solidFill>
+            <a:srgbClr val="F4F4F4"/>
+          </a:solidFill>
+        </p:spPr>
+        <p:txBody>
+          <a:bodyPr wrap="square">
+            <a:noAutofit/>
+          </a:bodyPr>
+          <a:lstStyle/>
+          <a:p>
+            <a:pPr>
+              <a:lnSpc>
+                <a:spcPts val="2200"/>
+              </a:lnSpc>
+              <a:spcAft>
+                <a:spcPts val="400"/>
+              </a:spcAft>
+              <a:defRPr sz="2000" b="0">
+                <a:solidFill>
+                  <a:srgbClr val="333333"/>
+                </a:solidFill>
+                <a:latin typeface="Consolas"/>
+              </a:defRPr>
+            </a:pPr>
+            <a:r>
+              <a:t># Best Practices &amp; Quality Checklist (Module 7)</a:t>
+            </a:r>
+          </a:p>
+          <a:p>
+            <a:pPr>
+              <a:lnSpc>
+                <a:spcPts val="2200"/>
+              </a:lnSpc>
+              <a:spcAft>
+                <a:spcPts val="400"/>
+              </a:spcAft>
+              <a:defRPr sz="2000" b="0">
+                <a:solidFill>
+                  <a:srgbClr val="333333"/>
+                </a:solidFill>
+                <a:latin typeface="Consolas"/>
+              </a:defRPr>
+            </a:pPr>
+          </a:p>
+          <a:p>
+            <a:pPr>
+              <a:lnSpc>
+                <a:spcPts val="2200"/>
+              </a:lnSpc>
+              <a:spcAft>
+                <a:spcPts val="400"/>
+              </a:spcAft>
+              <a:defRPr sz="2000" b="0">
+                <a:solidFill>
+                  <a:srgbClr val="333333"/>
+                </a:solidFill>
+                <a:latin typeface="Consolas"/>
+              </a:defRPr>
+            </a:pPr>
+            <a:r>
+              <a:t>&gt; **Purpose**: Capture and enforce best practices for code, structure,</a:t>
+            </a:r>
+          </a:p>
+          <a:p>
+            <a:pPr>
+              <a:lnSpc>
+                <a:spcPts val="2200"/>
+              </a:lnSpc>
+              <a:spcAft>
+                <a:spcPts val="400"/>
+              </a:spcAft>
+              <a:defRPr sz="2000" b="0">
+                <a:solidFill>
+                  <a:srgbClr val="333333"/>
+                </a:solidFill>
+                <a:latin typeface="Consolas"/>
+              </a:defRPr>
+            </a:pPr>
+            <a:r>
+              <a:t>and maintenance in your real-world verification/VIP projects.</a:t>
+            </a:r>
+          </a:p>
+          <a:p>
+            <a:pPr>
+              <a:lnSpc>
+                <a:spcPts val="2200"/>
+              </a:lnSpc>
+              <a:spcAft>
+                <a:spcPts val="400"/>
+              </a:spcAft>
+              <a:defRPr sz="2000" b="0">
+                <a:solidFill>
+                  <a:srgbClr val="333333"/>
+                </a:solidFill>
+                <a:latin typeface="Consolas"/>
+              </a:defRPr>
+            </a:pPr>
+            <a:r>
+              <a:t>&gt; **Module**: 7 – Real-World Verification Applications &amp; VIP (SV/UVM)</a:t>
+            </a:r>
+          </a:p>
+          <a:p>
+            <a:pPr>
+              <a:lnSpc>
+                <a:spcPts val="2200"/>
+              </a:lnSpc>
+              <a:spcAft>
+                <a:spcPts val="400"/>
+              </a:spcAft>
+              <a:defRPr sz="2000" b="0">
+                <a:solidFill>
+                  <a:srgbClr val="333333"/>
+                </a:solidFill>
+                <a:latin typeface="Consolas"/>
+              </a:defRPr>
+            </a:pPr>
+          </a:p>
+          <a:p>
+            <a:pPr>
+              <a:lnSpc>
+                <a:spcPts val="2200"/>
+              </a:lnSpc>
+              <a:spcAft>
+                <a:spcPts val="400"/>
+              </a:spcAft>
+              <a:defRPr sz="2000" b="0">
+                <a:solidFill>
+                  <a:srgbClr val="333333"/>
+                </a:solidFill>
+                <a:latin typeface="Consolas"/>
+              </a:defRPr>
+            </a:pPr>
+            <a:r>
+              <a:t>&gt; **Instructions**: Fill in this document for your design. Copy from</a:t>
+            </a:r>
+          </a:p>
+          <a:p>
+            <a:pPr>
+              <a:lnSpc>
+                <a:spcPts val="2200"/>
+              </a:lnSpc>
+              <a:spcAft>
+                <a:spcPts val="400"/>
+              </a:spcAft>
+              <a:defRPr sz="2000" b="0">
+                <a:solidFill>
+                  <a:srgbClr val="333333"/>
+                </a:solidFill>
+                <a:latin typeface="Consolas"/>
+              </a:defRPr>
+            </a:pPr>
+            <a:r>
+              <a:t>`module7/templates/` if needed, or edit the file in `module7/` directly.</a:t>
+            </a:r>
+          </a:p>
+          <a:p>
+            <a:pPr>
+              <a:lnSpc>
+                <a:spcPts val="2200"/>
+              </a:lnSpc>
+              <a:spcAft>
+                <a:spcPts val="400"/>
+              </a:spcAft>
+              <a:defRPr sz="2000" b="0">
+                <a:solidFill>
+                  <a:srgbClr val="333333"/>
+                </a:solidFill>
+                <a:latin typeface="Consolas"/>
+              </a:defRPr>
+            </a:pPr>
+            <a:r>
+              <a:t>Reference: `module7/.solutions/`.</a:t>
+            </a:r>
+          </a:p>
+          <a:p>
+            <a:pPr>
+              <a:lnSpc>
+                <a:spcPts val="2200"/>
+              </a:lnSpc>
+              <a:spcAft>
+                <a:spcPts val="400"/>
+              </a:spcAft>
+              <a:defRPr sz="2000" b="0">
+                <a:solidFill>
+                  <a:srgbClr val="333333"/>
+                </a:solidFill>
+                <a:latin typeface="Consolas"/>
+              </a:defRPr>
+            </a:pPr>
+          </a:p>
+          <a:p>
+            <a:pPr>
+              <a:lnSpc>
+                <a:spcPts val="2200"/>
+              </a:lnSpc>
+              <a:spcAft>
+                <a:spcPts val="400"/>
+              </a:spcAft>
+              <a:defRPr sz="2000" b="0">
+                <a:solidFill>
+                  <a:srgbClr val="333333"/>
+                </a:solidFill>
+                <a:latin typeface="Consolas"/>
+              </a:defRPr>
+            </a:pPr>
+            <a:r>
+              <a:t>## 1. Project Structure</a:t>
+            </a:r>
+          </a:p>
+          <a:p>
+            <a:pPr>
+              <a:lnSpc>
+                <a:spcPts val="2200"/>
+              </a:lnSpc>
+              <a:spcAft>
+                <a:spcPts val="400"/>
+              </a:spcAft>
+              <a:defRPr sz="2000" b="0">
+                <a:solidFill>
+                  <a:srgbClr val="333333"/>
+                </a:solidFill>
+                <a:latin typeface="Consolas"/>
+              </a:defRPr>
+            </a:pPr>
+          </a:p>
+          <a:p>
+            <a:pPr>
+              <a:lnSpc>
+                <a:spcPts val="2200"/>
+              </a:lnSpc>
+              <a:spcAft>
+                <a:spcPts val="400"/>
+              </a:spcAft>
+              <a:defRPr sz="2000" b="0">
+                <a:solidFill>
+                  <a:srgbClr val="333333"/>
+                </a:solidFill>
+                <a:latin typeface="Consolas"/>
+              </a:defRPr>
+            </a:pPr>
+            <a:r>
+              <a:t>&lt;!-- TODO: Guidelines: separation (DUT, UVM/VIP, tests/scripts, docs).</a:t>
+            </a:r>
+          </a:p>
+          <a:p>
+            <a:pPr>
+              <a:lnSpc>
+                <a:spcPts val="2200"/>
+              </a:lnSpc>
+              <a:spcAft>
+                <a:spcPts val="400"/>
+              </a:spcAft>
+              <a:defRPr sz="2000" b="0">
+                <a:solidFill>
+                  <a:srgbClr val="333333"/>
+                </a:solidFill>
+                <a:latin typeface="Consolas"/>
+              </a:defRPr>
+            </a:pPr>
+            <a:r>
+              <a:t>Project-specific layout and naming. --&gt;</a:t>
+            </a:r>
+          </a:p>
+          <a:p>
+            <a:pPr>
+              <a:lnSpc>
+                <a:spcPts val="2200"/>
+              </a:lnSpc>
+              <a:spcAft>
+                <a:spcPts val="400"/>
+              </a:spcAft>
+              <a:defRPr sz="2000" b="0">
+                <a:solidFill>
+                  <a:srgbClr val="333333"/>
+                </a:solidFill>
+                <a:latin typeface="Consolas"/>
+              </a:defRPr>
+            </a:pPr>
+          </a:p>
+          <a:p>
+            <a:pPr>
+              <a:lnSpc>
+                <a:spcPts val="2200"/>
+              </a:lnSpc>
+              <a:spcAft>
+                <a:spcPts val="400"/>
+              </a:spcAft>
+              <a:defRPr sz="2000" b="0">
+                <a:solidFill>
+                  <a:srgbClr val="333333"/>
+                </a:solidFill>
+                <a:latin typeface="Consolas"/>
+              </a:defRPr>
+            </a:pPr>
+            <a:r>
+              <a:t>## 2. Code Quality and Naming</a:t>
+            </a:r>
+          </a:p>
+          <a:p>
+            <a:pPr>
+              <a:lnSpc>
+                <a:spcPts val="2200"/>
+              </a:lnSpc>
+              <a:spcAft>
+                <a:spcPts val="400"/>
+              </a:spcAft>
+              <a:defRPr sz="2000" b="0">
+                <a:solidFill>
+                  <a:srgbClr val="333333"/>
+                </a:solidFill>
+                <a:latin typeface="Consolas"/>
+              </a:defRPr>
+            </a:pPr>
+          </a:p>
+          <a:p>
+            <a:pPr>
+              <a:lnSpc>
+                <a:spcPts val="2200"/>
+              </a:lnSpc>
+              <a:spcAft>
+                <a:spcPts val="400"/>
+              </a:spcAft>
+              <a:defRPr sz="2000" b="0">
+                <a:solidFill>
+                  <a:srgbClr val="333333"/>
+                </a:solidFill>
+                <a:latin typeface="Consolas"/>
+              </a:defRPr>
+            </a:pPr>
+            <a:r>
+              <a:t>&lt;!-- TODO: Checklist: clear names, no magic numbers, consistent</a:t>
+            </a:r>
+          </a:p>
+        </p:txBody>
+      </p:sp>
+      <p:sp>
+        <p:nvSpPr>
+          <p:cNvPr id="4" name="TextBox 3"/>
           <p:cNvSpPr txBox="1"/>
           <p:nvPr/>
         </p:nvSpPr>
@@ -7275,8 +8183,8 @@
         </p:nvSpPr>
         <p:spPr>
           <a:xfrm>
-            <a:off x="548640" y="411480"/>
-            <a:ext cx="11064240" cy="777240"/>
+            <a:off x="548640" y="2743200"/>
+            <a:ext cx="11064240" cy="1371600"/>
           </a:xfrm>
           <a:prstGeom prst="rect">
             <a:avLst/>
@@ -7289,11 +8197,11 @@
           </a:bodyPr>
           <a:lstStyle/>
           <a:p>
-            <a:pPr>
-              <a:lnSpc>
-                <a:spcPts val="2200"/>
-              </a:lnSpc>
-              <a:defRPr sz="2800" b="1">
+            <a:pPr algn="ctr">
+              <a:lnSpc>
+                <a:spcPts val="2200"/>
+              </a:lnSpc>
+              <a:defRPr sz="3600" b="1">
                 <a:solidFill>
                   <a:srgbClr val="1A1A2E"/>
                 </a:solidFill>
@@ -7301,7 +8209,7 @@
               </a:defRPr>
             </a:pPr>
             <a:r>
-              <a:t>Module 7 self-check</a:t>
+              <a:t>Syllabus topics</a:t>
             </a:r>
           </a:p>
         </p:txBody>
@@ -7309,74 +8217,6 @@
       <p:sp>
         <p:nvSpPr>
           <p:cNvPr id="3" name="TextBox 2"/>
-          <p:cNvSpPr txBox="1"/>
-          <p:nvPr/>
-        </p:nvSpPr>
-        <p:spPr>
-          <a:xfrm>
-            <a:off x="548640" y="1051560"/>
-            <a:ext cx="11064240" cy="914400"/>
-          </a:xfrm>
-          <a:prstGeom prst="rect">
-            <a:avLst/>
-          </a:prstGeom>
-          <a:solidFill>
-            <a:srgbClr val="F4F4F4"/>
-          </a:solidFill>
-        </p:spPr>
-        <p:txBody>
-          <a:bodyPr wrap="square">
-            <a:noAutofit/>
-          </a:bodyPr>
-          <a:lstStyle/>
-          <a:p>
-            <a:pPr>
-              <a:lnSpc>
-                <a:spcPts val="2200"/>
-              </a:lnSpc>
-              <a:spcAft>
-                <a:spcPts val="200"/>
-              </a:spcAft>
-              <a:defRPr sz="2000" b="0">
-                <a:solidFill>
-                  <a:srgbClr val="333333"/>
-                </a:solidFill>
-                <a:latin typeface="Consolas"/>
-              </a:defRPr>
-            </a:pPr>
-            <a:r>
-              <a:t>$ ./scripts/module7.sh --help</a:t>
-            </a:r>
-          </a:p>
-        </p:txBody>
-      </p:sp>
-      <p:pic>
-        <p:nvPicPr>
-          <p:cNvPr id="4" name="Picture 3" descr="module7_check.png"/>
-          <p:cNvPicPr>
-            <a:picLocks noChangeAspect="1"/>
-          </p:cNvPicPr>
-          <p:nvPr/>
-        </p:nvPicPr>
-        <p:blipFill>
-          <a:blip r:embed="rId2"/>
-          <a:stretch>
-            <a:fillRect/>
-          </a:stretch>
-        </p:blipFill>
-        <p:spPr>
-          <a:xfrm>
-            <a:off x="548640" y="1965960"/>
-            <a:ext cx="7071358" cy="3977639"/>
-          </a:xfrm>
-          <a:prstGeom prst="rect">
-            <a:avLst/>
-          </a:prstGeom>
-        </p:spPr>
-      </p:pic>
-      <p:sp>
-        <p:nvSpPr>
-          <p:cNvPr id="5" name="TextBox 4"/>
           <p:cNvSpPr txBox="1"/>
           <p:nvPr/>
         </p:nvSpPr>
@@ -7465,7 +8305,7 @@
               </a:defRPr>
             </a:pPr>
             <a:r>
-              <a:t>Demo: VIP design template</a:t>
+              <a:t>1. End-to-End IP Verification</a:t>
             </a:r>
           </a:p>
         </p:txBody>
@@ -7478,15 +8318,13 @@
         </p:nvSpPr>
         <p:spPr>
           <a:xfrm>
-            <a:off x="548640" y="1051560"/>
-            <a:ext cx="11064240" cy="914400"/>
+            <a:off x="548640" y="1234440"/>
+            <a:ext cx="11064240" cy="4937760"/>
           </a:xfrm>
           <a:prstGeom prst="rect">
             <a:avLst/>
           </a:prstGeom>
-          <a:solidFill>
-            <a:srgbClr val="F4F4F4"/>
-          </a:solidFill>
+          <a:noFill/>
         </p:spPr>
         <p:txBody>
           <a:bodyPr wrap="square">
@@ -7499,48 +8337,81 @@
                 <a:spcPts val="2200"/>
               </a:lnSpc>
               <a:spcAft>
-                <a:spcPts val="200"/>
-              </a:spcAft>
-              <a:defRPr sz="2000" b="0">
-                <a:solidFill>
-                  <a:srgbClr val="333333"/>
-                </a:solidFill>
-                <a:latin typeface="Consolas"/>
-              </a:defRPr>
-            </a:pPr>
-            <a:r>
-              <a:t>$ head -30 module7/templates/VIP_DESIGN.md</a:t>
-            </a:r>
-          </a:p>
-        </p:txBody>
-      </p:sp>
-      <p:pic>
-        <p:nvPicPr>
-          <p:cNvPr id="4" name="Picture 3" descr="ex01_vip_design.png"/>
-          <p:cNvPicPr>
-            <a:picLocks noChangeAspect="1"/>
-          </p:cNvPicPr>
-          <p:nvPr/>
-        </p:nvPicPr>
-        <p:blipFill>
-          <a:blip r:embed="rId2"/>
-          <a:stretch>
-            <a:fillRect/>
-          </a:stretch>
-        </p:blipFill>
-        <p:spPr>
-          <a:xfrm>
-            <a:off x="548640" y="1965960"/>
-            <a:ext cx="7071358" cy="3977639"/>
-          </a:xfrm>
-          <a:prstGeom prst="rect">
-            <a:avLst/>
-          </a:prstGeom>
-        </p:spPr>
-      </p:pic>
-      <p:sp>
-        <p:nvSpPr>
-          <p:cNvPr id="5" name="TextBox 4"/>
+                <a:spcPts val="1000"/>
+              </a:spcAft>
+              <a:defRPr sz="2000" b="0">
+                <a:solidFill>
+                  <a:srgbClr val="333333"/>
+                </a:solidFill>
+                <a:latin typeface="Calibri"/>
+              </a:defRPr>
+            </a:pPr>
+            <a:r>
+              <a:t>• Applying planning + UVM + coverage + regression to</a:t>
+            </a:r>
+          </a:p>
+          <a:p>
+            <a:pPr>
+              <a:lnSpc>
+                <a:spcPts val="2200"/>
+              </a:lnSpc>
+              <a:spcAft>
+                <a:spcPts val="1000"/>
+              </a:spcAft>
+              <a:defRPr sz="2000" b="0">
+                <a:solidFill>
+                  <a:srgbClr val="333333"/>
+                </a:solidFill>
+                <a:latin typeface="Calibri"/>
+              </a:defRPr>
+            </a:pPr>
+            <a:r>
+              <a:t>      realistic IP.</a:t>
+            </a:r>
+          </a:p>
+          <a:p>
+            <a:pPr>
+              <a:lnSpc>
+                <a:spcPts val="2200"/>
+              </a:lnSpc>
+              <a:spcAft>
+                <a:spcPts val="1000"/>
+              </a:spcAft>
+              <a:defRPr sz="2000" b="0">
+                <a:solidFill>
+                  <a:srgbClr val="333333"/>
+                </a:solidFill>
+                <a:latin typeface="Calibri"/>
+              </a:defRPr>
+            </a:pPr>
+            <a:r>
+              <a:t>• Realistic test planning, coverage closure, and</a:t>
+            </a:r>
+          </a:p>
+          <a:p>
+            <a:pPr>
+              <a:lnSpc>
+                <a:spcPts val="2200"/>
+              </a:lnSpc>
+              <a:spcAft>
+                <a:spcPts val="1000"/>
+              </a:spcAft>
+              <a:defRPr sz="2000" b="0">
+                <a:solidFill>
+                  <a:srgbClr val="333333"/>
+                </a:solidFill>
+                <a:latin typeface="Calibri"/>
+              </a:defRPr>
+            </a:pPr>
+            <a:r>
+              <a:t>      regression operation.</a:t>
+            </a:r>
+          </a:p>
+        </p:txBody>
+      </p:sp>
+      <p:sp>
+        <p:nvSpPr>
+          <p:cNvPr id="4" name="TextBox 3"/>
           <p:cNvSpPr txBox="1"/>
           <p:nvPr/>
         </p:nvSpPr>
@@ -7629,7 +8500,7 @@
               </a:defRPr>
             </a:pPr>
             <a:r>
-              <a:t>Demo: Projects overview</a:t>
+              <a:t>2. VIP Design and Reuse</a:t>
             </a:r>
           </a:p>
         </p:txBody>
@@ -7642,15 +8513,13 @@
         </p:nvSpPr>
         <p:spPr>
           <a:xfrm>
-            <a:off x="548640" y="1051560"/>
-            <a:ext cx="11064240" cy="914400"/>
+            <a:off x="548640" y="1234440"/>
+            <a:ext cx="11064240" cy="4937760"/>
           </a:xfrm>
           <a:prstGeom prst="rect">
             <a:avLst/>
           </a:prstGeom>
-          <a:solidFill>
-            <a:srgbClr val="F4F4F4"/>
-          </a:solidFill>
+          <a:noFill/>
         </p:spPr>
         <p:txBody>
           <a:bodyPr wrap="square">
@@ -7663,48 +8532,43 @@
                 <a:spcPts val="2200"/>
               </a:lnSpc>
               <a:spcAft>
-                <a:spcPts val="200"/>
-              </a:spcAft>
-              <a:defRPr sz="2000" b="0">
-                <a:solidFill>
-                  <a:srgbClr val="333333"/>
-                </a:solidFill>
-                <a:latin typeface="Consolas"/>
-              </a:defRPr>
-            </a:pPr>
-            <a:r>
-              <a:t>$ head -25 module7/templates/PROJECTS.md</a:t>
-            </a:r>
-          </a:p>
-        </p:txBody>
-      </p:sp>
-      <p:pic>
-        <p:nvPicPr>
-          <p:cNvPr id="4" name="Picture 3" descr="ex02_projects.png"/>
-          <p:cNvPicPr>
-            <a:picLocks noChangeAspect="1"/>
-          </p:cNvPicPr>
-          <p:nvPr/>
-        </p:nvPicPr>
-        <p:blipFill>
-          <a:blip r:embed="rId2"/>
-          <a:stretch>
-            <a:fillRect/>
-          </a:stretch>
-        </p:blipFill>
-        <p:spPr>
-          <a:xfrm>
-            <a:off x="548640" y="1965960"/>
-            <a:ext cx="7071358" cy="3977639"/>
-          </a:xfrm>
-          <a:prstGeom prst="rect">
-            <a:avLst/>
-          </a:prstGeom>
-        </p:spPr>
-      </p:pic>
-      <p:sp>
-        <p:nvSpPr>
-          <p:cNvPr id="5" name="TextBox 4"/>
+                <a:spcPts val="1000"/>
+              </a:spcAft>
+              <a:defRPr sz="2000" b="0">
+                <a:solidFill>
+                  <a:srgbClr val="333333"/>
+                </a:solidFill>
+                <a:latin typeface="Calibri"/>
+              </a:defRPr>
+            </a:pPr>
+            <a:r>
+              <a:t>• Designing and documenting verification IP (VIP) for</a:t>
+            </a:r>
+          </a:p>
+          <a:p>
+            <a:pPr>
+              <a:lnSpc>
+                <a:spcPts val="2200"/>
+              </a:lnSpc>
+              <a:spcAft>
+                <a:spcPts val="1000"/>
+              </a:spcAft>
+              <a:defRPr sz="2000" b="0">
+                <a:solidFill>
+                  <a:srgbClr val="333333"/>
+                </a:solidFill>
+                <a:latin typeface="Calibri"/>
+              </a:defRPr>
+            </a:pPr>
+            <a:r>
+              <a:t>      protocols or blocks.</a:t>
+            </a:r>
+          </a:p>
+        </p:txBody>
+      </p:sp>
+      <p:sp>
+        <p:nvSpPr>
+          <p:cNvPr id="4" name="TextBox 3"/>
           <p:cNvSpPr txBox="1"/>
           <p:nvPr/>
         </p:nvSpPr>
@@ -7793,7 +8657,7 @@
               </a:defRPr>
             </a:pPr>
             <a:r>
-              <a:t>Demo: Best practices</a:t>
+              <a:t>3. Production Quality and Maintenance</a:t>
             </a:r>
           </a:p>
         </p:txBody>
@@ -7806,15 +8670,13 @@
         </p:nvSpPr>
         <p:spPr>
           <a:xfrm>
-            <a:off x="548640" y="1051560"/>
-            <a:ext cx="11064240" cy="914400"/>
+            <a:off x="548640" y="1234440"/>
+            <a:ext cx="11064240" cy="4937760"/>
           </a:xfrm>
           <a:prstGeom prst="rect">
             <a:avLst/>
           </a:prstGeom>
-          <a:solidFill>
-            <a:srgbClr val="F4F4F4"/>
-          </a:solidFill>
+          <a:noFill/>
         </p:spPr>
         <p:txBody>
           <a:bodyPr wrap="square">
@@ -7827,48 +8689,43 @@
                 <a:spcPts val="2200"/>
               </a:lnSpc>
               <a:spcAft>
-                <a:spcPts val="200"/>
-              </a:spcAft>
-              <a:defRPr sz="2000" b="0">
-                <a:solidFill>
-                  <a:srgbClr val="333333"/>
-                </a:solidFill>
-                <a:latin typeface="Consolas"/>
-              </a:defRPr>
-            </a:pPr>
-            <a:r>
-              <a:t>$ head -25 module7/templates/BEST_PRACTICES.md</a:t>
-            </a:r>
-          </a:p>
-        </p:txBody>
-      </p:sp>
-      <p:pic>
-        <p:nvPicPr>
-          <p:cNvPr id="4" name="Picture 3" descr="ex03_best_practices.png"/>
-          <p:cNvPicPr>
-            <a:picLocks noChangeAspect="1"/>
-          </p:cNvPicPr>
-          <p:nvPr/>
-        </p:nvPicPr>
-        <p:blipFill>
-          <a:blip r:embed="rId2"/>
-          <a:stretch>
-            <a:fillRect/>
-          </a:stretch>
-        </p:blipFill>
-        <p:spPr>
-          <a:xfrm>
-            <a:off x="548640" y="1965960"/>
-            <a:ext cx="7071358" cy="3977639"/>
-          </a:xfrm>
-          <a:prstGeom prst="rect">
-            <a:avLst/>
-          </a:prstGeom>
-        </p:spPr>
-      </p:pic>
-      <p:sp>
-        <p:nvSpPr>
-          <p:cNvPr id="5" name="TextBox 4"/>
+                <a:spcPts val="1000"/>
+              </a:spcAft>
+              <a:defRPr sz="2000" b="0">
+                <a:solidFill>
+                  <a:srgbClr val="333333"/>
+                </a:solidFill>
+                <a:latin typeface="Calibri"/>
+              </a:defRPr>
+            </a:pPr>
+            <a:r>
+              <a:t>• Best practices for project structure, code quality,</a:t>
+            </a:r>
+          </a:p>
+          <a:p>
+            <a:pPr>
+              <a:lnSpc>
+                <a:spcPts val="2200"/>
+              </a:lnSpc>
+              <a:spcAft>
+                <a:spcPts val="1000"/>
+              </a:spcAft>
+              <a:defRPr sz="2000" b="0">
+                <a:solidFill>
+                  <a:srgbClr val="333333"/>
+                </a:solidFill>
+                <a:latin typeface="Calibri"/>
+              </a:defRPr>
+            </a:pPr>
+            <a:r>
+              <a:t>      docs, and maintenance.</a:t>
+            </a:r>
+          </a:p>
+        </p:txBody>
+      </p:sp>
+      <p:sp>
+        <p:nvSpPr>
+          <p:cNvPr id="4" name="TextBox 3"/>
           <p:cNvSpPr txBox="1"/>
           <p:nvPr/>
         </p:nvSpPr>
@@ -7931,8 +8788,8 @@
         </p:nvSpPr>
         <p:spPr>
           <a:xfrm>
-            <a:off x="548640" y="411480"/>
-            <a:ext cx="11064240" cy="777240"/>
+            <a:off x="548640" y="2743200"/>
+            <a:ext cx="11064240" cy="1371600"/>
           </a:xfrm>
           <a:prstGeom prst="rect">
             <a:avLst/>
@@ -7945,11 +8802,11 @@
           </a:bodyPr>
           <a:lstStyle/>
           <a:p>
-            <a:pPr>
-              <a:lnSpc>
-                <a:spcPts val="2200"/>
-              </a:lnSpc>
-              <a:defRPr sz="2800" b="1">
+            <a:pPr algn="ctr">
+              <a:lnSpc>
+                <a:spcPts val="2200"/>
+              </a:lnSpc>
+              <a:defRPr sz="3600" b="1">
                 <a:solidFill>
                   <a:srgbClr val="1A1A2E"/>
                 </a:solidFill>
@@ -7957,7 +8814,7 @@
               </a:defRPr>
             </a:pPr>
             <a:r>
-              <a:t>Demo: Reference VIP design</a:t>
+              <a:t>Command reference highlights</a:t>
             </a:r>
           </a:p>
         </p:txBody>
@@ -7965,74 +8822,6 @@
       <p:sp>
         <p:nvSpPr>
           <p:cNvPr id="3" name="TextBox 2"/>
-          <p:cNvSpPr txBox="1"/>
-          <p:nvPr/>
-        </p:nvSpPr>
-        <p:spPr>
-          <a:xfrm>
-            <a:off x="548640" y="1051560"/>
-            <a:ext cx="11064240" cy="914400"/>
-          </a:xfrm>
-          <a:prstGeom prst="rect">
-            <a:avLst/>
-          </a:prstGeom>
-          <a:solidFill>
-            <a:srgbClr val="F4F4F4"/>
-          </a:solidFill>
-        </p:spPr>
-        <p:txBody>
-          <a:bodyPr wrap="square">
-            <a:noAutofit/>
-          </a:bodyPr>
-          <a:lstStyle/>
-          <a:p>
-            <a:pPr>
-              <a:lnSpc>
-                <a:spcPts val="2200"/>
-              </a:lnSpc>
-              <a:spcAft>
-                <a:spcPts val="200"/>
-              </a:spcAft>
-              <a:defRPr sz="2000" b="0">
-                <a:solidFill>
-                  <a:srgbClr val="333333"/>
-                </a:solidFill>
-                <a:latin typeface="Consolas"/>
-              </a:defRPr>
-            </a:pPr>
-            <a:r>
-              <a:t>$ head -20 module7/.solutions/VIP_DESIGN.md</a:t>
-            </a:r>
-          </a:p>
-        </p:txBody>
-      </p:sp>
-      <p:pic>
-        <p:nvPicPr>
-          <p:cNvPr id="4" name="Picture 3" descr="ex04_solutions.png"/>
-          <p:cNvPicPr>
-            <a:picLocks noChangeAspect="1"/>
-          </p:cNvPicPr>
-          <p:nvPr/>
-        </p:nvPicPr>
-        <p:blipFill>
-          <a:blip r:embed="rId2"/>
-          <a:stretch>
-            <a:fillRect/>
-          </a:stretch>
-        </p:blipFill>
-        <p:spPr>
-          <a:xfrm>
-            <a:off x="548640" y="1965960"/>
-            <a:ext cx="7071358" cy="3977639"/>
-          </a:xfrm>
-          <a:prstGeom prst="rect">
-            <a:avLst/>
-          </a:prstGeom>
-        </p:spPr>
-      </p:pic>
-      <p:sp>
-        <p:nvSpPr>
-          <p:cNvPr id="5" name="TextBox 4"/>
           <p:cNvSpPr txBox="1"/>
           <p:nvPr/>
         </p:nvSpPr>
@@ -8121,7 +8910,7 @@
               </a:defRPr>
             </a:pPr>
             <a:r>
-              <a:t>Demo: Module validation</a:t>
+              <a:t>Scaffold and validate Module 7</a:t>
             </a:r>
           </a:p>
         </p:txBody>
@@ -8134,15 +8923,13 @@
         </p:nvSpPr>
         <p:spPr>
           <a:xfrm>
-            <a:off x="548640" y="1051560"/>
-            <a:ext cx="11064240" cy="914400"/>
+            <a:off x="548640" y="1234440"/>
+            <a:ext cx="11064240" cy="4937760"/>
           </a:xfrm>
           <a:prstGeom prst="rect">
             <a:avLst/>
           </a:prstGeom>
-          <a:solidFill>
-            <a:srgbClr val="F4F4F4"/>
-          </a:solidFill>
+          <a:noFill/>
         </p:spPr>
         <p:txBody>
           <a:bodyPr wrap="square">
@@ -8155,48 +8942,24 @@
                 <a:spcPts val="2200"/>
               </a:lnSpc>
               <a:spcAft>
-                <a:spcPts val="200"/>
-              </a:spcAft>
-              <a:defRPr sz="2000" b="0">
-                <a:solidFill>
-                  <a:srgbClr val="333333"/>
-                </a:solidFill>
-                <a:latin typeface="Consolas"/>
-              </a:defRPr>
-            </a:pPr>
-            <a:r>
-              <a:t>$ ./scripts/module7.sh --check</a:t>
-            </a:r>
-          </a:p>
-        </p:txBody>
-      </p:sp>
-      <p:pic>
-        <p:nvPicPr>
-          <p:cNvPr id="4" name="Picture 3" descr="ex05_validate.png"/>
-          <p:cNvPicPr>
-            <a:picLocks noChangeAspect="1"/>
-          </p:cNvPicPr>
-          <p:nvPr/>
-        </p:nvPicPr>
-        <p:blipFill>
-          <a:blip r:embed="rId2"/>
-          <a:stretch>
-            <a:fillRect/>
-          </a:stretch>
-        </p:blipFill>
-        <p:spPr>
-          <a:xfrm>
-            <a:off x="548640" y="1965960"/>
-            <a:ext cx="7071358" cy="3977639"/>
-          </a:xfrm>
-          <a:prstGeom prst="rect">
-            <a:avLst/>
-          </a:prstGeom>
-        </p:spPr>
-      </p:pic>
-      <p:sp>
-        <p:nvSpPr>
-          <p:cNvPr id="5" name="TextBox 4"/>
+                <a:spcPts val="1000"/>
+              </a:spcAft>
+              <a:defRPr sz="2000" b="0">
+                <a:solidFill>
+                  <a:srgbClr val="333333"/>
+                </a:solidFill>
+                <a:latin typeface="Calibri"/>
+              </a:defRPr>
+            </a:pPr>
+            <a:r>
+              <a:t>• ./scripts/module7.sh --scaffold</a:t>
+            </a:r>
+          </a:p>
+        </p:txBody>
+      </p:sp>
+      <p:sp>
+        <p:nvSpPr>
+          <p:cNvPr id="4" name="TextBox 3"/>
           <p:cNvSpPr txBox="1"/>
           <p:nvPr/>
         </p:nvSpPr>
@@ -8259,8 +9022,8 @@
         </p:nvSpPr>
         <p:spPr>
           <a:xfrm>
-            <a:off x="548640" y="2743200"/>
-            <a:ext cx="11064240" cy="1371600"/>
+            <a:off x="548640" y="411480"/>
+            <a:ext cx="11064240" cy="777240"/>
           </a:xfrm>
           <a:prstGeom prst="rect">
             <a:avLst/>
@@ -8273,11 +9036,11 @@
           </a:bodyPr>
           <a:lstStyle/>
           <a:p>
-            <a:pPr algn="ctr">
-              <a:lnSpc>
-                <a:spcPts val="2200"/>
-              </a:lnSpc>
-              <a:defRPr sz="3600" b="1">
+            <a:pPr>
+              <a:lnSpc>
+                <a:spcPts val="2200"/>
+              </a:lnSpc>
+              <a:defRPr sz="2800" b="1">
                 <a:solidFill>
                   <a:srgbClr val="1A1A2E"/>
                 </a:solidFill>
@@ -8285,7 +9048,7 @@
               </a:defRPr>
             </a:pPr>
             <a:r>
-              <a:t>Practice &amp; assessment</a:t>
+              <a:t>Review VIP and project templates</a:t>
             </a:r>
           </a:p>
         </p:txBody>
@@ -8293,6 +9056,48 @@
       <p:sp>
         <p:nvSpPr>
           <p:cNvPr id="3" name="TextBox 2"/>
+          <p:cNvSpPr txBox="1"/>
+          <p:nvPr/>
+        </p:nvSpPr>
+        <p:spPr>
+          <a:xfrm>
+            <a:off x="548640" y="1234440"/>
+            <a:ext cx="11064240" cy="4937760"/>
+          </a:xfrm>
+          <a:prstGeom prst="rect">
+            <a:avLst/>
+          </a:prstGeom>
+          <a:noFill/>
+        </p:spPr>
+        <p:txBody>
+          <a:bodyPr wrap="square">
+            <a:noAutofit/>
+          </a:bodyPr>
+          <a:lstStyle/>
+          <a:p>
+            <a:pPr>
+              <a:lnSpc>
+                <a:spcPts val="2200"/>
+              </a:lnSpc>
+              <a:spcAft>
+                <a:spcPts val="1000"/>
+              </a:spcAft>
+              <a:defRPr sz="2000" b="0">
+                <a:solidFill>
+                  <a:srgbClr val="333333"/>
+                </a:solidFill>
+                <a:latin typeface="Calibri"/>
+              </a:defRPr>
+            </a:pPr>
+            <a:r>
+              <a:t>• head -40 module7/templates/VIP_DESIGN.md</a:t>
+            </a:r>
+          </a:p>
+        </p:txBody>
+      </p:sp>
+      <p:sp>
+        <p:nvSpPr>
+          <p:cNvPr id="4" name="TextBox 3"/>
           <p:cNvSpPr txBox="1"/>
           <p:nvPr/>
         </p:nvSpPr>
@@ -8355,8 +9160,8 @@
         </p:nvSpPr>
         <p:spPr>
           <a:xfrm>
-            <a:off x="548640" y="411480"/>
-            <a:ext cx="11064240" cy="777240"/>
+            <a:off x="548640" y="2743200"/>
+            <a:ext cx="11064240" cy="1371600"/>
           </a:xfrm>
           <a:prstGeom prst="rect">
             <a:avLst/>
@@ -8369,11 +9174,11 @@
           </a:bodyPr>
           <a:lstStyle/>
           <a:p>
-            <a:pPr>
-              <a:lnSpc>
-                <a:spcPts val="2200"/>
-              </a:lnSpc>
-              <a:defRPr sz="2800" b="1">
+            <a:pPr algn="ctr">
+              <a:lnSpc>
+                <a:spcPts val="2200"/>
+              </a:lnSpc>
+              <a:defRPr sz="3600" b="1">
                 <a:solidFill>
                   <a:srgbClr val="1A1A2E"/>
                 </a:solidFill>
@@ -8381,7 +9186,7 @@
               </a:defRPr>
             </a:pPr>
             <a:r>
-              <a:t>What you should know (1/2)</a:t>
+              <a:t>Hands-on examples</a:t>
             </a:r>
           </a:p>
         </p:txBody>
@@ -8389,257 +9194,6 @@
       <p:sp>
         <p:nvSpPr>
           <p:cNvPr id="3" name="TextBox 2"/>
-          <p:cNvSpPr txBox="1"/>
-          <p:nvPr/>
-        </p:nvSpPr>
-        <p:spPr>
-          <a:xfrm>
-            <a:off x="548640" y="1234440"/>
-            <a:ext cx="11064240" cy="4937760"/>
-          </a:xfrm>
-          <a:prstGeom prst="rect">
-            <a:avLst/>
-          </a:prstGeom>
-          <a:noFill/>
-        </p:spPr>
-        <p:txBody>
-          <a:bodyPr wrap="square">
-            <a:noAutofit/>
-          </a:bodyPr>
-          <a:lstStyle/>
-          <a:p>
-            <a:pPr>
-              <a:lnSpc>
-                <a:spcPts val="2200"/>
-              </a:lnSpc>
-              <a:spcAft>
-                <a:spcPts val="1000"/>
-              </a:spcAft>
-              <a:defRPr sz="2000" b="0">
-                <a:solidFill>
-                  <a:srgbClr val="333333"/>
-                </a:solidFill>
-                <a:latin typeface="Calibri"/>
-              </a:defRPr>
-            </a:pPr>
-            <a:r>
-              <a:t>• Design and implement a complete verification</a:t>
-            </a:r>
-          </a:p>
-          <a:p>
-            <a:pPr>
-              <a:lnSpc>
-                <a:spcPts val="2200"/>
-              </a:lnSpc>
-              <a:spcAft>
-                <a:spcPts val="1000"/>
-              </a:spcAft>
-              <a:defRPr sz="2000" b="0">
-                <a:solidFill>
-                  <a:srgbClr val="333333"/>
-                </a:solidFill>
-                <a:latin typeface="Calibri"/>
-              </a:defRPr>
-            </a:pPr>
-            <a:r>
-              <a:t>      environment for a realistic DUT.</a:t>
-            </a:r>
-          </a:p>
-          <a:p>
-            <a:pPr>
-              <a:lnSpc>
-                <a:spcPts val="2200"/>
-              </a:lnSpc>
-              <a:spcAft>
-                <a:spcPts val="1000"/>
-              </a:spcAft>
-              <a:defRPr sz="2000" b="0">
-                <a:solidFill>
-                  <a:srgbClr val="333333"/>
-                </a:solidFill>
-                <a:latin typeface="Calibri"/>
-              </a:defRPr>
-            </a:pPr>
-            <a:r>
-              <a:t>• Create and document reusable VIP that others could</a:t>
-            </a:r>
-          </a:p>
-          <a:p>
-            <a:pPr>
-              <a:lnSpc>
-                <a:spcPts val="2200"/>
-              </a:lnSpc>
-              <a:spcAft>
-                <a:spcPts val="1000"/>
-              </a:spcAft>
-              <a:defRPr sz="2000" b="0">
-                <a:solidFill>
-                  <a:srgbClr val="333333"/>
-                </a:solidFill>
-                <a:latin typeface="Calibri"/>
-              </a:defRPr>
-            </a:pPr>
-            <a:r>
-              <a:t>      adopt.</a:t>
-            </a:r>
-          </a:p>
-          <a:p>
-            <a:pPr>
-              <a:lnSpc>
-                <a:spcPts val="2200"/>
-              </a:lnSpc>
-              <a:spcAft>
-                <a:spcPts val="1000"/>
-              </a:spcAft>
-              <a:defRPr sz="2000" b="0">
-                <a:solidFill>
-                  <a:srgbClr val="333333"/>
-                </a:solidFill>
-                <a:latin typeface="Calibri"/>
-              </a:defRPr>
-            </a:pPr>
-            <a:r>
-              <a:t>• Operate regressions and coverage closure as you</a:t>
-            </a:r>
-          </a:p>
-          <a:p>
-            <a:pPr>
-              <a:lnSpc>
-                <a:spcPts val="2200"/>
-              </a:lnSpc>
-              <a:spcAft>
-                <a:spcPts val="1000"/>
-              </a:spcAft>
-              <a:defRPr sz="2000" b="0">
-                <a:solidFill>
-                  <a:srgbClr val="333333"/>
-                </a:solidFill>
-                <a:latin typeface="Calibri"/>
-              </a:defRPr>
-            </a:pPr>
-            <a:r>
-              <a:t>      would in a real team.</a:t>
-            </a:r>
-          </a:p>
-          <a:p>
-            <a:pPr>
-              <a:lnSpc>
-                <a:spcPts val="2200"/>
-              </a:lnSpc>
-              <a:spcAft>
-                <a:spcPts val="1000"/>
-              </a:spcAft>
-              <a:defRPr sz="2000" b="0">
-                <a:solidFill>
-                  <a:srgbClr val="333333"/>
-                </a:solidFill>
-                <a:latin typeface="Calibri"/>
-              </a:defRPr>
-            </a:pPr>
-            <a:r>
-              <a:t>• Maintain production-quality code, docs, and tests</a:t>
-            </a:r>
-          </a:p>
-          <a:p>
-            <a:pPr>
-              <a:lnSpc>
-                <a:spcPts val="2200"/>
-              </a:lnSpc>
-              <a:spcAft>
-                <a:spcPts val="1000"/>
-              </a:spcAft>
-              <a:defRPr sz="2000" b="0">
-                <a:solidFill>
-                  <a:srgbClr val="333333"/>
-                </a:solidFill>
-                <a:latin typeface="Calibri"/>
-              </a:defRPr>
-            </a:pPr>
-            <a:r>
-              <a:t>      over the lifetime of a project.</a:t>
-            </a:r>
-          </a:p>
-          <a:p>
-            <a:pPr>
-              <a:lnSpc>
-                <a:spcPts val="2200"/>
-              </a:lnSpc>
-              <a:spcAft>
-                <a:spcPts val="1000"/>
-              </a:spcAft>
-              <a:defRPr sz="2000" b="0">
-                <a:solidFill>
-                  <a:srgbClr val="333333"/>
-                </a:solidFill>
-                <a:latin typeface="Calibri"/>
-              </a:defRPr>
-            </a:pPr>
-            <a:r>
-              <a:t>• At least one substantial real-world style project is</a:t>
-            </a:r>
-          </a:p>
-          <a:p>
-            <a:pPr>
-              <a:lnSpc>
-                <a:spcPts val="2200"/>
-              </a:lnSpc>
-              <a:spcAft>
-                <a:spcPts val="1000"/>
-              </a:spcAft>
-              <a:defRPr sz="2000" b="0">
-                <a:solidFill>
-                  <a:srgbClr val="333333"/>
-                </a:solidFill>
-                <a:latin typeface="Calibri"/>
-              </a:defRPr>
-            </a:pPr>
-            <a:r>
-              <a:t>      described and partially/fully implemented.</a:t>
-            </a:r>
-          </a:p>
-          <a:p>
-            <a:pPr>
-              <a:lnSpc>
-                <a:spcPts val="2200"/>
-              </a:lnSpc>
-              <a:spcAft>
-                <a:spcPts val="1000"/>
-              </a:spcAft>
-              <a:defRPr sz="2000" b="0">
-                <a:solidFill>
-                  <a:srgbClr val="333333"/>
-                </a:solidFill>
-                <a:latin typeface="Calibri"/>
-              </a:defRPr>
-            </a:pPr>
-            <a:r>
-              <a:t>• VIP or environment design is documented in</a:t>
-            </a:r>
-          </a:p>
-          <a:p>
-            <a:pPr>
-              <a:lnSpc>
-                <a:spcPts val="2200"/>
-              </a:lnSpc>
-              <a:spcAft>
-                <a:spcPts val="1000"/>
-              </a:spcAft>
-              <a:defRPr sz="2000" b="0">
-                <a:solidFill>
-                  <a:srgbClr val="333333"/>
-                </a:solidFill>
-                <a:latin typeface="Calibri"/>
-              </a:defRPr>
-            </a:pPr>
-            <a:r>
-              <a:t>      `module7/VIP_DESIGN.md` and `module7/PROJECTS.md`.</a:t>
-            </a:r>
-          </a:p>
-        </p:txBody>
-      </p:sp>
-      <p:sp>
-        <p:nvSpPr>
-          <p:cNvPr id="4" name="TextBox 3"/>
           <p:cNvSpPr txBox="1"/>
           <p:nvPr/>
         </p:nvSpPr>
@@ -8728,7 +9282,7 @@
               </a:defRPr>
             </a:pPr>
             <a:r>
-              <a:t>What you should know (2/2)</a:t>
+              <a:t>Module 7 self-check</a:t>
             </a:r>
           </a:p>
         </p:txBody>
@@ -8741,13 +9295,15 @@
         </p:nvSpPr>
         <p:spPr>
           <a:xfrm>
-            <a:off x="548640" y="1234440"/>
-            <a:ext cx="11064240" cy="4937760"/>
+            <a:off x="548640" y="1051560"/>
+            <a:ext cx="11064240" cy="914400"/>
           </a:xfrm>
           <a:prstGeom prst="rect">
             <a:avLst/>
           </a:prstGeom>
-          <a:noFill/>
+          <a:solidFill>
+            <a:srgbClr val="F4F4F4"/>
+          </a:solidFill>
         </p:spPr>
         <p:txBody>
           <a:bodyPr wrap="square">
@@ -8760,100 +9316,48 @@
                 <a:spcPts val="2200"/>
               </a:lnSpc>
               <a:spcAft>
-                <a:spcPts val="1000"/>
-              </a:spcAft>
-              <a:defRPr sz="2000" b="0">
-                <a:solidFill>
-                  <a:srgbClr val="333333"/>
-                </a:solidFill>
-                <a:latin typeface="Calibri"/>
-              </a:defRPr>
-            </a:pPr>
-            <a:r>
-              <a:t>• Best-practices checklist largely satisfied</a:t>
-            </a:r>
-          </a:p>
-          <a:p>
-            <a:pPr>
-              <a:lnSpc>
-                <a:spcPts val="2200"/>
-              </a:lnSpc>
-              <a:spcAft>
-                <a:spcPts val="1000"/>
-              </a:spcAft>
-              <a:defRPr sz="2000" b="0">
-                <a:solidFill>
-                  <a:srgbClr val="333333"/>
-                </a:solidFill>
-                <a:latin typeface="Calibri"/>
-              </a:defRPr>
-            </a:pPr>
-            <a:r>
-              <a:t>      (`module7/BEST_PRACTICES.md` /</a:t>
-            </a:r>
-          </a:p>
-          <a:p>
-            <a:pPr>
-              <a:lnSpc>
-                <a:spcPts val="2200"/>
-              </a:lnSpc>
-              <a:spcAft>
-                <a:spcPts val="1000"/>
-              </a:spcAft>
-              <a:defRPr sz="2000" b="0">
-                <a:solidFill>
-                  <a:srgbClr val="333333"/>
-                </a:solidFill>
-                <a:latin typeface="Calibri"/>
-              </a:defRPr>
-            </a:pPr>
-            <a:r>
-              <a:t>      `module7/CHECKLIST.md`).</a:t>
-            </a:r>
-          </a:p>
-          <a:p>
-            <a:pPr>
-              <a:lnSpc>
-                <a:spcPts val="2200"/>
-              </a:lnSpc>
-              <a:spcAft>
-                <a:spcPts val="1000"/>
-              </a:spcAft>
-              <a:defRPr sz="2000" b="0">
-                <a:solidFill>
-                  <a:srgbClr val="333333"/>
-                </a:solidFill>
-                <a:latin typeface="Calibri"/>
-              </a:defRPr>
-            </a:pPr>
-            <a:r>
-              <a:t>• You can explain your project and design decisions as</a:t>
-            </a:r>
-          </a:p>
-          <a:p>
-            <a:pPr>
-              <a:lnSpc>
-                <a:spcPts val="2200"/>
-              </a:lnSpc>
-              <a:spcAft>
-                <a:spcPts val="1000"/>
-              </a:spcAft>
-              <a:defRPr sz="2000" b="0">
-                <a:solidFill>
-                  <a:srgbClr val="333333"/>
-                </a:solidFill>
-                <a:latin typeface="Calibri"/>
-              </a:defRPr>
-            </a:pPr>
-            <a:r>
-              <a:t>      if presenting to a review board.</a:t>
-            </a:r>
-          </a:p>
-        </p:txBody>
-      </p:sp>
-      <p:sp>
-        <p:nvSpPr>
-          <p:cNvPr id="4" name="TextBox 3"/>
+                <a:spcPts val="200"/>
+              </a:spcAft>
+              <a:defRPr sz="2000" b="0">
+                <a:solidFill>
+                  <a:srgbClr val="333333"/>
+                </a:solidFill>
+                <a:latin typeface="Consolas"/>
+              </a:defRPr>
+            </a:pPr>
+            <a:r>
+              <a:t>$ ./scripts/module7.sh --help</a:t>
+            </a:r>
+          </a:p>
+        </p:txBody>
+      </p:sp>
+      <p:pic>
+        <p:nvPicPr>
+          <p:cNvPr id="4" name="Picture 3" descr="module7_check.png"/>
+          <p:cNvPicPr>
+            <a:picLocks noChangeAspect="1"/>
+          </p:cNvPicPr>
+          <p:nvPr/>
+        </p:nvPicPr>
+        <p:blipFill>
+          <a:blip r:embed="rId2"/>
+          <a:stretch>
+            <a:fillRect/>
+          </a:stretch>
+        </p:blipFill>
+        <p:spPr>
+          <a:xfrm>
+            <a:off x="548640" y="1965960"/>
+            <a:ext cx="7071358" cy="3977639"/>
+          </a:xfrm>
+          <a:prstGeom prst="rect">
+            <a:avLst/>
+          </a:prstGeom>
+        </p:spPr>
+      </p:pic>
+      <p:sp>
+        <p:nvSpPr>
+          <p:cNvPr id="5" name="TextBox 4"/>
           <p:cNvSpPr txBox="1"/>
           <p:nvPr/>
         </p:nvSpPr>
@@ -9080,7 +9584,7 @@
               </a:defRPr>
             </a:pPr>
             <a:r>
-              <a:t>Assessment checklist</a:t>
+              <a:t>Demo: VIP design template</a:t>
             </a:r>
           </a:p>
         </p:txBody>
@@ -9093,13 +9597,15 @@
         </p:nvSpPr>
         <p:spPr>
           <a:xfrm>
-            <a:off x="548640" y="1234440"/>
-            <a:ext cx="11064240" cy="4937760"/>
+            <a:off x="548640" y="1051560"/>
+            <a:ext cx="11064240" cy="914400"/>
           </a:xfrm>
           <a:prstGeom prst="rect">
             <a:avLst/>
           </a:prstGeom>
-          <a:noFill/>
+          <a:solidFill>
+            <a:srgbClr val="F4F4F4"/>
+          </a:solidFill>
         </p:spPr>
         <p:txBody>
           <a:bodyPr wrap="square">
@@ -9112,176 +9618,48 @@
                 <a:spcPts val="2200"/>
               </a:lnSpc>
               <a:spcAft>
-                <a:spcPts val="1000"/>
-              </a:spcAft>
-              <a:defRPr sz="2000" b="0">
-                <a:solidFill>
-                  <a:srgbClr val="333333"/>
-                </a:solidFill>
-                <a:latin typeface="Calibri"/>
-              </a:defRPr>
-            </a:pPr>
-            <a:r>
-              <a:t>• At least one substantial real-world style project is</a:t>
-            </a:r>
-          </a:p>
-          <a:p>
-            <a:pPr>
-              <a:lnSpc>
-                <a:spcPts val="2200"/>
-              </a:lnSpc>
-              <a:spcAft>
-                <a:spcPts val="1000"/>
-              </a:spcAft>
-              <a:defRPr sz="2000" b="0">
-                <a:solidFill>
-                  <a:srgbClr val="333333"/>
-                </a:solidFill>
-                <a:latin typeface="Calibri"/>
-              </a:defRPr>
-            </a:pPr>
-            <a:r>
-              <a:t>      described and partially/fully implemented.</a:t>
-            </a:r>
-          </a:p>
-          <a:p>
-            <a:pPr>
-              <a:lnSpc>
-                <a:spcPts val="2200"/>
-              </a:lnSpc>
-              <a:spcAft>
-                <a:spcPts val="1000"/>
-              </a:spcAft>
-              <a:defRPr sz="2000" b="0">
-                <a:solidFill>
-                  <a:srgbClr val="333333"/>
-                </a:solidFill>
-                <a:latin typeface="Calibri"/>
-              </a:defRPr>
-            </a:pPr>
-            <a:r>
-              <a:t>• VIP or environment design is documented in</a:t>
-            </a:r>
-          </a:p>
-          <a:p>
-            <a:pPr>
-              <a:lnSpc>
-                <a:spcPts val="2200"/>
-              </a:lnSpc>
-              <a:spcAft>
-                <a:spcPts val="1000"/>
-              </a:spcAft>
-              <a:defRPr sz="2000" b="0">
-                <a:solidFill>
-                  <a:srgbClr val="333333"/>
-                </a:solidFill>
-                <a:latin typeface="Calibri"/>
-              </a:defRPr>
-            </a:pPr>
-            <a:r>
-              <a:t>      `module7/VIP_DESIGN.md` and `module7/PROJECTS.md`.</a:t>
-            </a:r>
-          </a:p>
-          <a:p>
-            <a:pPr>
-              <a:lnSpc>
-                <a:spcPts val="2200"/>
-              </a:lnSpc>
-              <a:spcAft>
-                <a:spcPts val="1000"/>
-              </a:spcAft>
-              <a:defRPr sz="2000" b="0">
-                <a:solidFill>
-                  <a:srgbClr val="333333"/>
-                </a:solidFill>
-                <a:latin typeface="Calibri"/>
-              </a:defRPr>
-            </a:pPr>
-            <a:r>
-              <a:t>• Best-practices checklist largely satisfied</a:t>
-            </a:r>
-          </a:p>
-          <a:p>
-            <a:pPr>
-              <a:lnSpc>
-                <a:spcPts val="2200"/>
-              </a:lnSpc>
-              <a:spcAft>
-                <a:spcPts val="1000"/>
-              </a:spcAft>
-              <a:defRPr sz="2000" b="0">
-                <a:solidFill>
-                  <a:srgbClr val="333333"/>
-                </a:solidFill>
-                <a:latin typeface="Calibri"/>
-              </a:defRPr>
-            </a:pPr>
-            <a:r>
-              <a:t>      (`module7/BEST_PRACTICES.md` /</a:t>
-            </a:r>
-          </a:p>
-          <a:p>
-            <a:pPr>
-              <a:lnSpc>
-                <a:spcPts val="2200"/>
-              </a:lnSpc>
-              <a:spcAft>
-                <a:spcPts val="1000"/>
-              </a:spcAft>
-              <a:defRPr sz="2000" b="0">
-                <a:solidFill>
-                  <a:srgbClr val="333333"/>
-                </a:solidFill>
-                <a:latin typeface="Calibri"/>
-              </a:defRPr>
-            </a:pPr>
-            <a:r>
-              <a:t>      `module7/CHECKLIST.md`).</a:t>
-            </a:r>
-          </a:p>
-          <a:p>
-            <a:pPr>
-              <a:lnSpc>
-                <a:spcPts val="2200"/>
-              </a:lnSpc>
-              <a:spcAft>
-                <a:spcPts val="1000"/>
-              </a:spcAft>
-              <a:defRPr sz="2000" b="0">
-                <a:solidFill>
-                  <a:srgbClr val="333333"/>
-                </a:solidFill>
-                <a:latin typeface="Calibri"/>
-              </a:defRPr>
-            </a:pPr>
-            <a:r>
-              <a:t>• You can explain your project and design decisions as</a:t>
-            </a:r>
-          </a:p>
-          <a:p>
-            <a:pPr>
-              <a:lnSpc>
-                <a:spcPts val="2200"/>
-              </a:lnSpc>
-              <a:spcAft>
-                <a:spcPts val="1000"/>
-              </a:spcAft>
-              <a:defRPr sz="2000" b="0">
-                <a:solidFill>
-                  <a:srgbClr val="333333"/>
-                </a:solidFill>
-                <a:latin typeface="Calibri"/>
-              </a:defRPr>
-            </a:pPr>
-            <a:r>
-              <a:t>      if presenting to a review board.</a:t>
-            </a:r>
-          </a:p>
-        </p:txBody>
-      </p:sp>
-      <p:sp>
-        <p:nvSpPr>
-          <p:cNvPr id="4" name="TextBox 3"/>
+                <a:spcPts val="200"/>
+              </a:spcAft>
+              <a:defRPr sz="2000" b="0">
+                <a:solidFill>
+                  <a:srgbClr val="333333"/>
+                </a:solidFill>
+                <a:latin typeface="Consolas"/>
+              </a:defRPr>
+            </a:pPr>
+            <a:r>
+              <a:t>$ head -30 module7/templates/VIP_DESIGN.md</a:t>
+            </a:r>
+          </a:p>
+        </p:txBody>
+      </p:sp>
+      <p:pic>
+        <p:nvPicPr>
+          <p:cNvPr id="4" name="Picture 3" descr="ex01_vip_design.png"/>
+          <p:cNvPicPr>
+            <a:picLocks noChangeAspect="1"/>
+          </p:cNvPicPr>
+          <p:nvPr/>
+        </p:nvPicPr>
+        <p:blipFill>
+          <a:blip r:embed="rId2"/>
+          <a:stretch>
+            <a:fillRect/>
+          </a:stretch>
+        </p:blipFill>
+        <p:spPr>
+          <a:xfrm>
+            <a:off x="548640" y="1965960"/>
+            <a:ext cx="7071358" cy="3977639"/>
+          </a:xfrm>
+          <a:prstGeom prst="rect">
+            <a:avLst/>
+          </a:prstGeom>
+        </p:spPr>
+      </p:pic>
+      <p:sp>
+        <p:nvSpPr>
+          <p:cNvPr id="5" name="TextBox 4"/>
           <p:cNvSpPr txBox="1"/>
           <p:nvPr/>
         </p:nvSpPr>
@@ -9370,6 +9748,1609 @@
               </a:defRPr>
             </a:pPr>
             <a:r>
+              <a:t>Demo: Projects overview</a:t>
+            </a:r>
+          </a:p>
+        </p:txBody>
+      </p:sp>
+      <p:sp>
+        <p:nvSpPr>
+          <p:cNvPr id="3" name="TextBox 2"/>
+          <p:cNvSpPr txBox="1"/>
+          <p:nvPr/>
+        </p:nvSpPr>
+        <p:spPr>
+          <a:xfrm>
+            <a:off x="548640" y="1051560"/>
+            <a:ext cx="11064240" cy="914400"/>
+          </a:xfrm>
+          <a:prstGeom prst="rect">
+            <a:avLst/>
+          </a:prstGeom>
+          <a:solidFill>
+            <a:srgbClr val="F4F4F4"/>
+          </a:solidFill>
+        </p:spPr>
+        <p:txBody>
+          <a:bodyPr wrap="square">
+            <a:noAutofit/>
+          </a:bodyPr>
+          <a:lstStyle/>
+          <a:p>
+            <a:pPr>
+              <a:lnSpc>
+                <a:spcPts val="2200"/>
+              </a:lnSpc>
+              <a:spcAft>
+                <a:spcPts val="200"/>
+              </a:spcAft>
+              <a:defRPr sz="2000" b="0">
+                <a:solidFill>
+                  <a:srgbClr val="333333"/>
+                </a:solidFill>
+                <a:latin typeface="Consolas"/>
+              </a:defRPr>
+            </a:pPr>
+            <a:r>
+              <a:t>$ head -25 module7/templates/PROJECTS.md</a:t>
+            </a:r>
+          </a:p>
+        </p:txBody>
+      </p:sp>
+      <p:pic>
+        <p:nvPicPr>
+          <p:cNvPr id="4" name="Picture 3" descr="ex02_projects.png"/>
+          <p:cNvPicPr>
+            <a:picLocks noChangeAspect="1"/>
+          </p:cNvPicPr>
+          <p:nvPr/>
+        </p:nvPicPr>
+        <p:blipFill>
+          <a:blip r:embed="rId2"/>
+          <a:stretch>
+            <a:fillRect/>
+          </a:stretch>
+        </p:blipFill>
+        <p:spPr>
+          <a:xfrm>
+            <a:off x="548640" y="1965960"/>
+            <a:ext cx="7071358" cy="3977639"/>
+          </a:xfrm>
+          <a:prstGeom prst="rect">
+            <a:avLst/>
+          </a:prstGeom>
+        </p:spPr>
+      </p:pic>
+      <p:sp>
+        <p:nvSpPr>
+          <p:cNvPr id="5" name="TextBox 4"/>
+          <p:cNvSpPr txBox="1"/>
+          <p:nvPr/>
+        </p:nvSpPr>
+        <p:spPr>
+          <a:xfrm>
+            <a:off x="548640" y="6355080"/>
+            <a:ext cx="11064240" cy="320040"/>
+          </a:xfrm>
+          <a:prstGeom prst="rect">
+            <a:avLst/>
+          </a:prstGeom>
+          <a:noFill/>
+        </p:spPr>
+        <p:txBody>
+          <a:bodyPr wrap="square">
+            <a:noAutofit/>
+          </a:bodyPr>
+          <a:lstStyle/>
+          <a:p>
+            <a:pPr algn="r">
+              <a:lnSpc>
+                <a:spcPts val="2200"/>
+              </a:lnSpc>
+              <a:defRPr sz="1000" b="0">
+                <a:solidFill>
+                  <a:srgbClr val="666666"/>
+                </a:solidFill>
+                <a:latin typeface="Calibri"/>
+              </a:defRPr>
+            </a:pPr>
+            <a:r>
+              <a:t>verification_planning_management / Module 7</a:t>
+            </a:r>
+          </a:p>
+        </p:txBody>
+      </p:sp>
+    </p:spTree>
+  </p:cSld>
+  <p:clrMapOvr>
+    <a:masterClrMapping/>
+  </p:clrMapOvr>
+</p:sld>
+</file>
+
+<file path=ppt/slides/slide32.xml><?xml version="1.0" encoding="utf-8"?>
+<p:sld xmlns:a="http://schemas.openxmlformats.org/drawingml/2006/main" xmlns:p="http://schemas.openxmlformats.org/presentationml/2006/main" xmlns:r="http://schemas.openxmlformats.org/officeDocument/2006/relationships">
+  <p:cSld>
+    <p:spTree>
+      <p:nvGrpSpPr>
+        <p:cNvPr id="1" name=""/>
+        <p:cNvGrpSpPr/>
+        <p:nvPr/>
+      </p:nvGrpSpPr>
+      <p:grpSpPr/>
+      <p:sp>
+        <p:nvSpPr>
+          <p:cNvPr id="2" name="TextBox 1"/>
+          <p:cNvSpPr txBox="1"/>
+          <p:nvPr/>
+        </p:nvSpPr>
+        <p:spPr>
+          <a:xfrm>
+            <a:off x="548640" y="411480"/>
+            <a:ext cx="11064240" cy="777240"/>
+          </a:xfrm>
+          <a:prstGeom prst="rect">
+            <a:avLst/>
+          </a:prstGeom>
+          <a:noFill/>
+        </p:spPr>
+        <p:txBody>
+          <a:bodyPr wrap="square">
+            <a:noAutofit/>
+          </a:bodyPr>
+          <a:lstStyle/>
+          <a:p>
+            <a:pPr>
+              <a:lnSpc>
+                <a:spcPts val="2200"/>
+              </a:lnSpc>
+              <a:defRPr sz="2800" b="1">
+                <a:solidFill>
+                  <a:srgbClr val="1A1A2E"/>
+                </a:solidFill>
+                <a:latin typeface="Calibri"/>
+              </a:defRPr>
+            </a:pPr>
+            <a:r>
+              <a:t>Demo: Best practices</a:t>
+            </a:r>
+          </a:p>
+        </p:txBody>
+      </p:sp>
+      <p:sp>
+        <p:nvSpPr>
+          <p:cNvPr id="3" name="TextBox 2"/>
+          <p:cNvSpPr txBox="1"/>
+          <p:nvPr/>
+        </p:nvSpPr>
+        <p:spPr>
+          <a:xfrm>
+            <a:off x="548640" y="1051560"/>
+            <a:ext cx="11064240" cy="914400"/>
+          </a:xfrm>
+          <a:prstGeom prst="rect">
+            <a:avLst/>
+          </a:prstGeom>
+          <a:solidFill>
+            <a:srgbClr val="F4F4F4"/>
+          </a:solidFill>
+        </p:spPr>
+        <p:txBody>
+          <a:bodyPr wrap="square">
+            <a:noAutofit/>
+          </a:bodyPr>
+          <a:lstStyle/>
+          <a:p>
+            <a:pPr>
+              <a:lnSpc>
+                <a:spcPts val="2200"/>
+              </a:lnSpc>
+              <a:spcAft>
+                <a:spcPts val="200"/>
+              </a:spcAft>
+              <a:defRPr sz="2000" b="0">
+                <a:solidFill>
+                  <a:srgbClr val="333333"/>
+                </a:solidFill>
+                <a:latin typeface="Consolas"/>
+              </a:defRPr>
+            </a:pPr>
+            <a:r>
+              <a:t>$ head -25 module7/templates/BEST_PRACTICES.md</a:t>
+            </a:r>
+          </a:p>
+        </p:txBody>
+      </p:sp>
+      <p:pic>
+        <p:nvPicPr>
+          <p:cNvPr id="4" name="Picture 3" descr="ex03_best_practices.png"/>
+          <p:cNvPicPr>
+            <a:picLocks noChangeAspect="1"/>
+          </p:cNvPicPr>
+          <p:nvPr/>
+        </p:nvPicPr>
+        <p:blipFill>
+          <a:blip r:embed="rId2"/>
+          <a:stretch>
+            <a:fillRect/>
+          </a:stretch>
+        </p:blipFill>
+        <p:spPr>
+          <a:xfrm>
+            <a:off x="548640" y="1965960"/>
+            <a:ext cx="7071358" cy="3977639"/>
+          </a:xfrm>
+          <a:prstGeom prst="rect">
+            <a:avLst/>
+          </a:prstGeom>
+        </p:spPr>
+      </p:pic>
+      <p:sp>
+        <p:nvSpPr>
+          <p:cNvPr id="5" name="TextBox 4"/>
+          <p:cNvSpPr txBox="1"/>
+          <p:nvPr/>
+        </p:nvSpPr>
+        <p:spPr>
+          <a:xfrm>
+            <a:off x="548640" y="6355080"/>
+            <a:ext cx="11064240" cy="320040"/>
+          </a:xfrm>
+          <a:prstGeom prst="rect">
+            <a:avLst/>
+          </a:prstGeom>
+          <a:noFill/>
+        </p:spPr>
+        <p:txBody>
+          <a:bodyPr wrap="square">
+            <a:noAutofit/>
+          </a:bodyPr>
+          <a:lstStyle/>
+          <a:p>
+            <a:pPr algn="r">
+              <a:lnSpc>
+                <a:spcPts val="2200"/>
+              </a:lnSpc>
+              <a:defRPr sz="1000" b="0">
+                <a:solidFill>
+                  <a:srgbClr val="666666"/>
+                </a:solidFill>
+                <a:latin typeface="Calibri"/>
+              </a:defRPr>
+            </a:pPr>
+            <a:r>
+              <a:t>verification_planning_management / Module 7</a:t>
+            </a:r>
+          </a:p>
+        </p:txBody>
+      </p:sp>
+    </p:spTree>
+  </p:cSld>
+  <p:clrMapOvr>
+    <a:masterClrMapping/>
+  </p:clrMapOvr>
+</p:sld>
+</file>
+
+<file path=ppt/slides/slide33.xml><?xml version="1.0" encoding="utf-8"?>
+<p:sld xmlns:a="http://schemas.openxmlformats.org/drawingml/2006/main" xmlns:p="http://schemas.openxmlformats.org/presentationml/2006/main" xmlns:r="http://schemas.openxmlformats.org/officeDocument/2006/relationships">
+  <p:cSld>
+    <p:spTree>
+      <p:nvGrpSpPr>
+        <p:cNvPr id="1" name=""/>
+        <p:cNvGrpSpPr/>
+        <p:nvPr/>
+      </p:nvGrpSpPr>
+      <p:grpSpPr/>
+      <p:sp>
+        <p:nvSpPr>
+          <p:cNvPr id="2" name="TextBox 1"/>
+          <p:cNvSpPr txBox="1"/>
+          <p:nvPr/>
+        </p:nvSpPr>
+        <p:spPr>
+          <a:xfrm>
+            <a:off x="548640" y="411480"/>
+            <a:ext cx="11064240" cy="777240"/>
+          </a:xfrm>
+          <a:prstGeom prst="rect">
+            <a:avLst/>
+          </a:prstGeom>
+          <a:noFill/>
+        </p:spPr>
+        <p:txBody>
+          <a:bodyPr wrap="square">
+            <a:noAutofit/>
+          </a:bodyPr>
+          <a:lstStyle/>
+          <a:p>
+            <a:pPr>
+              <a:lnSpc>
+                <a:spcPts val="2200"/>
+              </a:lnSpc>
+              <a:defRPr sz="2800" b="1">
+                <a:solidFill>
+                  <a:srgbClr val="1A1A2E"/>
+                </a:solidFill>
+                <a:latin typeface="Calibri"/>
+              </a:defRPr>
+            </a:pPr>
+            <a:r>
+              <a:t>Demo: Reference VIP design</a:t>
+            </a:r>
+          </a:p>
+        </p:txBody>
+      </p:sp>
+      <p:sp>
+        <p:nvSpPr>
+          <p:cNvPr id="3" name="TextBox 2"/>
+          <p:cNvSpPr txBox="1"/>
+          <p:nvPr/>
+        </p:nvSpPr>
+        <p:spPr>
+          <a:xfrm>
+            <a:off x="548640" y="1051560"/>
+            <a:ext cx="11064240" cy="914400"/>
+          </a:xfrm>
+          <a:prstGeom prst="rect">
+            <a:avLst/>
+          </a:prstGeom>
+          <a:solidFill>
+            <a:srgbClr val="F4F4F4"/>
+          </a:solidFill>
+        </p:spPr>
+        <p:txBody>
+          <a:bodyPr wrap="square">
+            <a:noAutofit/>
+          </a:bodyPr>
+          <a:lstStyle/>
+          <a:p>
+            <a:pPr>
+              <a:lnSpc>
+                <a:spcPts val="2200"/>
+              </a:lnSpc>
+              <a:spcAft>
+                <a:spcPts val="200"/>
+              </a:spcAft>
+              <a:defRPr sz="2000" b="0">
+                <a:solidFill>
+                  <a:srgbClr val="333333"/>
+                </a:solidFill>
+                <a:latin typeface="Consolas"/>
+              </a:defRPr>
+            </a:pPr>
+            <a:r>
+              <a:t>$ head -20 module7/.solutions/VIP_DESIGN.md</a:t>
+            </a:r>
+          </a:p>
+        </p:txBody>
+      </p:sp>
+      <p:pic>
+        <p:nvPicPr>
+          <p:cNvPr id="4" name="Picture 3" descr="ex04_solutions.png"/>
+          <p:cNvPicPr>
+            <a:picLocks noChangeAspect="1"/>
+          </p:cNvPicPr>
+          <p:nvPr/>
+        </p:nvPicPr>
+        <p:blipFill>
+          <a:blip r:embed="rId2"/>
+          <a:stretch>
+            <a:fillRect/>
+          </a:stretch>
+        </p:blipFill>
+        <p:spPr>
+          <a:xfrm>
+            <a:off x="548640" y="1965960"/>
+            <a:ext cx="7071358" cy="3977639"/>
+          </a:xfrm>
+          <a:prstGeom prst="rect">
+            <a:avLst/>
+          </a:prstGeom>
+        </p:spPr>
+      </p:pic>
+      <p:sp>
+        <p:nvSpPr>
+          <p:cNvPr id="5" name="TextBox 4"/>
+          <p:cNvSpPr txBox="1"/>
+          <p:nvPr/>
+        </p:nvSpPr>
+        <p:spPr>
+          <a:xfrm>
+            <a:off x="548640" y="6355080"/>
+            <a:ext cx="11064240" cy="320040"/>
+          </a:xfrm>
+          <a:prstGeom prst="rect">
+            <a:avLst/>
+          </a:prstGeom>
+          <a:noFill/>
+        </p:spPr>
+        <p:txBody>
+          <a:bodyPr wrap="square">
+            <a:noAutofit/>
+          </a:bodyPr>
+          <a:lstStyle/>
+          <a:p>
+            <a:pPr algn="r">
+              <a:lnSpc>
+                <a:spcPts val="2200"/>
+              </a:lnSpc>
+              <a:defRPr sz="1000" b="0">
+                <a:solidFill>
+                  <a:srgbClr val="666666"/>
+                </a:solidFill>
+                <a:latin typeface="Calibri"/>
+              </a:defRPr>
+            </a:pPr>
+            <a:r>
+              <a:t>verification_planning_management / Module 7</a:t>
+            </a:r>
+          </a:p>
+        </p:txBody>
+      </p:sp>
+    </p:spTree>
+  </p:cSld>
+  <p:clrMapOvr>
+    <a:masterClrMapping/>
+  </p:clrMapOvr>
+</p:sld>
+</file>
+
+<file path=ppt/slides/slide34.xml><?xml version="1.0" encoding="utf-8"?>
+<p:sld xmlns:a="http://schemas.openxmlformats.org/drawingml/2006/main" xmlns:p="http://schemas.openxmlformats.org/presentationml/2006/main" xmlns:r="http://schemas.openxmlformats.org/officeDocument/2006/relationships">
+  <p:cSld>
+    <p:spTree>
+      <p:nvGrpSpPr>
+        <p:cNvPr id="1" name=""/>
+        <p:cNvGrpSpPr/>
+        <p:nvPr/>
+      </p:nvGrpSpPr>
+      <p:grpSpPr/>
+      <p:sp>
+        <p:nvSpPr>
+          <p:cNvPr id="2" name="TextBox 1"/>
+          <p:cNvSpPr txBox="1"/>
+          <p:nvPr/>
+        </p:nvSpPr>
+        <p:spPr>
+          <a:xfrm>
+            <a:off x="548640" y="411480"/>
+            <a:ext cx="11064240" cy="777240"/>
+          </a:xfrm>
+          <a:prstGeom prst="rect">
+            <a:avLst/>
+          </a:prstGeom>
+          <a:noFill/>
+        </p:spPr>
+        <p:txBody>
+          <a:bodyPr wrap="square">
+            <a:noAutofit/>
+          </a:bodyPr>
+          <a:lstStyle/>
+          <a:p>
+            <a:pPr>
+              <a:lnSpc>
+                <a:spcPts val="2200"/>
+              </a:lnSpc>
+              <a:defRPr sz="2800" b="1">
+                <a:solidFill>
+                  <a:srgbClr val="1A1A2E"/>
+                </a:solidFill>
+                <a:latin typeface="Calibri"/>
+              </a:defRPr>
+            </a:pPr>
+            <a:r>
+              <a:t>Demo: Module validation</a:t>
+            </a:r>
+          </a:p>
+        </p:txBody>
+      </p:sp>
+      <p:sp>
+        <p:nvSpPr>
+          <p:cNvPr id="3" name="TextBox 2"/>
+          <p:cNvSpPr txBox="1"/>
+          <p:nvPr/>
+        </p:nvSpPr>
+        <p:spPr>
+          <a:xfrm>
+            <a:off x="548640" y="1051560"/>
+            <a:ext cx="11064240" cy="914400"/>
+          </a:xfrm>
+          <a:prstGeom prst="rect">
+            <a:avLst/>
+          </a:prstGeom>
+          <a:solidFill>
+            <a:srgbClr val="F4F4F4"/>
+          </a:solidFill>
+        </p:spPr>
+        <p:txBody>
+          <a:bodyPr wrap="square">
+            <a:noAutofit/>
+          </a:bodyPr>
+          <a:lstStyle/>
+          <a:p>
+            <a:pPr>
+              <a:lnSpc>
+                <a:spcPts val="2200"/>
+              </a:lnSpc>
+              <a:spcAft>
+                <a:spcPts val="200"/>
+              </a:spcAft>
+              <a:defRPr sz="2000" b="0">
+                <a:solidFill>
+                  <a:srgbClr val="333333"/>
+                </a:solidFill>
+                <a:latin typeface="Consolas"/>
+              </a:defRPr>
+            </a:pPr>
+            <a:r>
+              <a:t>$ ./scripts/module7.sh --check</a:t>
+            </a:r>
+          </a:p>
+        </p:txBody>
+      </p:sp>
+      <p:pic>
+        <p:nvPicPr>
+          <p:cNvPr id="4" name="Picture 3" descr="ex05_validate.png"/>
+          <p:cNvPicPr>
+            <a:picLocks noChangeAspect="1"/>
+          </p:cNvPicPr>
+          <p:nvPr/>
+        </p:nvPicPr>
+        <p:blipFill>
+          <a:blip r:embed="rId2"/>
+          <a:stretch>
+            <a:fillRect/>
+          </a:stretch>
+        </p:blipFill>
+        <p:spPr>
+          <a:xfrm>
+            <a:off x="548640" y="1965960"/>
+            <a:ext cx="7071358" cy="3977639"/>
+          </a:xfrm>
+          <a:prstGeom prst="rect">
+            <a:avLst/>
+          </a:prstGeom>
+        </p:spPr>
+      </p:pic>
+      <p:sp>
+        <p:nvSpPr>
+          <p:cNvPr id="5" name="TextBox 4"/>
+          <p:cNvSpPr txBox="1"/>
+          <p:nvPr/>
+        </p:nvSpPr>
+        <p:spPr>
+          <a:xfrm>
+            <a:off x="548640" y="6355080"/>
+            <a:ext cx="11064240" cy="320040"/>
+          </a:xfrm>
+          <a:prstGeom prst="rect">
+            <a:avLst/>
+          </a:prstGeom>
+          <a:noFill/>
+        </p:spPr>
+        <p:txBody>
+          <a:bodyPr wrap="square">
+            <a:noAutofit/>
+          </a:bodyPr>
+          <a:lstStyle/>
+          <a:p>
+            <a:pPr algn="r">
+              <a:lnSpc>
+                <a:spcPts val="2200"/>
+              </a:lnSpc>
+              <a:defRPr sz="1000" b="0">
+                <a:solidFill>
+                  <a:srgbClr val="666666"/>
+                </a:solidFill>
+                <a:latin typeface="Calibri"/>
+              </a:defRPr>
+            </a:pPr>
+            <a:r>
+              <a:t>verification_planning_management / Module 7</a:t>
+            </a:r>
+          </a:p>
+        </p:txBody>
+      </p:sp>
+    </p:spTree>
+  </p:cSld>
+  <p:clrMapOvr>
+    <a:masterClrMapping/>
+  </p:clrMapOvr>
+</p:sld>
+</file>
+
+<file path=ppt/slides/slide35.xml><?xml version="1.0" encoding="utf-8"?>
+<p:sld xmlns:a="http://schemas.openxmlformats.org/drawingml/2006/main" xmlns:p="http://schemas.openxmlformats.org/presentationml/2006/main" xmlns:r="http://schemas.openxmlformats.org/officeDocument/2006/relationships">
+  <p:cSld>
+    <p:spTree>
+      <p:nvGrpSpPr>
+        <p:cNvPr id="1" name=""/>
+        <p:cNvGrpSpPr/>
+        <p:nvPr/>
+      </p:nvGrpSpPr>
+      <p:grpSpPr/>
+      <p:sp>
+        <p:nvSpPr>
+          <p:cNvPr id="2" name="TextBox 1"/>
+          <p:cNvSpPr txBox="1"/>
+          <p:nvPr/>
+        </p:nvSpPr>
+        <p:spPr>
+          <a:xfrm>
+            <a:off x="548640" y="2743200"/>
+            <a:ext cx="11064240" cy="1371600"/>
+          </a:xfrm>
+          <a:prstGeom prst="rect">
+            <a:avLst/>
+          </a:prstGeom>
+          <a:noFill/>
+        </p:spPr>
+        <p:txBody>
+          <a:bodyPr wrap="square">
+            <a:noAutofit/>
+          </a:bodyPr>
+          <a:lstStyle/>
+          <a:p>
+            <a:pPr algn="ctr">
+              <a:lnSpc>
+                <a:spcPts val="2200"/>
+              </a:lnSpc>
+              <a:defRPr sz="3600" b="1">
+                <a:solidFill>
+                  <a:srgbClr val="1A1A2E"/>
+                </a:solidFill>
+                <a:latin typeface="Calibri"/>
+              </a:defRPr>
+            </a:pPr>
+            <a:r>
+              <a:t>Practice &amp; assessment</a:t>
+            </a:r>
+          </a:p>
+        </p:txBody>
+      </p:sp>
+      <p:sp>
+        <p:nvSpPr>
+          <p:cNvPr id="3" name="TextBox 2"/>
+          <p:cNvSpPr txBox="1"/>
+          <p:nvPr/>
+        </p:nvSpPr>
+        <p:spPr>
+          <a:xfrm>
+            <a:off x="548640" y="6355080"/>
+            <a:ext cx="11064240" cy="320040"/>
+          </a:xfrm>
+          <a:prstGeom prst="rect">
+            <a:avLst/>
+          </a:prstGeom>
+          <a:noFill/>
+        </p:spPr>
+        <p:txBody>
+          <a:bodyPr wrap="square">
+            <a:noAutofit/>
+          </a:bodyPr>
+          <a:lstStyle/>
+          <a:p>
+            <a:pPr algn="r">
+              <a:lnSpc>
+                <a:spcPts val="2200"/>
+              </a:lnSpc>
+              <a:defRPr sz="1000" b="0">
+                <a:solidFill>
+                  <a:srgbClr val="666666"/>
+                </a:solidFill>
+                <a:latin typeface="Calibri"/>
+              </a:defRPr>
+            </a:pPr>
+            <a:r>
+              <a:t>verification_planning_management / Module 7</a:t>
+            </a:r>
+          </a:p>
+        </p:txBody>
+      </p:sp>
+    </p:spTree>
+  </p:cSld>
+  <p:clrMapOvr>
+    <a:masterClrMapping/>
+  </p:clrMapOvr>
+</p:sld>
+</file>
+
+<file path=ppt/slides/slide36.xml><?xml version="1.0" encoding="utf-8"?>
+<p:sld xmlns:a="http://schemas.openxmlformats.org/drawingml/2006/main" xmlns:p="http://schemas.openxmlformats.org/presentationml/2006/main" xmlns:r="http://schemas.openxmlformats.org/officeDocument/2006/relationships">
+  <p:cSld>
+    <p:spTree>
+      <p:nvGrpSpPr>
+        <p:cNvPr id="1" name=""/>
+        <p:cNvGrpSpPr/>
+        <p:nvPr/>
+      </p:nvGrpSpPr>
+      <p:grpSpPr/>
+      <p:sp>
+        <p:nvSpPr>
+          <p:cNvPr id="2" name="TextBox 1"/>
+          <p:cNvSpPr txBox="1"/>
+          <p:nvPr/>
+        </p:nvSpPr>
+        <p:spPr>
+          <a:xfrm>
+            <a:off x="548640" y="411480"/>
+            <a:ext cx="11064240" cy="777240"/>
+          </a:xfrm>
+          <a:prstGeom prst="rect">
+            <a:avLst/>
+          </a:prstGeom>
+          <a:noFill/>
+        </p:spPr>
+        <p:txBody>
+          <a:bodyPr wrap="square">
+            <a:noAutofit/>
+          </a:bodyPr>
+          <a:lstStyle/>
+          <a:p>
+            <a:pPr>
+              <a:lnSpc>
+                <a:spcPts val="2200"/>
+              </a:lnSpc>
+              <a:defRPr sz="2800" b="1">
+                <a:solidFill>
+                  <a:srgbClr val="1A1A2E"/>
+                </a:solidFill>
+                <a:latin typeface="Calibri"/>
+              </a:defRPr>
+            </a:pPr>
+            <a:r>
+              <a:t>What you should know (1/2)</a:t>
+            </a:r>
+          </a:p>
+        </p:txBody>
+      </p:sp>
+      <p:sp>
+        <p:nvSpPr>
+          <p:cNvPr id="3" name="TextBox 2"/>
+          <p:cNvSpPr txBox="1"/>
+          <p:nvPr/>
+        </p:nvSpPr>
+        <p:spPr>
+          <a:xfrm>
+            <a:off x="548640" y="1234440"/>
+            <a:ext cx="11064240" cy="4937760"/>
+          </a:xfrm>
+          <a:prstGeom prst="rect">
+            <a:avLst/>
+          </a:prstGeom>
+          <a:noFill/>
+        </p:spPr>
+        <p:txBody>
+          <a:bodyPr wrap="square">
+            <a:noAutofit/>
+          </a:bodyPr>
+          <a:lstStyle/>
+          <a:p>
+            <a:pPr>
+              <a:lnSpc>
+                <a:spcPts val="2200"/>
+              </a:lnSpc>
+              <a:spcAft>
+                <a:spcPts val="1000"/>
+              </a:spcAft>
+              <a:defRPr sz="2000" b="0">
+                <a:solidFill>
+                  <a:srgbClr val="333333"/>
+                </a:solidFill>
+                <a:latin typeface="Calibri"/>
+              </a:defRPr>
+            </a:pPr>
+            <a:r>
+              <a:t>• Design and implement a complete verification</a:t>
+            </a:r>
+          </a:p>
+          <a:p>
+            <a:pPr>
+              <a:lnSpc>
+                <a:spcPts val="2200"/>
+              </a:lnSpc>
+              <a:spcAft>
+                <a:spcPts val="1000"/>
+              </a:spcAft>
+              <a:defRPr sz="2000" b="0">
+                <a:solidFill>
+                  <a:srgbClr val="333333"/>
+                </a:solidFill>
+                <a:latin typeface="Calibri"/>
+              </a:defRPr>
+            </a:pPr>
+            <a:r>
+              <a:t>      environment for a realistic DUT.</a:t>
+            </a:r>
+          </a:p>
+          <a:p>
+            <a:pPr>
+              <a:lnSpc>
+                <a:spcPts val="2200"/>
+              </a:lnSpc>
+              <a:spcAft>
+                <a:spcPts val="1000"/>
+              </a:spcAft>
+              <a:defRPr sz="2000" b="0">
+                <a:solidFill>
+                  <a:srgbClr val="333333"/>
+                </a:solidFill>
+                <a:latin typeface="Calibri"/>
+              </a:defRPr>
+            </a:pPr>
+            <a:r>
+              <a:t>• Create and document reusable VIP that others could</a:t>
+            </a:r>
+          </a:p>
+          <a:p>
+            <a:pPr>
+              <a:lnSpc>
+                <a:spcPts val="2200"/>
+              </a:lnSpc>
+              <a:spcAft>
+                <a:spcPts val="1000"/>
+              </a:spcAft>
+              <a:defRPr sz="2000" b="0">
+                <a:solidFill>
+                  <a:srgbClr val="333333"/>
+                </a:solidFill>
+                <a:latin typeface="Calibri"/>
+              </a:defRPr>
+            </a:pPr>
+            <a:r>
+              <a:t>      adopt.</a:t>
+            </a:r>
+          </a:p>
+          <a:p>
+            <a:pPr>
+              <a:lnSpc>
+                <a:spcPts val="2200"/>
+              </a:lnSpc>
+              <a:spcAft>
+                <a:spcPts val="1000"/>
+              </a:spcAft>
+              <a:defRPr sz="2000" b="0">
+                <a:solidFill>
+                  <a:srgbClr val="333333"/>
+                </a:solidFill>
+                <a:latin typeface="Calibri"/>
+              </a:defRPr>
+            </a:pPr>
+            <a:r>
+              <a:t>• Operate regressions and coverage closure as you</a:t>
+            </a:r>
+          </a:p>
+          <a:p>
+            <a:pPr>
+              <a:lnSpc>
+                <a:spcPts val="2200"/>
+              </a:lnSpc>
+              <a:spcAft>
+                <a:spcPts val="1000"/>
+              </a:spcAft>
+              <a:defRPr sz="2000" b="0">
+                <a:solidFill>
+                  <a:srgbClr val="333333"/>
+                </a:solidFill>
+                <a:latin typeface="Calibri"/>
+              </a:defRPr>
+            </a:pPr>
+            <a:r>
+              <a:t>      would in a real team.</a:t>
+            </a:r>
+          </a:p>
+          <a:p>
+            <a:pPr>
+              <a:lnSpc>
+                <a:spcPts val="2200"/>
+              </a:lnSpc>
+              <a:spcAft>
+                <a:spcPts val="1000"/>
+              </a:spcAft>
+              <a:defRPr sz="2000" b="0">
+                <a:solidFill>
+                  <a:srgbClr val="333333"/>
+                </a:solidFill>
+                <a:latin typeface="Calibri"/>
+              </a:defRPr>
+            </a:pPr>
+            <a:r>
+              <a:t>• Maintain production-quality code, docs, and tests</a:t>
+            </a:r>
+          </a:p>
+          <a:p>
+            <a:pPr>
+              <a:lnSpc>
+                <a:spcPts val="2200"/>
+              </a:lnSpc>
+              <a:spcAft>
+                <a:spcPts val="1000"/>
+              </a:spcAft>
+              <a:defRPr sz="2000" b="0">
+                <a:solidFill>
+                  <a:srgbClr val="333333"/>
+                </a:solidFill>
+                <a:latin typeface="Calibri"/>
+              </a:defRPr>
+            </a:pPr>
+            <a:r>
+              <a:t>      over the lifetime of a project.</a:t>
+            </a:r>
+          </a:p>
+          <a:p>
+            <a:pPr>
+              <a:lnSpc>
+                <a:spcPts val="2200"/>
+              </a:lnSpc>
+              <a:spcAft>
+                <a:spcPts val="1000"/>
+              </a:spcAft>
+              <a:defRPr sz="2000" b="0">
+                <a:solidFill>
+                  <a:srgbClr val="333333"/>
+                </a:solidFill>
+                <a:latin typeface="Calibri"/>
+              </a:defRPr>
+            </a:pPr>
+            <a:r>
+              <a:t>• At least one substantial real-world style project is</a:t>
+            </a:r>
+          </a:p>
+          <a:p>
+            <a:pPr>
+              <a:lnSpc>
+                <a:spcPts val="2200"/>
+              </a:lnSpc>
+              <a:spcAft>
+                <a:spcPts val="1000"/>
+              </a:spcAft>
+              <a:defRPr sz="2000" b="0">
+                <a:solidFill>
+                  <a:srgbClr val="333333"/>
+                </a:solidFill>
+                <a:latin typeface="Calibri"/>
+              </a:defRPr>
+            </a:pPr>
+            <a:r>
+              <a:t>      described and partially/fully implemented.</a:t>
+            </a:r>
+          </a:p>
+          <a:p>
+            <a:pPr>
+              <a:lnSpc>
+                <a:spcPts val="2200"/>
+              </a:lnSpc>
+              <a:spcAft>
+                <a:spcPts val="1000"/>
+              </a:spcAft>
+              <a:defRPr sz="2000" b="0">
+                <a:solidFill>
+                  <a:srgbClr val="333333"/>
+                </a:solidFill>
+                <a:latin typeface="Calibri"/>
+              </a:defRPr>
+            </a:pPr>
+            <a:r>
+              <a:t>• VIP or environment design is documented in</a:t>
+            </a:r>
+          </a:p>
+          <a:p>
+            <a:pPr>
+              <a:lnSpc>
+                <a:spcPts val="2200"/>
+              </a:lnSpc>
+              <a:spcAft>
+                <a:spcPts val="1000"/>
+              </a:spcAft>
+              <a:defRPr sz="2000" b="0">
+                <a:solidFill>
+                  <a:srgbClr val="333333"/>
+                </a:solidFill>
+                <a:latin typeface="Calibri"/>
+              </a:defRPr>
+            </a:pPr>
+            <a:r>
+              <a:t>      `module7/VIP_DESIGN.md` and `module7/PROJECTS.md`.</a:t>
+            </a:r>
+          </a:p>
+        </p:txBody>
+      </p:sp>
+      <p:sp>
+        <p:nvSpPr>
+          <p:cNvPr id="4" name="TextBox 3"/>
+          <p:cNvSpPr txBox="1"/>
+          <p:nvPr/>
+        </p:nvSpPr>
+        <p:spPr>
+          <a:xfrm>
+            <a:off x="548640" y="6355080"/>
+            <a:ext cx="11064240" cy="320040"/>
+          </a:xfrm>
+          <a:prstGeom prst="rect">
+            <a:avLst/>
+          </a:prstGeom>
+          <a:noFill/>
+        </p:spPr>
+        <p:txBody>
+          <a:bodyPr wrap="square">
+            <a:noAutofit/>
+          </a:bodyPr>
+          <a:lstStyle/>
+          <a:p>
+            <a:pPr algn="r">
+              <a:lnSpc>
+                <a:spcPts val="2200"/>
+              </a:lnSpc>
+              <a:defRPr sz="1000" b="0">
+                <a:solidFill>
+                  <a:srgbClr val="666666"/>
+                </a:solidFill>
+                <a:latin typeface="Calibri"/>
+              </a:defRPr>
+            </a:pPr>
+            <a:r>
+              <a:t>verification_planning_management / Module 7</a:t>
+            </a:r>
+          </a:p>
+        </p:txBody>
+      </p:sp>
+    </p:spTree>
+  </p:cSld>
+  <p:clrMapOvr>
+    <a:masterClrMapping/>
+  </p:clrMapOvr>
+</p:sld>
+</file>
+
+<file path=ppt/slides/slide37.xml><?xml version="1.0" encoding="utf-8"?>
+<p:sld xmlns:a="http://schemas.openxmlformats.org/drawingml/2006/main" xmlns:p="http://schemas.openxmlformats.org/presentationml/2006/main" xmlns:r="http://schemas.openxmlformats.org/officeDocument/2006/relationships">
+  <p:cSld>
+    <p:spTree>
+      <p:nvGrpSpPr>
+        <p:cNvPr id="1" name=""/>
+        <p:cNvGrpSpPr/>
+        <p:nvPr/>
+      </p:nvGrpSpPr>
+      <p:grpSpPr/>
+      <p:sp>
+        <p:nvSpPr>
+          <p:cNvPr id="2" name="TextBox 1"/>
+          <p:cNvSpPr txBox="1"/>
+          <p:nvPr/>
+        </p:nvSpPr>
+        <p:spPr>
+          <a:xfrm>
+            <a:off x="548640" y="411480"/>
+            <a:ext cx="11064240" cy="777240"/>
+          </a:xfrm>
+          <a:prstGeom prst="rect">
+            <a:avLst/>
+          </a:prstGeom>
+          <a:noFill/>
+        </p:spPr>
+        <p:txBody>
+          <a:bodyPr wrap="square">
+            <a:noAutofit/>
+          </a:bodyPr>
+          <a:lstStyle/>
+          <a:p>
+            <a:pPr>
+              <a:lnSpc>
+                <a:spcPts val="2200"/>
+              </a:lnSpc>
+              <a:defRPr sz="2800" b="1">
+                <a:solidFill>
+                  <a:srgbClr val="1A1A2E"/>
+                </a:solidFill>
+                <a:latin typeface="Calibri"/>
+              </a:defRPr>
+            </a:pPr>
+            <a:r>
+              <a:t>What you should know (2/2)</a:t>
+            </a:r>
+          </a:p>
+        </p:txBody>
+      </p:sp>
+      <p:sp>
+        <p:nvSpPr>
+          <p:cNvPr id="3" name="TextBox 2"/>
+          <p:cNvSpPr txBox="1"/>
+          <p:nvPr/>
+        </p:nvSpPr>
+        <p:spPr>
+          <a:xfrm>
+            <a:off x="548640" y="1234440"/>
+            <a:ext cx="11064240" cy="4937760"/>
+          </a:xfrm>
+          <a:prstGeom prst="rect">
+            <a:avLst/>
+          </a:prstGeom>
+          <a:noFill/>
+        </p:spPr>
+        <p:txBody>
+          <a:bodyPr wrap="square">
+            <a:noAutofit/>
+          </a:bodyPr>
+          <a:lstStyle/>
+          <a:p>
+            <a:pPr>
+              <a:lnSpc>
+                <a:spcPts val="2200"/>
+              </a:lnSpc>
+              <a:spcAft>
+                <a:spcPts val="1000"/>
+              </a:spcAft>
+              <a:defRPr sz="2000" b="0">
+                <a:solidFill>
+                  <a:srgbClr val="333333"/>
+                </a:solidFill>
+                <a:latin typeface="Calibri"/>
+              </a:defRPr>
+            </a:pPr>
+            <a:r>
+              <a:t>• Best-practices checklist largely satisfied</a:t>
+            </a:r>
+          </a:p>
+          <a:p>
+            <a:pPr>
+              <a:lnSpc>
+                <a:spcPts val="2200"/>
+              </a:lnSpc>
+              <a:spcAft>
+                <a:spcPts val="1000"/>
+              </a:spcAft>
+              <a:defRPr sz="2000" b="0">
+                <a:solidFill>
+                  <a:srgbClr val="333333"/>
+                </a:solidFill>
+                <a:latin typeface="Calibri"/>
+              </a:defRPr>
+            </a:pPr>
+            <a:r>
+              <a:t>      (`module7/BEST_PRACTICES.md` /</a:t>
+            </a:r>
+          </a:p>
+          <a:p>
+            <a:pPr>
+              <a:lnSpc>
+                <a:spcPts val="2200"/>
+              </a:lnSpc>
+              <a:spcAft>
+                <a:spcPts val="1000"/>
+              </a:spcAft>
+              <a:defRPr sz="2000" b="0">
+                <a:solidFill>
+                  <a:srgbClr val="333333"/>
+                </a:solidFill>
+                <a:latin typeface="Calibri"/>
+              </a:defRPr>
+            </a:pPr>
+            <a:r>
+              <a:t>      `module7/CHECKLIST.md`).</a:t>
+            </a:r>
+          </a:p>
+          <a:p>
+            <a:pPr>
+              <a:lnSpc>
+                <a:spcPts val="2200"/>
+              </a:lnSpc>
+              <a:spcAft>
+                <a:spcPts val="1000"/>
+              </a:spcAft>
+              <a:defRPr sz="2000" b="0">
+                <a:solidFill>
+                  <a:srgbClr val="333333"/>
+                </a:solidFill>
+                <a:latin typeface="Calibri"/>
+              </a:defRPr>
+            </a:pPr>
+            <a:r>
+              <a:t>• You can explain your project and design decisions as</a:t>
+            </a:r>
+          </a:p>
+          <a:p>
+            <a:pPr>
+              <a:lnSpc>
+                <a:spcPts val="2200"/>
+              </a:lnSpc>
+              <a:spcAft>
+                <a:spcPts val="1000"/>
+              </a:spcAft>
+              <a:defRPr sz="2000" b="0">
+                <a:solidFill>
+                  <a:srgbClr val="333333"/>
+                </a:solidFill>
+                <a:latin typeface="Calibri"/>
+              </a:defRPr>
+            </a:pPr>
+            <a:r>
+              <a:t>      if presenting to a review board.</a:t>
+            </a:r>
+          </a:p>
+        </p:txBody>
+      </p:sp>
+      <p:sp>
+        <p:nvSpPr>
+          <p:cNvPr id="4" name="TextBox 3"/>
+          <p:cNvSpPr txBox="1"/>
+          <p:nvPr/>
+        </p:nvSpPr>
+        <p:spPr>
+          <a:xfrm>
+            <a:off x="548640" y="6355080"/>
+            <a:ext cx="11064240" cy="320040"/>
+          </a:xfrm>
+          <a:prstGeom prst="rect">
+            <a:avLst/>
+          </a:prstGeom>
+          <a:noFill/>
+        </p:spPr>
+        <p:txBody>
+          <a:bodyPr wrap="square">
+            <a:noAutofit/>
+          </a:bodyPr>
+          <a:lstStyle/>
+          <a:p>
+            <a:pPr algn="r">
+              <a:lnSpc>
+                <a:spcPts val="2200"/>
+              </a:lnSpc>
+              <a:defRPr sz="1000" b="0">
+                <a:solidFill>
+                  <a:srgbClr val="666666"/>
+                </a:solidFill>
+                <a:latin typeface="Calibri"/>
+              </a:defRPr>
+            </a:pPr>
+            <a:r>
+              <a:t>verification_planning_management / Module 7</a:t>
+            </a:r>
+          </a:p>
+        </p:txBody>
+      </p:sp>
+    </p:spTree>
+  </p:cSld>
+  <p:clrMapOvr>
+    <a:masterClrMapping/>
+  </p:clrMapOvr>
+</p:sld>
+</file>
+
+<file path=ppt/slides/slide38.xml><?xml version="1.0" encoding="utf-8"?>
+<p:sld xmlns:a="http://schemas.openxmlformats.org/drawingml/2006/main" xmlns:p="http://schemas.openxmlformats.org/presentationml/2006/main" xmlns:r="http://schemas.openxmlformats.org/officeDocument/2006/relationships">
+  <p:cSld>
+    <p:spTree>
+      <p:nvGrpSpPr>
+        <p:cNvPr id="1" name=""/>
+        <p:cNvGrpSpPr/>
+        <p:nvPr/>
+      </p:nvGrpSpPr>
+      <p:grpSpPr/>
+      <p:sp>
+        <p:nvSpPr>
+          <p:cNvPr id="2" name="TextBox 1"/>
+          <p:cNvSpPr txBox="1"/>
+          <p:nvPr/>
+        </p:nvSpPr>
+        <p:spPr>
+          <a:xfrm>
+            <a:off x="548640" y="411480"/>
+            <a:ext cx="11064240" cy="777240"/>
+          </a:xfrm>
+          <a:prstGeom prst="rect">
+            <a:avLst/>
+          </a:prstGeom>
+          <a:noFill/>
+        </p:spPr>
+        <p:txBody>
+          <a:bodyPr wrap="square">
+            <a:noAutofit/>
+          </a:bodyPr>
+          <a:lstStyle/>
+          <a:p>
+            <a:pPr>
+              <a:lnSpc>
+                <a:spcPts val="2200"/>
+              </a:lnSpc>
+              <a:defRPr sz="2800" b="1">
+                <a:solidFill>
+                  <a:srgbClr val="1A1A2E"/>
+                </a:solidFill>
+                <a:latin typeface="Calibri"/>
+              </a:defRPr>
+            </a:pPr>
+            <a:r>
+              <a:t>Assessment checklist</a:t>
+            </a:r>
+          </a:p>
+        </p:txBody>
+      </p:sp>
+      <p:sp>
+        <p:nvSpPr>
+          <p:cNvPr id="3" name="TextBox 2"/>
+          <p:cNvSpPr txBox="1"/>
+          <p:nvPr/>
+        </p:nvSpPr>
+        <p:spPr>
+          <a:xfrm>
+            <a:off x="548640" y="1234440"/>
+            <a:ext cx="11064240" cy="4937760"/>
+          </a:xfrm>
+          <a:prstGeom prst="rect">
+            <a:avLst/>
+          </a:prstGeom>
+          <a:noFill/>
+        </p:spPr>
+        <p:txBody>
+          <a:bodyPr wrap="square">
+            <a:noAutofit/>
+          </a:bodyPr>
+          <a:lstStyle/>
+          <a:p>
+            <a:pPr>
+              <a:lnSpc>
+                <a:spcPts val="2200"/>
+              </a:lnSpc>
+              <a:spcAft>
+                <a:spcPts val="1000"/>
+              </a:spcAft>
+              <a:defRPr sz="2000" b="0">
+                <a:solidFill>
+                  <a:srgbClr val="333333"/>
+                </a:solidFill>
+                <a:latin typeface="Calibri"/>
+              </a:defRPr>
+            </a:pPr>
+            <a:r>
+              <a:t>• At least one substantial real-world style project is</a:t>
+            </a:r>
+          </a:p>
+          <a:p>
+            <a:pPr>
+              <a:lnSpc>
+                <a:spcPts val="2200"/>
+              </a:lnSpc>
+              <a:spcAft>
+                <a:spcPts val="1000"/>
+              </a:spcAft>
+              <a:defRPr sz="2000" b="0">
+                <a:solidFill>
+                  <a:srgbClr val="333333"/>
+                </a:solidFill>
+                <a:latin typeface="Calibri"/>
+              </a:defRPr>
+            </a:pPr>
+            <a:r>
+              <a:t>      described and partially/fully implemented.</a:t>
+            </a:r>
+          </a:p>
+          <a:p>
+            <a:pPr>
+              <a:lnSpc>
+                <a:spcPts val="2200"/>
+              </a:lnSpc>
+              <a:spcAft>
+                <a:spcPts val="1000"/>
+              </a:spcAft>
+              <a:defRPr sz="2000" b="0">
+                <a:solidFill>
+                  <a:srgbClr val="333333"/>
+                </a:solidFill>
+                <a:latin typeface="Calibri"/>
+              </a:defRPr>
+            </a:pPr>
+            <a:r>
+              <a:t>• VIP or environment design is documented in</a:t>
+            </a:r>
+          </a:p>
+          <a:p>
+            <a:pPr>
+              <a:lnSpc>
+                <a:spcPts val="2200"/>
+              </a:lnSpc>
+              <a:spcAft>
+                <a:spcPts val="1000"/>
+              </a:spcAft>
+              <a:defRPr sz="2000" b="0">
+                <a:solidFill>
+                  <a:srgbClr val="333333"/>
+                </a:solidFill>
+                <a:latin typeface="Calibri"/>
+              </a:defRPr>
+            </a:pPr>
+            <a:r>
+              <a:t>      `module7/VIP_DESIGN.md` and `module7/PROJECTS.md`.</a:t>
+            </a:r>
+          </a:p>
+          <a:p>
+            <a:pPr>
+              <a:lnSpc>
+                <a:spcPts val="2200"/>
+              </a:lnSpc>
+              <a:spcAft>
+                <a:spcPts val="1000"/>
+              </a:spcAft>
+              <a:defRPr sz="2000" b="0">
+                <a:solidFill>
+                  <a:srgbClr val="333333"/>
+                </a:solidFill>
+                <a:latin typeface="Calibri"/>
+              </a:defRPr>
+            </a:pPr>
+            <a:r>
+              <a:t>• Best-practices checklist largely satisfied</a:t>
+            </a:r>
+          </a:p>
+          <a:p>
+            <a:pPr>
+              <a:lnSpc>
+                <a:spcPts val="2200"/>
+              </a:lnSpc>
+              <a:spcAft>
+                <a:spcPts val="1000"/>
+              </a:spcAft>
+              <a:defRPr sz="2000" b="0">
+                <a:solidFill>
+                  <a:srgbClr val="333333"/>
+                </a:solidFill>
+                <a:latin typeface="Calibri"/>
+              </a:defRPr>
+            </a:pPr>
+            <a:r>
+              <a:t>      (`module7/BEST_PRACTICES.md` /</a:t>
+            </a:r>
+          </a:p>
+          <a:p>
+            <a:pPr>
+              <a:lnSpc>
+                <a:spcPts val="2200"/>
+              </a:lnSpc>
+              <a:spcAft>
+                <a:spcPts val="1000"/>
+              </a:spcAft>
+              <a:defRPr sz="2000" b="0">
+                <a:solidFill>
+                  <a:srgbClr val="333333"/>
+                </a:solidFill>
+                <a:latin typeface="Calibri"/>
+              </a:defRPr>
+            </a:pPr>
+            <a:r>
+              <a:t>      `module7/CHECKLIST.md`).</a:t>
+            </a:r>
+          </a:p>
+          <a:p>
+            <a:pPr>
+              <a:lnSpc>
+                <a:spcPts val="2200"/>
+              </a:lnSpc>
+              <a:spcAft>
+                <a:spcPts val="1000"/>
+              </a:spcAft>
+              <a:defRPr sz="2000" b="0">
+                <a:solidFill>
+                  <a:srgbClr val="333333"/>
+                </a:solidFill>
+                <a:latin typeface="Calibri"/>
+              </a:defRPr>
+            </a:pPr>
+            <a:r>
+              <a:t>• You can explain your project and design decisions as</a:t>
+            </a:r>
+          </a:p>
+          <a:p>
+            <a:pPr>
+              <a:lnSpc>
+                <a:spcPts val="2200"/>
+              </a:lnSpc>
+              <a:spcAft>
+                <a:spcPts val="1000"/>
+              </a:spcAft>
+              <a:defRPr sz="2000" b="0">
+                <a:solidFill>
+                  <a:srgbClr val="333333"/>
+                </a:solidFill>
+                <a:latin typeface="Calibri"/>
+              </a:defRPr>
+            </a:pPr>
+            <a:r>
+              <a:t>      if presenting to a review board.</a:t>
+            </a:r>
+          </a:p>
+        </p:txBody>
+      </p:sp>
+      <p:sp>
+        <p:nvSpPr>
+          <p:cNvPr id="4" name="TextBox 3"/>
+          <p:cNvSpPr txBox="1"/>
+          <p:nvPr/>
+        </p:nvSpPr>
+        <p:spPr>
+          <a:xfrm>
+            <a:off x="548640" y="6355080"/>
+            <a:ext cx="11064240" cy="320040"/>
+          </a:xfrm>
+          <a:prstGeom prst="rect">
+            <a:avLst/>
+          </a:prstGeom>
+          <a:noFill/>
+        </p:spPr>
+        <p:txBody>
+          <a:bodyPr wrap="square">
+            <a:noAutofit/>
+          </a:bodyPr>
+          <a:lstStyle/>
+          <a:p>
+            <a:pPr algn="r">
+              <a:lnSpc>
+                <a:spcPts val="2200"/>
+              </a:lnSpc>
+              <a:defRPr sz="1000" b="0">
+                <a:solidFill>
+                  <a:srgbClr val="666666"/>
+                </a:solidFill>
+                <a:latin typeface="Calibri"/>
+              </a:defRPr>
+            </a:pPr>
+            <a:r>
+              <a:t>verification_planning_management / Module 7</a:t>
+            </a:r>
+          </a:p>
+        </p:txBody>
+      </p:sp>
+    </p:spTree>
+  </p:cSld>
+  <p:clrMapOvr>
+    <a:masterClrMapping/>
+  </p:clrMapOvr>
+</p:sld>
+</file>
+
+<file path=ppt/slides/slide39.xml><?xml version="1.0" encoding="utf-8"?>
+<p:sld xmlns:a="http://schemas.openxmlformats.org/drawingml/2006/main" xmlns:p="http://schemas.openxmlformats.org/presentationml/2006/main" xmlns:r="http://schemas.openxmlformats.org/officeDocument/2006/relationships">
+  <p:cSld>
+    <p:spTree>
+      <p:nvGrpSpPr>
+        <p:cNvPr id="1" name=""/>
+        <p:cNvGrpSpPr/>
+        <p:nvPr/>
+      </p:nvGrpSpPr>
+      <p:grpSpPr/>
+      <p:sp>
+        <p:nvSpPr>
+          <p:cNvPr id="2" name="TextBox 1"/>
+          <p:cNvSpPr txBox="1"/>
+          <p:nvPr/>
+        </p:nvSpPr>
+        <p:spPr>
+          <a:xfrm>
+            <a:off x="548640" y="411480"/>
+            <a:ext cx="11064240" cy="777240"/>
+          </a:xfrm>
+          <a:prstGeom prst="rect">
+            <a:avLst/>
+          </a:prstGeom>
+          <a:noFill/>
+        </p:spPr>
+        <p:txBody>
+          <a:bodyPr wrap="square">
+            <a:noAutofit/>
+          </a:bodyPr>
+          <a:lstStyle/>
+          <a:p>
+            <a:pPr>
+              <a:lnSpc>
+                <a:spcPts val="2200"/>
+              </a:lnSpc>
+              <a:defRPr sz="2800" b="1">
+                <a:solidFill>
+                  <a:srgbClr val="1A1A2E"/>
+                </a:solidFill>
+                <a:latin typeface="Calibri"/>
+              </a:defRPr>
+            </a:pPr>
+            <a:r>
               <a:t>Summary &amp; next steps</a:t>
             </a:r>
           </a:p>
@@ -9919,7 +11900,7 @@
               </a:defRPr>
             </a:pPr>
             <a:r>
-              <a:t>Design architecture</a:t>
+              <a:t>How to learn this module</a:t>
             </a:r>
           </a:p>
         </p:txBody>
@@ -10015,7 +11996,7 @@
               </a:defRPr>
             </a:pPr>
             <a:r>
-              <a:t>1. Real-world DUT / subsystem</a:t>
+              <a:t>Suggested learning path</a:t>
             </a:r>
           </a:p>
         </p:txBody>
@@ -10029,7 +12010,7 @@
         <p:spPr>
           <a:xfrm>
             <a:off x="548640" y="1234440"/>
-            <a:ext cx="5303520" cy="4754880"/>
+            <a:ext cx="11064240" cy="4937760"/>
           </a:xfrm>
           <a:prstGeom prst="rect">
             <a:avLst/>
@@ -10057,7 +12038,7 @@
               </a:defRPr>
             </a:pPr>
             <a:r>
-              <a:t>• Choose DMA-style block,</a:t>
+              <a:t>• Choose a real-world DUT or subsystem scope in</a:t>
             </a:r>
           </a:p>
           <a:p>
@@ -10076,7 +12057,7 @@
               </a:defRPr>
             </a:pPr>
             <a:r>
-              <a:t>      bus/register IP, or protocol DUT</a:t>
+              <a:t>      `module7/PROJECTS.md`.</a:t>
             </a:r>
           </a:p>
           <a:p>
@@ -10095,7 +12076,7 @@
               </a:defRPr>
             </a:pPr>
             <a:r>
-              <a:t>      (UART/SPI/I2C/AXI-lite style).</a:t>
+              <a:t>• Scaffold Module 7 workspace: `./scripts/module7.sh</a:t>
             </a:r>
           </a:p>
           <a:p>
@@ -10114,7 +12095,7 @@
               </a:defRPr>
             </a:pPr>
             <a:r>
-              <a:t>• Document block diagram,</a:t>
+              <a:t>      --scaffold`</a:t>
             </a:r>
           </a:p>
           <a:p>
@@ -10133,7 +12114,7 @@
               </a:defRPr>
             </a:pPr>
             <a:r>
-              <a:t>      clocks/resets, and interface</a:t>
+              <a:t>• Design reusable VIP structure in</a:t>
             </a:r>
           </a:p>
           <a:p>
@@ -10152,38 +12133,90 @@
               </a:defRPr>
             </a:pPr>
             <a:r>
-              <a:t>      contracts in `PROJECTS.md`.</a:t>
-            </a:r>
-          </a:p>
-        </p:txBody>
-      </p:sp>
-      <p:pic>
-        <p:nvPicPr>
-          <p:cNvPr id="4" name="Picture 3" descr="rtl_architecture.png"/>
-          <p:cNvPicPr>
-            <a:picLocks noChangeAspect="1"/>
-          </p:cNvPicPr>
-          <p:nvPr/>
-        </p:nvPicPr>
-        <p:blipFill>
-          <a:blip r:embed="rId2"/>
-          <a:stretch>
-            <a:fillRect/>
-          </a:stretch>
-        </p:blipFill>
-        <p:spPr>
-          <a:xfrm>
-            <a:off x="6172200" y="2094547"/>
-            <a:ext cx="5394960" cy="3034665"/>
-          </a:xfrm>
-          <a:prstGeom prst="rect">
-            <a:avLst/>
-          </a:prstGeom>
-        </p:spPr>
-      </p:pic>
-      <p:sp>
-        <p:nvSpPr>
-          <p:cNvPr id="5" name="TextBox 4"/>
+              <a:t>      `module7/VIP_DESIGN.md`.</a:t>
+            </a:r>
+          </a:p>
+          <a:p>
+            <a:pPr>
+              <a:lnSpc>
+                <a:spcPts val="2200"/>
+              </a:lnSpc>
+              <a:spcAft>
+                <a:spcPts val="1000"/>
+              </a:spcAft>
+              <a:defRPr sz="2000" b="0">
+                <a:solidFill>
+                  <a:srgbClr val="333333"/>
+                </a:solidFill>
+                <a:latin typeface="Calibri"/>
+              </a:defRPr>
+            </a:pPr>
+            <a:r>
+              <a:t>• Apply best practices from</a:t>
+            </a:r>
+          </a:p>
+          <a:p>
+            <a:pPr>
+              <a:lnSpc>
+                <a:spcPts val="2200"/>
+              </a:lnSpc>
+              <a:spcAft>
+                <a:spcPts val="1000"/>
+              </a:spcAft>
+              <a:defRPr sz="2000" b="0">
+                <a:solidFill>
+                  <a:srgbClr val="333333"/>
+                </a:solidFill>
+                <a:latin typeface="Calibri"/>
+              </a:defRPr>
+            </a:pPr>
+            <a:r>
+              <a:t>      `module7/BEST_PRACTICES.md` to naming, docs, and API</a:t>
+            </a:r>
+          </a:p>
+          <a:p>
+            <a:pPr>
+              <a:lnSpc>
+                <a:spcPts val="2200"/>
+              </a:lnSpc>
+              <a:spcAft>
+                <a:spcPts val="1000"/>
+              </a:spcAft>
+              <a:defRPr sz="2000" b="0">
+                <a:solidFill>
+                  <a:srgbClr val="333333"/>
+                </a:solidFill>
+                <a:latin typeface="Calibri"/>
+              </a:defRPr>
+            </a:pPr>
+            <a:r>
+              <a:t>      boundaries.</a:t>
+            </a:r>
+          </a:p>
+          <a:p>
+            <a:pPr>
+              <a:lnSpc>
+                <a:spcPts val="2200"/>
+              </a:lnSpc>
+              <a:spcAft>
+                <a:spcPts val="1000"/>
+              </a:spcAft>
+              <a:defRPr sz="2000" b="0">
+                <a:solidFill>
+                  <a:srgbClr val="333333"/>
+                </a:solidFill>
+                <a:latin typeface="Calibri"/>
+              </a:defRPr>
+            </a:pPr>
+            <a:r>
+              <a:t>• Validate: `./scripts/module7.sh --check`</a:t>
+            </a:r>
+          </a:p>
+        </p:txBody>
+      </p:sp>
+      <p:sp>
+        <p:nvSpPr>
+          <p:cNvPr id="4" name="TextBox 3"/>
           <p:cNvSpPr txBox="1"/>
           <p:nvPr/>
         </p:nvSpPr>
@@ -10246,8 +12279,8 @@
         </p:nvSpPr>
         <p:spPr>
           <a:xfrm>
-            <a:off x="548640" y="411480"/>
-            <a:ext cx="11064240" cy="777240"/>
+            <a:off x="548640" y="2743200"/>
+            <a:ext cx="11064240" cy="1371600"/>
           </a:xfrm>
           <a:prstGeom prst="rect">
             <a:avLst/>
@@ -10260,11 +12293,11 @@
           </a:bodyPr>
           <a:lstStyle/>
           <a:p>
-            <a:pPr>
-              <a:lnSpc>
-                <a:spcPts val="2200"/>
-              </a:lnSpc>
-              <a:defRPr sz="2800" b="1">
+            <a:pPr algn="ctr">
+              <a:lnSpc>
+                <a:spcPts val="2200"/>
+              </a:lnSpc>
+              <a:defRPr sz="3600" b="1">
                 <a:solidFill>
                   <a:srgbClr val="1A1A2E"/>
                 </a:solidFill>
@@ -10272,7 +12305,7 @@
               </a:defRPr>
             </a:pPr>
             <a:r>
-              <a:t>2. VIP package architecture</a:t>
+              <a:t>Design architecture</a:t>
             </a:r>
           </a:p>
         </p:txBody>
@@ -10280,224 +12313,6 @@
       <p:sp>
         <p:nvSpPr>
           <p:cNvPr id="3" name="TextBox 2"/>
-          <p:cNvSpPr txBox="1"/>
-          <p:nvPr/>
-        </p:nvSpPr>
-        <p:spPr>
-          <a:xfrm>
-            <a:off x="548640" y="1234440"/>
-            <a:ext cx="5303520" cy="4754880"/>
-          </a:xfrm>
-          <a:prstGeom prst="rect">
-            <a:avLst/>
-          </a:prstGeom>
-          <a:noFill/>
-        </p:spPr>
-        <p:txBody>
-          <a:bodyPr wrap="square">
-            <a:noAutofit/>
-          </a:bodyPr>
-          <a:lstStyle/>
-          <a:p>
-            <a:pPr>
-              <a:lnSpc>
-                <a:spcPts val="2200"/>
-              </a:lnSpc>
-              <a:spcAft>
-                <a:spcPts val="1000"/>
-              </a:spcAft>
-              <a:defRPr sz="2000" b="0">
-                <a:solidFill>
-                  <a:srgbClr val="333333"/>
-                </a:solidFill>
-                <a:latin typeface="Calibri"/>
-              </a:defRPr>
-            </a:pPr>
-            <a:r>
-              <a:t>• Reusable VIP: agent, sequencer,</a:t>
-            </a:r>
-          </a:p>
-          <a:p>
-            <a:pPr>
-              <a:lnSpc>
-                <a:spcPts val="2200"/>
-              </a:lnSpc>
-              <a:spcAft>
-                <a:spcPts val="1000"/>
-              </a:spcAft>
-              <a:defRPr sz="2000" b="0">
-                <a:solidFill>
-                  <a:srgbClr val="333333"/>
-                </a:solidFill>
-                <a:latin typeface="Calibri"/>
-              </a:defRPr>
-            </a:pPr>
-            <a:r>
-              <a:t>      driver, monitor, checker,</a:t>
-            </a:r>
-          </a:p>
-          <a:p>
-            <a:pPr>
-              <a:lnSpc>
-                <a:spcPts val="2200"/>
-              </a:lnSpc>
-              <a:spcAft>
-                <a:spcPts val="1000"/>
-              </a:spcAft>
-              <a:defRPr sz="2000" b="0">
-                <a:solidFill>
-                  <a:srgbClr val="333333"/>
-                </a:solidFill>
-                <a:latin typeface="Calibri"/>
-              </a:defRPr>
-            </a:pPr>
-            <a:r>
-              <a:t>      coverage, config objects.</a:t>
-            </a:r>
-          </a:p>
-          <a:p>
-            <a:pPr>
-              <a:lnSpc>
-                <a:spcPts val="2200"/>
-              </a:lnSpc>
-              <a:spcAft>
-                <a:spcPts val="1000"/>
-              </a:spcAft>
-              <a:defRPr sz="2000" b="0">
-                <a:solidFill>
-                  <a:srgbClr val="333333"/>
-                </a:solidFill>
-                <a:latin typeface="Calibri"/>
-              </a:defRPr>
-            </a:pPr>
-            <a:r>
-              <a:t>• `VIP_DESIGN.md` defines public</a:t>
-            </a:r>
-          </a:p>
-          <a:p>
-            <a:pPr>
-              <a:lnSpc>
-                <a:spcPts val="2200"/>
-              </a:lnSpc>
-              <a:spcAft>
-                <a:spcPts val="1000"/>
-              </a:spcAft>
-              <a:defRPr sz="2000" b="0">
-                <a:solidFill>
-                  <a:srgbClr val="333333"/>
-                </a:solidFill>
-                <a:latin typeface="Calibri"/>
-              </a:defRPr>
-            </a:pPr>
-            <a:r>
-              <a:t>      API, sequences, and integration</a:t>
-            </a:r>
-          </a:p>
-          <a:p>
-            <a:pPr>
-              <a:lnSpc>
-                <a:spcPts val="2200"/>
-              </a:lnSpc>
-              <a:spcAft>
-                <a:spcPts val="1000"/>
-              </a:spcAft>
-              <a:defRPr sz="2000" b="0">
-                <a:solidFill>
-                  <a:srgbClr val="333333"/>
-                </a:solidFill>
-                <a:latin typeface="Calibri"/>
-              </a:defRPr>
-            </a:pPr>
-            <a:r>
-              <a:t>      guide for adopters.</a:t>
-            </a:r>
-          </a:p>
-          <a:p>
-            <a:pPr>
-              <a:lnSpc>
-                <a:spcPts val="2200"/>
-              </a:lnSpc>
-              <a:spcAft>
-                <a:spcPts val="1000"/>
-              </a:spcAft>
-              <a:defRPr sz="2000" b="0">
-                <a:solidFill>
-                  <a:srgbClr val="333333"/>
-                </a:solidFill>
-                <a:latin typeface="Calibri"/>
-              </a:defRPr>
-            </a:pPr>
-            <a:r>
-              <a:t>• Package boundaries: what</a:t>
-            </a:r>
-          </a:p>
-          <a:p>
-            <a:pPr>
-              <a:lnSpc>
-                <a:spcPts val="2200"/>
-              </a:lnSpc>
-              <a:spcAft>
-                <a:spcPts val="1000"/>
-              </a:spcAft>
-              <a:defRPr sz="2000" b="0">
-                <a:solidFill>
-                  <a:srgbClr val="333333"/>
-                </a:solidFill>
-                <a:latin typeface="Calibri"/>
-              </a:defRPr>
-            </a:pPr>
-            <a:r>
-              <a:t>      integrators configure vs what</a:t>
-            </a:r>
-          </a:p>
-          <a:p>
-            <a:pPr>
-              <a:lnSpc>
-                <a:spcPts val="2200"/>
-              </a:lnSpc>
-              <a:spcAft>
-                <a:spcPts val="1000"/>
-              </a:spcAft>
-              <a:defRPr sz="2000" b="0">
-                <a:solidFill>
-                  <a:srgbClr val="333333"/>
-                </a:solidFill>
-                <a:latin typeface="Calibri"/>
-              </a:defRPr>
-            </a:pPr>
-            <a:r>
-              <a:t>      VIP owns internally.</a:t>
-            </a:r>
-          </a:p>
-        </p:txBody>
-      </p:sp>
-      <p:pic>
-        <p:nvPicPr>
-          <p:cNvPr id="4" name="Picture 3" descr="verification_architecture.png"/>
-          <p:cNvPicPr>
-            <a:picLocks noChangeAspect="1"/>
-          </p:cNvPicPr>
-          <p:nvPr/>
-        </p:nvPicPr>
-        <p:blipFill>
-          <a:blip r:embed="rId2"/>
-          <a:stretch>
-            <a:fillRect/>
-          </a:stretch>
-        </p:blipFill>
-        <p:spPr>
-          <a:xfrm>
-            <a:off x="6172200" y="2094547"/>
-            <a:ext cx="5394960" cy="3034665"/>
-          </a:xfrm>
-          <a:prstGeom prst="rect">
-            <a:avLst/>
-          </a:prstGeom>
-        </p:spPr>
-      </p:pic>
-      <p:sp>
-        <p:nvSpPr>
-          <p:cNvPr id="5" name="TextBox 4"/>
           <p:cNvSpPr txBox="1"/>
           <p:nvPr/>
         </p:nvSpPr>
@@ -10586,7 +12401,7 @@
               </a:defRPr>
             </a:pPr>
             <a:r>
-              <a:t>3. Production layout</a:t>
+              <a:t>1. Real-world DUT / subsystem</a:t>
             </a:r>
           </a:p>
         </p:txBody>
@@ -10600,7 +12415,7 @@
         <p:spPr>
           <a:xfrm>
             <a:off x="548640" y="1234440"/>
-            <a:ext cx="11064240" cy="4937760"/>
+            <a:ext cx="5303520" cy="4754880"/>
           </a:xfrm>
           <a:prstGeom prst="rect">
             <a:avLst/>
@@ -10628,7 +12443,7 @@
               </a:defRPr>
             </a:pPr>
             <a:r>
-              <a:t>• Separate `rtl/`, `tb/`, `tests/`, `docs/` with</a:t>
+              <a:t>• Choose DMA-style block,</a:t>
             </a:r>
           </a:p>
           <a:p>
@@ -10647,14 +12462,114 @@
               </a:defRPr>
             </a:pPr>
             <a:r>
-              <a:t>      consistent naming for handoff to another team.</a:t>
-            </a:r>
-          </a:p>
-        </p:txBody>
-      </p:sp>
-      <p:sp>
-        <p:nvSpPr>
-          <p:cNvPr id="4" name="TextBox 3"/>
+              <a:t>      bus/register IP, or protocol DUT</a:t>
+            </a:r>
+          </a:p>
+          <a:p>
+            <a:pPr>
+              <a:lnSpc>
+                <a:spcPts val="2200"/>
+              </a:lnSpc>
+              <a:spcAft>
+                <a:spcPts val="1000"/>
+              </a:spcAft>
+              <a:defRPr sz="2000" b="0">
+                <a:solidFill>
+                  <a:srgbClr val="333333"/>
+                </a:solidFill>
+                <a:latin typeface="Calibri"/>
+              </a:defRPr>
+            </a:pPr>
+            <a:r>
+              <a:t>      (UART/SPI/I2C/AXI-lite style).</a:t>
+            </a:r>
+          </a:p>
+          <a:p>
+            <a:pPr>
+              <a:lnSpc>
+                <a:spcPts val="2200"/>
+              </a:lnSpc>
+              <a:spcAft>
+                <a:spcPts val="1000"/>
+              </a:spcAft>
+              <a:defRPr sz="2000" b="0">
+                <a:solidFill>
+                  <a:srgbClr val="333333"/>
+                </a:solidFill>
+                <a:latin typeface="Calibri"/>
+              </a:defRPr>
+            </a:pPr>
+            <a:r>
+              <a:t>• Document block diagram,</a:t>
+            </a:r>
+          </a:p>
+          <a:p>
+            <a:pPr>
+              <a:lnSpc>
+                <a:spcPts val="2200"/>
+              </a:lnSpc>
+              <a:spcAft>
+                <a:spcPts val="1000"/>
+              </a:spcAft>
+              <a:defRPr sz="2000" b="0">
+                <a:solidFill>
+                  <a:srgbClr val="333333"/>
+                </a:solidFill>
+                <a:latin typeface="Calibri"/>
+              </a:defRPr>
+            </a:pPr>
+            <a:r>
+              <a:t>      clocks/resets, and interface</a:t>
+            </a:r>
+          </a:p>
+          <a:p>
+            <a:pPr>
+              <a:lnSpc>
+                <a:spcPts val="2200"/>
+              </a:lnSpc>
+              <a:spcAft>
+                <a:spcPts val="1000"/>
+              </a:spcAft>
+              <a:defRPr sz="2000" b="0">
+                <a:solidFill>
+                  <a:srgbClr val="333333"/>
+                </a:solidFill>
+                <a:latin typeface="Calibri"/>
+              </a:defRPr>
+            </a:pPr>
+            <a:r>
+              <a:t>      contracts in `PROJECTS.md`.</a:t>
+            </a:r>
+          </a:p>
+        </p:txBody>
+      </p:sp>
+      <p:pic>
+        <p:nvPicPr>
+          <p:cNvPr id="4" name="Picture 3" descr="rtl_architecture.png"/>
+          <p:cNvPicPr>
+            <a:picLocks noChangeAspect="1"/>
+          </p:cNvPicPr>
+          <p:nvPr/>
+        </p:nvPicPr>
+        <p:blipFill>
+          <a:blip r:embed="rId2"/>
+          <a:stretch>
+            <a:fillRect/>
+          </a:stretch>
+        </p:blipFill>
+        <p:spPr>
+          <a:xfrm>
+            <a:off x="6172200" y="2094547"/>
+            <a:ext cx="5394960" cy="3034665"/>
+          </a:xfrm>
+          <a:prstGeom prst="rect">
+            <a:avLst/>
+          </a:prstGeom>
+        </p:spPr>
+      </p:pic>
+      <p:sp>
+        <p:nvSpPr>
+          <p:cNvPr id="5" name="TextBox 4"/>
           <p:cNvSpPr txBox="1"/>
           <p:nvPr/>
         </p:nvSpPr>
